--- a/docs/フィジカルAI勉強会.pptx
+++ b/docs/フィジカルAI勉強会.pptx
@@ -27,9 +27,13 @@
     <p:sldId id="313" r:id="rId28"/>
     <p:sldId id="314" r:id="rId36"/>
     <p:sldId id="315" r:id="rId37"/>
-    <p:sldId id="316" r:id="rId38"/>
-    <p:sldId id="317" r:id="rId18"/>
-    <p:sldId id="318" r:id="rId19"/>
+    <p:sldId id="316" r:id="rId39"/>
+    <p:sldId id="317" r:id="rId40"/>
+    <p:sldId id="318" r:id="rId41"/>
+    <p:sldId id="319" r:id="rId42"/>
+    <p:sldId id="320" r:id="rId38"/>
+    <p:sldId id="321" r:id="rId18"/>
+    <p:sldId id="322" r:id="rId19"/>
   </p:sldIdLst>
   <p:sldSz cx="12192000" cy="6858000"/>
   <p:notesSz cx="6858000" cy="9144000"/>
@@ -894,7 +898,7 @@
           <a:lstStyle/>
           <a:p>
             <a:r>
-              <a:t>約3分。数字は「方向感」として紹介（予測は機関でブレが大きい）。課題4点は導入検討時のチェックリストにもなる。</a:t>
+              <a:t>約3分。数字は「方向感」として紹介（予測は機関でブレが大きい）。国内市場が立ち上げ初期＝SI・ユースケース未確立というのが5章の伏線。課題4点は導入検討時のチェックリストにもなる。</a:t>
             </a:r>
           </a:p>
         </p:txBody>
@@ -964,7 +968,7 @@
           <a:lstStyle/>
           <a:p>
             <a:r>
-              <a:t>約3分。ロボット本体はメーカーの土俵。我々の商機は周辺＝インフラ・連携・データ・運用。顧客の困りごとから逆算する視点を促す。</a:t>
+              <a:t>約3分。ロボット本体はメーカーの土俵。我々の商機は周辺＝インフラ・連携・データ・運用。既存顧客（通信事業者等）の物理作業への展開可能性にも触れる。</a:t>
             </a:r>
           </a:p>
         </p:txBody>
@@ -1034,6 +1038,216 @@
           <a:lstStyle/>
           <a:p>
             <a:r>
+              <a:t>約3分。ポイントは「いきなりフィジカルAIに飛ばない」こと。短期AIOps→中期推論基盤→中長期フィジカルAIと、収益と技術蓄積を両立させる段取り。市場数値は社内技術共有会資料（2026年7月）より。</a:t>
+            </a:r>
+          </a:p>
+        </p:txBody>
+      </p:sp>
+      <p:sp>
+        <p:nvSpPr>
+          <p:cNvPr id="4" name="Slide Number Placeholder 3"/>
+          <p:cNvSpPr>
+            <a:spLocks noGrp="1"/>
+          </p:cNvSpPr>
+          <p:nvPr>
+            <p:ph type="sldNum" idx="5" sz="quarter"/>
+          </p:nvPr>
+        </p:nvSpPr>
+        <p:spPr/>
+      </p:sp>
+    </p:spTree>
+  </p:cSld>
+  <p:clrMapOvr>
+    <a:masterClrMapping/>
+  </p:clrMapOvr>
+</p:notes>
+</file>
+
+<file path=ppt/notesSlides/notesSlide14.xml><?xml version="1.0" encoding="utf-8"?>
+<p:notes xmlns:a="http://schemas.openxmlformats.org/drawingml/2006/main" xmlns:p="http://schemas.openxmlformats.org/presentationml/2006/main" xmlns:r="http://schemas.openxmlformats.org/officeDocument/2006/relationships">
+  <p:cSld>
+    <p:spTree>
+      <p:nvGrpSpPr>
+        <p:cNvPr id="1" name=""/>
+        <p:cNvGrpSpPr/>
+        <p:nvPr/>
+      </p:nvGrpSpPr>
+      <p:grpSpPr>
+        <a:xfrm>
+          <a:off x="0" y="0"/>
+          <a:ext cx="0" cy="0"/>
+          <a:chOff x="0" y="0"/>
+          <a:chExt cx="0" cy="0"/>
+        </a:xfrm>
+      </p:grpSpPr>
+      <p:sp>
+        <p:nvSpPr>
+          <p:cNvPr id="2" name="Slide Image Placeholder 1"/>
+          <p:cNvSpPr>
+            <a:spLocks noGrp="1"/>
+          </p:cNvSpPr>
+          <p:nvPr>
+            <p:ph type="sldImg" idx="2"/>
+          </p:nvPr>
+        </p:nvSpPr>
+        <p:spPr/>
+      </p:sp>
+      <p:sp>
+        <p:nvSpPr>
+          <p:cNvPr id="3" name="Notes Placeholder 2"/>
+          <p:cNvSpPr>
+            <a:spLocks noGrp="1"/>
+          </p:cNvSpPr>
+          <p:nvPr>
+            <p:ph type="body" idx="3" sz="quarter"/>
+          </p:nvPr>
+        </p:nvSpPr>
+        <p:spPr/>
+        <p:txBody>
+          <a:bodyPr/>
+          <a:lstStyle/>
+          <a:p>
+            <a:r>
+              <a:t>約3分。EdgeCortixの「±1ms・10W」はフィジカルAIの文脈で刺さる数字（リアルタイム制御には決定論的低遅延が必須、ロボットは電力制約が厳しい）。ロボットアームデモは実物・動画を見せられると効果大。</a:t>
+            </a:r>
+          </a:p>
+        </p:txBody>
+      </p:sp>
+      <p:sp>
+        <p:nvSpPr>
+          <p:cNvPr id="4" name="Slide Number Placeholder 3"/>
+          <p:cNvSpPr>
+            <a:spLocks noGrp="1"/>
+          </p:cNvSpPr>
+          <p:nvPr>
+            <p:ph type="sldNum" idx="5" sz="quarter"/>
+          </p:nvPr>
+        </p:nvSpPr>
+        <p:spPr/>
+      </p:sp>
+    </p:spTree>
+  </p:cSld>
+  <p:clrMapOvr>
+    <a:masterClrMapping/>
+  </p:clrMapOvr>
+</p:notes>
+</file>
+
+<file path=ppt/notesSlides/notesSlide15.xml><?xml version="1.0" encoding="utf-8"?>
+<p:notes xmlns:a="http://schemas.openxmlformats.org/drawingml/2006/main" xmlns:p="http://schemas.openxmlformats.org/presentationml/2006/main" xmlns:r="http://schemas.openxmlformats.org/officeDocument/2006/relationships">
+  <p:cSld>
+    <p:spTree>
+      <p:nvGrpSpPr>
+        <p:cNvPr id="1" name=""/>
+        <p:cNvGrpSpPr/>
+        <p:nvPr/>
+      </p:nvGrpSpPr>
+      <p:grpSpPr>
+        <a:xfrm>
+          <a:off x="0" y="0"/>
+          <a:ext cx="0" cy="0"/>
+          <a:chOff x="0" y="0"/>
+          <a:chExt cx="0" cy="0"/>
+        </a:xfrm>
+      </p:grpSpPr>
+      <p:sp>
+        <p:nvSpPr>
+          <p:cNvPr id="2" name="Slide Image Placeholder 1"/>
+          <p:cNvSpPr>
+            <a:spLocks noGrp="1"/>
+          </p:cNvSpPr>
+          <p:nvPr>
+            <p:ph type="sldImg" idx="2"/>
+          </p:nvPr>
+        </p:nvSpPr>
+        <p:spPr/>
+      </p:sp>
+      <p:sp>
+        <p:nvSpPr>
+          <p:cNvPr id="3" name="Notes Placeholder 2"/>
+          <p:cNvSpPr>
+            <a:spLocks noGrp="1"/>
+          </p:cNvSpPr>
+          <p:nvPr>
+            <p:ph type="body" idx="3" sz="quarter"/>
+          </p:nvPr>
+        </p:nvSpPr>
+        <p:spPr/>
+        <p:txBody>
+          <a:bodyPr/>
+          <a:lstStyle/>
+          <a:p>
+            <a:r>
+              <a:t>約3分。3章で説明した「シミュレーション（デジタルツイン）×現場のAI」の構図が、そのまま地域課題への応用構想になっていることを指摘すると、勉強会前半とつながって理解が深まる。</a:t>
+            </a:r>
+          </a:p>
+        </p:txBody>
+      </p:sp>
+      <p:sp>
+        <p:nvSpPr>
+          <p:cNvPr id="4" name="Slide Number Placeholder 3"/>
+          <p:cNvSpPr>
+            <a:spLocks noGrp="1"/>
+          </p:cNvSpPr>
+          <p:nvPr>
+            <p:ph type="sldNum" idx="5" sz="quarter"/>
+          </p:nvPr>
+        </p:nvSpPr>
+        <p:spPr/>
+      </p:sp>
+    </p:spTree>
+  </p:cSld>
+  <p:clrMapOvr>
+    <a:masterClrMapping/>
+  </p:clrMapOvr>
+</p:notes>
+</file>
+
+<file path=ppt/notesSlides/notesSlide16.xml><?xml version="1.0" encoding="utf-8"?>
+<p:notes xmlns:a="http://schemas.openxmlformats.org/drawingml/2006/main" xmlns:p="http://schemas.openxmlformats.org/presentationml/2006/main" xmlns:r="http://schemas.openxmlformats.org/officeDocument/2006/relationships">
+  <p:cSld>
+    <p:spTree>
+      <p:nvGrpSpPr>
+        <p:cNvPr id="1" name=""/>
+        <p:cNvGrpSpPr/>
+        <p:nvPr/>
+      </p:nvGrpSpPr>
+      <p:grpSpPr>
+        <a:xfrm>
+          <a:off x="0" y="0"/>
+          <a:ext cx="0" cy="0"/>
+          <a:chOff x="0" y="0"/>
+          <a:chExt cx="0" cy="0"/>
+        </a:xfrm>
+      </p:grpSpPr>
+      <p:sp>
+        <p:nvSpPr>
+          <p:cNvPr id="2" name="Slide Image Placeholder 1"/>
+          <p:cNvSpPr>
+            <a:spLocks noGrp="1"/>
+          </p:cNvSpPr>
+          <p:nvPr>
+            <p:ph type="sldImg" idx="2"/>
+          </p:nvPr>
+        </p:nvSpPr>
+        <p:spPr/>
+      </p:sp>
+      <p:sp>
+        <p:nvSpPr>
+          <p:cNvPr id="3" name="Notes Placeholder 2"/>
+          <p:cNvSpPr>
+            <a:spLocks noGrp="1"/>
+          </p:cNvSpPr>
+          <p:nvPr>
+            <p:ph type="body" idx="3" sz="quarter"/>
+          </p:nvPr>
+        </p:nvSpPr>
+        <p:spPr/>
+        <p:txBody>
+          <a:bodyPr/>
+          <a:lstStyle/>
+          <a:p>
+            <a:r>
               <a:t>約2分でまとめ→残り時間でディスカッション（5〜10分）。問いは1つに絞り、参加者の担当顧客・業界の具体例を引き出す。</a:t>
             </a:r>
           </a:p>
@@ -1104,7 +1318,7 @@
           <a:lstStyle/>
           <a:p>
             <a:r>
-              <a:t>4部構成です。1章で共通認識を作り、2章で世の中の動き、3章で技術を少しだけ深掘り、4章で自分たちの話に引き付けます。</a:t>
+              <a:t>5部構成です。1章で共通認識を作り、2章で世の中の動き、3章で技術を少しだけ深掘り、4章でビジネス目線に引き付け、5章で当社の具体的な取り組みにつなげます。</a:t>
             </a:r>
           </a:p>
         </p:txBody>
@@ -14557,7 +14771,7 @@
                 <a:latin typeface="BIZ UDPGothic"/>
                 <a:ea typeface="BIZ UDPGothic"/>
               </a:rPr>
-              <a:t>4．ビジネスへの示唆・まとめ</a:t>
+              <a:t>4．ビジネスへの示唆</a:t>
             </a:r>
             <a:endParaRPr lang="ja-JP" altLang="en-US"/>
           </a:p>
@@ -14738,7 +14952,7 @@
                 <a:spcPct val="125000"/>
               </a:lnSpc>
               <a:spcAft>
-                <a:spcPts val="1400"/>
+                <a:spcPts val="1200"/>
               </a:spcAft>
             </a:pPr>
             <a:r>
@@ -14759,14 +14973,14 @@
               </a:spcAft>
             </a:pPr>
             <a:r>
-              <a:rPr sz="2400" b="1">
+              <a:rPr sz="2800" b="1">
                 <a:solidFill>
                   <a:srgbClr val="FFFFFF"/>
                 </a:solidFill>
                 <a:latin typeface="BIZ UDPGothic"/>
                 <a:ea typeface="BIZ UDPGothic"/>
               </a:rPr>
-              <a:t>数兆ドル規模</a:t>
+              <a:t>約2,300億円</a:t>
             </a:r>
           </a:p>
           <a:p>
@@ -14775,7 +14989,7 @@
                 <a:spcPct val="125000"/>
               </a:lnSpc>
               <a:spcAft>
-                <a:spcPts val="1400"/>
+                <a:spcPts val="1200"/>
               </a:spcAft>
             </a:pPr>
             <a:r>
@@ -14786,7 +15000,7 @@
                 <a:latin typeface="BIZ UDPGothic"/>
                 <a:ea typeface="BIZ UDPGothic"/>
               </a:rPr>
-              <a:t>長期にはロボットによる労働代替市場が数兆ドル規模に達するとの試算も（Morgan Stanleyほか）</a:t>
+              <a:t>日本のフィジカルAI市場規模（FY30予測、CAGR 36.2%）。市場は立ち上げ初期で、SIやユースケースはまだ確立していない</a:t>
             </a:r>
           </a:p>
           <a:p>
@@ -14803,7 +15017,7 @@
                 <a:latin typeface="BIZ UDPGothic"/>
                 <a:ea typeface="BIZ UDPGothic"/>
               </a:rPr>
-              <a:t>※ 予測値は調査機関によって幅が大きい。金額そのものより「主要金融機関がこぞって巨大市場と見ている」という方向感で捉える</a:t>
+              <a:t>※ 予測値は調査機関によって幅が大きい。金額そのものより「各機関がこぞって高成長市場と見ている」という方向感で捉える</a:t>
             </a:r>
           </a:p>
         </p:txBody>
@@ -15506,8 +15720,8 @@
         </p:nvSpPr>
         <p:spPr>
           <a:xfrm>
-            <a:off x="466344" y="5623560"/>
-            <a:ext cx="11183112" cy="658368"/>
+            <a:off x="466344" y="5577840"/>
+            <a:ext cx="11183112" cy="822960"/>
           </a:xfrm>
           <a:prstGeom prst="roundRect">
             <a:avLst>
@@ -15540,7 +15754,11 @@
           <a:bodyPr rtlCol="0" anchor="ctr" wrap="square" lIns="274320" rIns="109728" tIns="73152" bIns="73152"/>
           <a:lstStyle/>
           <a:p>
-            <a:pPr algn="ctr"/>
+            <a:pPr algn="ctr">
+              <a:spcAft>
+                <a:spcPts val="300"/>
+              </a:spcAft>
+            </a:pPr>
             <a:r>
               <a:rPr sz="1300" b="1">
                 <a:solidFill>
@@ -15550,6 +15768,18 @@
                 <a:ea typeface="BIZ UDPGothic"/>
               </a:rPr>
               <a:t>フィジカルAIの導入は「IT × OT × AI」の統合プロジェクト — SIerの知見がそのまま活きる領域</a:t>
+            </a:r>
+          </a:p>
+          <a:p>
+            <a:r>
+              <a:rPr sz="1100" b="0">
+                <a:solidFill>
+                  <a:srgbClr val="EDF4F9"/>
+                </a:solidFill>
+                <a:latin typeface="BIZ UDPGothic"/>
+                <a:ea typeface="BIZ UDPGothic"/>
+              </a:rPr>
+              <a:t>通信事業者のDC保守・現場作業など、既存顧客の「物理作業」も将来の提案ターゲットになり得る</a:t>
             </a:r>
           </a:p>
         </p:txBody>
@@ -15586,10 +15816,10 @@
       </p:grpSpPr>
       <p:sp>
         <p:nvSpPr>
-          <p:cNvPr id="6" name="タイトル 5">
+          <p:cNvPr id="3" name="タイトル 2">
             <a:extLst>
               <a:ext uri="{FF2B5EF4-FFF2-40B4-BE49-F238E27FC236}">
-                <a16:creationId xmlns:a16="http://schemas.microsoft.com/office/drawing/2014/main" id="{C61704E3-8110-72C8-5476-DAC03CA6A035}"/>
+                <a16:creationId xmlns:a16="http://schemas.microsoft.com/office/drawing/2014/main" id="{1FB691E5-B399-DD24-4591-7C2CFEB52351}"/>
               </a:ext>
             </a:extLst>
           </p:cNvPr>
@@ -15597,7 +15827,7 @@
             <a:spLocks noGrp="1"/>
           </p:cNvSpPr>
           <p:nvPr>
-            <p:ph type="title"/>
+            <p:ph type="ctrTitle"/>
           </p:nvPr>
         </p:nvSpPr>
         <p:spPr/>
@@ -15610,494 +15840,16 @@
                 <a:latin typeface="BIZ UDPGothic"/>
                 <a:ea typeface="BIZ UDPGothic"/>
               </a:rPr>
-              <a:t>まとめ</a:t>
+              <a:t>5．当社の取り組み・まとめ</a:t>
             </a:r>
             <a:endParaRPr lang="ja-JP" altLang="en-US"/>
-          </a:p>
-        </p:txBody>
-      </p:sp>
-      <p:sp>
-        <p:nvSpPr>
-          <p:cNvPr id="8" name="コンテンツ プレースホルダー 7">
-            <a:extLst>
-              <a:ext uri="{FF2B5EF4-FFF2-40B4-BE49-F238E27FC236}">
-                <a16:creationId xmlns:a16="http://schemas.microsoft.com/office/drawing/2014/main" id="{D4C96A99-692B-ED55-FB7F-403B2DCD88C7}"/>
-              </a:ext>
-            </a:extLst>
-          </p:cNvPr>
-          <p:cNvSpPr>
-            <a:spLocks noGrp="1"/>
-          </p:cNvSpPr>
-          <p:nvPr>
-            <p:ph idx="11"/>
-          </p:nvPr>
-        </p:nvSpPr>
-        <p:spPr/>
-        <p:txBody>
-          <a:bodyPr/>
-          <a:lstStyle/>
-          <a:p>
-            <a:r>
-              <a:rPr>
-                <a:latin typeface="BIZ UDPGothic"/>
-                <a:ea typeface="BIZ UDPGothic"/>
-              </a:rPr>
-              <a:t>本日押さえてほしい3点と、ディスカッション</a:t>
-            </a:r>
-            <a:endParaRPr lang="ja-JP" altLang="en-US"/>
-          </a:p>
-        </p:txBody>
-      </p:sp>
-      <p:sp>
-        <p:nvSpPr>
-          <p:cNvPr id="9" name="Oval 8"/>
-          <p:cNvSpPr/>
-          <p:nvPr/>
-        </p:nvSpPr>
-        <p:spPr>
-          <a:xfrm>
-            <a:off x="466344" y="1892807"/>
-            <a:ext cx="475488" cy="475488"/>
-          </a:xfrm>
-          <a:prstGeom prst="ellipse">
-            <a:avLst/>
-          </a:prstGeom>
-          <a:solidFill>
-            <a:srgbClr val="00219B"/>
-          </a:solidFill>
-          <a:ln>
-            <a:noFill/>
-          </a:ln>
-          <a:effectLst/>
-        </p:spPr>
-        <p:style>
-          <a:lnRef idx="1">
-            <a:schemeClr val="accent1"/>
-          </a:lnRef>
-          <a:fillRef idx="3">
-            <a:schemeClr val="accent1"/>
-          </a:fillRef>
-          <a:effectRef idx="2">
-            <a:schemeClr val="accent1"/>
-          </a:effectRef>
-          <a:fontRef idx="minor">
-            <a:schemeClr val="lt1"/>
-          </a:fontRef>
-        </p:style>
-        <p:txBody>
-          <a:bodyPr rtlCol="0" anchor="ctr" wrap="square" lIns="0" rIns="0" tIns="0" bIns="0"/>
-          <a:lstStyle/>
-          <a:p>
-            <a:pPr algn="ctr"/>
-            <a:r>
-              <a:rPr sz="1600" b="1">
-                <a:solidFill>
-                  <a:srgbClr val="FFFFFF"/>
-                </a:solidFill>
-                <a:latin typeface="BIZ UDPGothic"/>
-                <a:ea typeface="BIZ UDPGothic"/>
-              </a:rPr>
-              <a:t>1</a:t>
-            </a:r>
-          </a:p>
-        </p:txBody>
-      </p:sp>
-      <p:sp>
-        <p:nvSpPr>
-          <p:cNvPr id="10" name="Rounded Rectangle 9"/>
-          <p:cNvSpPr/>
-          <p:nvPr/>
-        </p:nvSpPr>
-        <p:spPr>
-          <a:xfrm>
-            <a:off x="1143000" y="1783080"/>
-            <a:ext cx="10506456" cy="1097280"/>
-          </a:xfrm>
-          <a:prstGeom prst="roundRect">
-            <a:avLst>
-              <a:gd name="adj" fmla="val 8000"/>
-            </a:avLst>
-          </a:prstGeom>
-          <a:solidFill>
-            <a:srgbClr val="EDF4F9"/>
-          </a:solidFill>
-          <a:ln>
-            <a:noFill/>
-          </a:ln>
-          <a:effectLst/>
-        </p:spPr>
-        <p:style>
-          <a:lnRef idx="1">
-            <a:schemeClr val="accent1"/>
-          </a:lnRef>
-          <a:fillRef idx="3">
-            <a:schemeClr val="accent1"/>
-          </a:fillRef>
-          <a:effectRef idx="2">
-            <a:schemeClr val="accent1"/>
-          </a:effectRef>
-          <a:fontRef idx="minor">
-            <a:schemeClr val="lt1"/>
-          </a:fontRef>
-        </p:style>
-        <p:txBody>
-          <a:bodyPr rtlCol="0" anchor="t" wrap="square" lIns="219456" rIns="109728" tIns="109728" bIns="73152"/>
-          <a:lstStyle/>
-          <a:p>
-            <a:pPr algn="ctr">
-              <a:spcAft>
-                <a:spcPts val="300"/>
-              </a:spcAft>
-            </a:pPr>
-            <a:r>
-              <a:rPr sz="1450" b="1">
-                <a:solidFill>
-                  <a:srgbClr val="00219B"/>
-                </a:solidFill>
-                <a:latin typeface="BIZ UDPGothic"/>
-                <a:ea typeface="BIZ UDPGothic"/>
-              </a:rPr>
-              <a:t>フィジカルAIは、AI進化の「次章」</a:t>
-            </a:r>
-          </a:p>
-          <a:p>
-            <a:r>
-              <a:rPr sz="1200" b="0">
-                <a:solidFill>
-                  <a:srgbClr val="191919"/>
-                </a:solidFill>
-                <a:latin typeface="BIZ UDPGothic"/>
-                <a:ea typeface="BIZ UDPGothic"/>
-              </a:rPr>
-              <a:t>デジタルの知能が現実世界で働く段階へ。出力がテキストから「動作」に変わる</a:t>
-            </a:r>
-          </a:p>
-        </p:txBody>
-      </p:sp>
-      <p:sp>
-        <p:nvSpPr>
-          <p:cNvPr id="11" name="Oval 10"/>
-          <p:cNvSpPr/>
-          <p:nvPr/>
-        </p:nvSpPr>
-        <p:spPr>
-          <a:xfrm>
-            <a:off x="466344" y="3154680"/>
-            <a:ext cx="475488" cy="475488"/>
-          </a:xfrm>
-          <a:prstGeom prst="ellipse">
-            <a:avLst/>
-          </a:prstGeom>
-          <a:solidFill>
-            <a:srgbClr val="00219B"/>
-          </a:solidFill>
-          <a:ln>
-            <a:noFill/>
-          </a:ln>
-          <a:effectLst/>
-        </p:spPr>
-        <p:style>
-          <a:lnRef idx="1">
-            <a:schemeClr val="accent1"/>
-          </a:lnRef>
-          <a:fillRef idx="3">
-            <a:schemeClr val="accent1"/>
-          </a:fillRef>
-          <a:effectRef idx="2">
-            <a:schemeClr val="accent1"/>
-          </a:effectRef>
-          <a:fontRef idx="minor">
-            <a:schemeClr val="lt1"/>
-          </a:fontRef>
-        </p:style>
-        <p:txBody>
-          <a:bodyPr rtlCol="0" anchor="ctr" wrap="square" lIns="0" rIns="0" tIns="0" bIns="0"/>
-          <a:lstStyle/>
-          <a:p>
-            <a:pPr algn="ctr"/>
-            <a:r>
-              <a:rPr sz="1600" b="1">
-                <a:solidFill>
-                  <a:srgbClr val="FFFFFF"/>
-                </a:solidFill>
-                <a:latin typeface="BIZ UDPGothic"/>
-                <a:ea typeface="BIZ UDPGothic"/>
-              </a:rPr>
-              <a:t>2</a:t>
-            </a:r>
-          </a:p>
-        </p:txBody>
-      </p:sp>
-      <p:sp>
-        <p:nvSpPr>
-          <p:cNvPr id="12" name="Rounded Rectangle 11"/>
-          <p:cNvSpPr/>
-          <p:nvPr/>
-        </p:nvSpPr>
-        <p:spPr>
-          <a:xfrm>
-            <a:off x="1143000" y="3044952"/>
-            <a:ext cx="10506456" cy="1097280"/>
-          </a:xfrm>
-          <a:prstGeom prst="roundRect">
-            <a:avLst>
-              <a:gd name="adj" fmla="val 8000"/>
-            </a:avLst>
-          </a:prstGeom>
-          <a:solidFill>
-            <a:srgbClr val="EDF4F9"/>
-          </a:solidFill>
-          <a:ln>
-            <a:noFill/>
-          </a:ln>
-          <a:effectLst/>
-        </p:spPr>
-        <p:style>
-          <a:lnRef idx="1">
-            <a:schemeClr val="accent1"/>
-          </a:lnRef>
-          <a:fillRef idx="3">
-            <a:schemeClr val="accent1"/>
-          </a:fillRef>
-          <a:effectRef idx="2">
-            <a:schemeClr val="accent1"/>
-          </a:effectRef>
-          <a:fontRef idx="minor">
-            <a:schemeClr val="lt1"/>
-          </a:fontRef>
-        </p:style>
-        <p:txBody>
-          <a:bodyPr rtlCol="0" anchor="t" wrap="square" lIns="219456" rIns="109728" tIns="109728" bIns="73152"/>
-          <a:lstStyle/>
-          <a:p>
-            <a:pPr algn="ctr">
-              <a:spcAft>
-                <a:spcPts val="300"/>
-              </a:spcAft>
-            </a:pPr>
-            <a:r>
-              <a:rPr sz="1450" b="1">
-                <a:solidFill>
-                  <a:srgbClr val="00219B"/>
-                </a:solidFill>
-                <a:latin typeface="BIZ UDPGothic"/>
-                <a:ea typeface="BIZ UDPGothic"/>
-              </a:rPr>
-              <a:t>2025〜26年は実証から初期導入への転換点</a:t>
-            </a:r>
-          </a:p>
-          <a:p>
-            <a:r>
-              <a:rPr sz="1200" b="0">
-                <a:solidFill>
-                  <a:srgbClr val="191919"/>
-                </a:solidFill>
-                <a:latin typeface="BIZ UDPGothic"/>
-                <a:ea typeface="BIZ UDPGothic"/>
-              </a:rPr>
-              <a:t>労働力不足を背景に、製造・物流など環境の整った現場から実装が始まっている</a:t>
-            </a:r>
-          </a:p>
-        </p:txBody>
-      </p:sp>
-      <p:sp>
-        <p:nvSpPr>
-          <p:cNvPr id="13" name="Oval 12"/>
-          <p:cNvSpPr/>
-          <p:nvPr/>
-        </p:nvSpPr>
-        <p:spPr>
-          <a:xfrm>
-            <a:off x="466344" y="4416552"/>
-            <a:ext cx="475488" cy="475488"/>
-          </a:xfrm>
-          <a:prstGeom prst="ellipse">
-            <a:avLst/>
-          </a:prstGeom>
-          <a:solidFill>
-            <a:srgbClr val="00219B"/>
-          </a:solidFill>
-          <a:ln>
-            <a:noFill/>
-          </a:ln>
-          <a:effectLst/>
-        </p:spPr>
-        <p:style>
-          <a:lnRef idx="1">
-            <a:schemeClr val="accent1"/>
-          </a:lnRef>
-          <a:fillRef idx="3">
-            <a:schemeClr val="accent1"/>
-          </a:fillRef>
-          <a:effectRef idx="2">
-            <a:schemeClr val="accent1"/>
-          </a:effectRef>
-          <a:fontRef idx="minor">
-            <a:schemeClr val="lt1"/>
-          </a:fontRef>
-        </p:style>
-        <p:txBody>
-          <a:bodyPr rtlCol="0" anchor="ctr" wrap="square" lIns="0" rIns="0" tIns="0" bIns="0"/>
-          <a:lstStyle/>
-          <a:p>
-            <a:pPr algn="ctr"/>
-            <a:r>
-              <a:rPr sz="1600" b="1">
-                <a:solidFill>
-                  <a:srgbClr val="FFFFFF"/>
-                </a:solidFill>
-                <a:latin typeface="BIZ UDPGothic"/>
-                <a:ea typeface="BIZ UDPGothic"/>
-              </a:rPr>
-              <a:t>3</a:t>
-            </a:r>
-          </a:p>
-        </p:txBody>
-      </p:sp>
-      <p:sp>
-        <p:nvSpPr>
-          <p:cNvPr id="14" name="Rounded Rectangle 13"/>
-          <p:cNvSpPr/>
-          <p:nvPr/>
-        </p:nvSpPr>
-        <p:spPr>
-          <a:xfrm>
-            <a:off x="1143000" y="4306824"/>
-            <a:ext cx="10506456" cy="1097280"/>
-          </a:xfrm>
-          <a:prstGeom prst="roundRect">
-            <a:avLst>
-              <a:gd name="adj" fmla="val 8000"/>
-            </a:avLst>
-          </a:prstGeom>
-          <a:solidFill>
-            <a:srgbClr val="EDF4F9"/>
-          </a:solidFill>
-          <a:ln>
-            <a:noFill/>
-          </a:ln>
-          <a:effectLst/>
-        </p:spPr>
-        <p:style>
-          <a:lnRef idx="1">
-            <a:schemeClr val="accent1"/>
-          </a:lnRef>
-          <a:fillRef idx="3">
-            <a:schemeClr val="accent1"/>
-          </a:fillRef>
-          <a:effectRef idx="2">
-            <a:schemeClr val="accent1"/>
-          </a:effectRef>
-          <a:fontRef idx="minor">
-            <a:schemeClr val="lt1"/>
-          </a:fontRef>
-        </p:style>
-        <p:txBody>
-          <a:bodyPr rtlCol="0" anchor="t" wrap="square" lIns="219456" rIns="109728" tIns="109728" bIns="73152"/>
-          <a:lstStyle/>
-          <a:p>
-            <a:pPr algn="ctr">
-              <a:spcAft>
-                <a:spcPts val="300"/>
-              </a:spcAft>
-            </a:pPr>
-            <a:r>
-              <a:rPr sz="1450" b="1">
-                <a:solidFill>
-                  <a:srgbClr val="00219B"/>
-                </a:solidFill>
-                <a:latin typeface="BIZ UDPGothic"/>
-                <a:ea typeface="BIZ UDPGothic"/>
-              </a:rPr>
-              <a:t>価値の源泉はハードではなく「統合」</a:t>
-            </a:r>
-          </a:p>
-          <a:p>
-            <a:r>
-              <a:rPr sz="1200" b="0">
-                <a:solidFill>
-                  <a:srgbClr val="191919"/>
-                </a:solidFill>
-                <a:latin typeface="BIZ UDPGothic"/>
-                <a:ea typeface="BIZ UDPGothic"/>
-              </a:rPr>
-              <a:t>基盤モデル × シミュレーション × 現場データ。つなぎ込む力が競争力になる</a:t>
-            </a:r>
-          </a:p>
-        </p:txBody>
-      </p:sp>
-      <p:sp>
-        <p:nvSpPr>
-          <p:cNvPr id="15" name="Rounded Rectangle 14"/>
-          <p:cNvSpPr/>
-          <p:nvPr/>
-        </p:nvSpPr>
-        <p:spPr>
-          <a:xfrm>
-            <a:off x="466344" y="5532120"/>
-            <a:ext cx="11183112" cy="777240"/>
-          </a:xfrm>
-          <a:prstGeom prst="roundRect">
-            <a:avLst>
-              <a:gd name="adj" fmla="val 8000"/>
-            </a:avLst>
-          </a:prstGeom>
-          <a:solidFill>
-            <a:srgbClr val="FFFFFF"/>
-          </a:solidFill>
-          <a:ln w="15875">
-            <a:solidFill>
-              <a:srgbClr val="2A65F5"/>
-            </a:solidFill>
-          </a:ln>
-          <a:effectLst/>
-        </p:spPr>
-        <p:style>
-          <a:lnRef idx="1">
-            <a:schemeClr val="accent1"/>
-          </a:lnRef>
-          <a:fillRef idx="3">
-            <a:schemeClr val="accent1"/>
-          </a:fillRef>
-          <a:effectRef idx="2">
-            <a:schemeClr val="accent1"/>
-          </a:effectRef>
-          <a:fontRef idx="minor">
-            <a:schemeClr val="lt1"/>
-          </a:fontRef>
-        </p:style>
-        <p:txBody>
-          <a:bodyPr rtlCol="0" anchor="ctr" wrap="square" lIns="256032" rIns="109728" tIns="73152" bIns="73152"/>
-          <a:lstStyle/>
-          <a:p>
-            <a:pPr algn="ctr"/>
-            <a:r>
-              <a:rPr sz="1300" b="1">
-                <a:solidFill>
-                  <a:srgbClr val="2A65F5"/>
-                </a:solidFill>
-                <a:latin typeface="BIZ UDPGothic"/>
-                <a:ea typeface="BIZ UDPGothic"/>
-              </a:rPr>
-              <a:t>ディスカッション：</a:t>
-            </a:r>
-            <a:r>
-              <a:rPr sz="1300" b="1">
-                <a:solidFill>
-                  <a:srgbClr val="191919"/>
-                </a:solidFill>
-                <a:latin typeface="BIZ UDPGothic"/>
-                <a:ea typeface="BIZ UDPGothic"/>
-              </a:rPr>
-              <a:t>私たちの顧客の現場で、フィジカルAIが最初に価値を出せそうな業務はどこか？</a:t>
-            </a:r>
           </a:p>
         </p:txBody>
       </p:sp>
     </p:spTree>
     <p:extLst>
       <p:ext uri="{BB962C8B-B14F-4D97-AF65-F5344CB8AC3E}">
-        <p14:creationId xmlns:p14="http://schemas.microsoft.com/office/powerpoint/2010/main" val="3061702759"/>
+        <p14:creationId xmlns:p14="http://schemas.microsoft.com/office/powerpoint/2010/main" val="2773518646"/>
       </p:ext>
     </p:extLst>
   </p:cSld>
@@ -16126,10 +15878,10 @@
       </p:grpSpPr>
       <p:sp>
         <p:nvSpPr>
-          <p:cNvPr id="2" name="タイトル 1">
+          <p:cNvPr id="6" name="タイトル 5">
             <a:extLst>
               <a:ext uri="{FF2B5EF4-FFF2-40B4-BE49-F238E27FC236}">
-                <a16:creationId xmlns:a16="http://schemas.microsoft.com/office/drawing/2014/main" id="{5CCA871B-1D64-6422-1825-AE06F8DFBBC1}"/>
+                <a16:creationId xmlns:a16="http://schemas.microsoft.com/office/drawing/2014/main" id="{C61704E3-8110-72C8-5476-DAC03CA6A035}"/>
               </a:ext>
             </a:extLst>
           </p:cNvPr>
@@ -16137,7 +15889,7 @@
             <a:spLocks noGrp="1"/>
           </p:cNvSpPr>
           <p:nvPr>
-            <p:ph type="ctrTitle"/>
+            <p:ph type="title"/>
           </p:nvPr>
         </p:nvSpPr>
         <p:spPr/>
@@ -16145,21 +15897,23 @@
           <a:bodyPr/>
           <a:lstStyle/>
           <a:p>
-            <a:pPr algn="l"/>
-            <a:r>
-              <a:rPr kumimoji="1" lang="en-US" altLang="ja-JP" dirty="0"/>
-              <a:t>End of Document</a:t>
-            </a:r>
-            <a:endParaRPr kumimoji="1" lang="ja-JP" altLang="en-US" dirty="0"/>
-          </a:p>
-        </p:txBody>
-      </p:sp>
-      <p:sp>
-        <p:nvSpPr>
-          <p:cNvPr id="3" name="コンテンツ プレースホルダー 2">
+            <a:r>
+              <a:rPr>
+                <a:latin typeface="BIZ UDPGothic"/>
+                <a:ea typeface="BIZ UDPGothic"/>
+              </a:rPr>
+              <a:t>当社の狙い — 3つの時間軸で市場を取りにいく</a:t>
+            </a:r>
+            <a:endParaRPr lang="ja-JP" altLang="en-US"/>
+          </a:p>
+        </p:txBody>
+      </p:sp>
+      <p:sp>
+        <p:nvSpPr>
+          <p:cNvPr id="8" name="コンテンツ プレースホルダー 7">
             <a:extLst>
               <a:ext uri="{FF2B5EF4-FFF2-40B4-BE49-F238E27FC236}">
-                <a16:creationId xmlns:a16="http://schemas.microsoft.com/office/drawing/2014/main" id="{7644250D-28F8-6DF2-7E14-230A7268ED08}"/>
+                <a16:creationId xmlns:a16="http://schemas.microsoft.com/office/drawing/2014/main" id="{D4C96A99-692B-ED55-FB7F-403B2DCD88C7}"/>
               </a:ext>
             </a:extLst>
           </p:cNvPr>
@@ -16167,81 +15921,522 @@
             <a:spLocks noGrp="1"/>
           </p:cNvSpPr>
           <p:nvPr>
-            <p:ph idx="1"/>
+            <p:ph idx="11"/>
           </p:nvPr>
+        </p:nvSpPr>
+        <p:spPr/>
+        <p:txBody>
+          <a:bodyPr/>
+          <a:lstStyle/>
+          <a:p>
+            <a:r>
+              <a:rPr>
+                <a:latin typeface="BIZ UDPGothic"/>
+                <a:ea typeface="BIZ UDPGothic"/>
+              </a:rPr>
+              <a:t>ネットワークインテグレーションの知見を土台に、AI領域へ段階的に拡大する</a:t>
+            </a:r>
+            <a:endParaRPr lang="ja-JP" altLang="en-US"/>
+          </a:p>
+        </p:txBody>
+      </p:sp>
+      <p:sp>
+        <p:nvSpPr>
+          <p:cNvPr id="9" name="Rounded Rectangle 8"/>
+          <p:cNvSpPr/>
+          <p:nvPr/>
         </p:nvSpPr>
         <p:spPr>
           <a:xfrm>
-            <a:off x="503858" y="4353680"/>
-            <a:ext cx="11184283" cy="784912"/>
+            <a:off x="466344" y="1737360"/>
+            <a:ext cx="3611880" cy="3246120"/>
           </a:xfrm>
+          <a:prstGeom prst="roundRect">
+            <a:avLst>
+              <a:gd name="adj" fmla="val 8000"/>
+            </a:avLst>
+          </a:prstGeom>
+          <a:solidFill>
+            <a:srgbClr val="EDF4F9"/>
+          </a:solidFill>
+          <a:ln>
+            <a:noFill/>
+          </a:ln>
+          <a:effectLst/>
         </p:spPr>
-        <p:txBody>
-          <a:bodyPr/>
+        <p:style>
+          <a:lnRef idx="1">
+            <a:schemeClr val="accent1"/>
+          </a:lnRef>
+          <a:fillRef idx="3">
+            <a:schemeClr val="accent1"/>
+          </a:fillRef>
+          <a:effectRef idx="2">
+            <a:schemeClr val="accent1"/>
+          </a:effectRef>
+          <a:fontRef idx="minor">
+            <a:schemeClr val="lt1"/>
+          </a:fontRef>
+        </p:style>
+        <p:txBody>
+          <a:bodyPr rtlCol="0" anchor="t" wrap="square" lIns="201168" rIns="182880" tIns="146304" bIns="73152"/>
           <a:lstStyle/>
           <a:p>
-            <a:r>
-              <a:rPr lang="ja-JP" altLang="en-US" dirty="0"/>
-              <a:t>双日テックイノベーション、双日テックイノベーションのロゴは、双日テックイノベーション株式会社の登録商標です。 </a:t>
-            </a:r>
-            <a:endParaRPr lang="en-US" altLang="ja-JP" dirty="0"/>
-          </a:p>
-          <a:p>
-            <a:r>
-              <a:rPr lang="ja-JP" altLang="en-US" dirty="0"/>
-              <a:t>その他記載されている全ての商標、サービスマーク、登録商標、登録サービスマークは、各所有者に所有権があります。 </a:t>
-            </a:r>
-            <a:endParaRPr lang="en-US" altLang="ja-JP" dirty="0"/>
-          </a:p>
-          <a:p>
-            <a:endParaRPr lang="en-US" altLang="ja-JP" dirty="0"/>
-          </a:p>
-          <a:p>
-            <a:r>
-              <a:rPr lang="ja-JP" altLang="en-US" dirty="0"/>
-              <a:t>本書記載の仕様はすべて予告なく変更される場合があります。</a:t>
-            </a:r>
-            <a:endParaRPr lang="en-US" altLang="ja-JP" dirty="0"/>
-          </a:p>
-          <a:p>
-            <a:r>
-              <a:rPr lang="ja-JP" altLang="en-US" dirty="0"/>
-              <a:t>本書の記載内容に誤りがあった場合、 あるいは記載内容を更新する義務が生じた場合も、双日テックイノベーションは一切責任を負いません。 </a:t>
-            </a:r>
-            <a:endParaRPr lang="en-US" altLang="ja-JP" dirty="0"/>
-          </a:p>
-          <a:p>
-            <a:r>
-              <a:rPr lang="ja-JP" altLang="en-US" dirty="0"/>
-              <a:t>双日テックイノベーションは、本書を予告無く変更、修正、または改訂する権利を有します。 </a:t>
-            </a:r>
-            <a:endParaRPr lang="en-US" altLang="ja-JP" dirty="0"/>
-          </a:p>
-          <a:p>
-            <a:r>
-              <a:rPr lang="ja-JP" altLang="en-US" dirty="0"/>
-              <a:t>本書に記載されている内容を無断で複写、複製することを禁じます。</a:t>
-            </a:r>
-            <a:endParaRPr lang="en-US" altLang="ja-JP" dirty="0"/>
-          </a:p>
-          <a:p>
-            <a:r>
-              <a:rPr lang="ja-JP" altLang="en-US" dirty="0"/>
-              <a:t> </a:t>
-            </a:r>
-            <a:endParaRPr lang="en-US" altLang="ja-JP" dirty="0"/>
-          </a:p>
-          <a:p>
-            <a:r>
-              <a:rPr lang="ja-JP" altLang="en-US" dirty="0"/>
-              <a:t>記載の価格は参考価格となり、ご検討の際にはお見積りのご依頼をお願いいたします。 </a:t>
-            </a:r>
-            <a:endParaRPr lang="en-US" altLang="ja-JP" dirty="0"/>
-          </a:p>
-          <a:p>
-            <a:r>
-              <a:rPr lang="ja-JP" altLang="en-US" dirty="0"/>
-              <a:t>為替変更やメーカーの価格改定により予告なく変更することがあります。</a:t>
+            <a:pPr algn="ctr">
+              <a:spcAft>
+                <a:spcPts val="200"/>
+              </a:spcAft>
+            </a:pPr>
+            <a:r>
+              <a:rPr sz="1200" b="1">
+                <a:solidFill>
+                  <a:srgbClr val="2A65F5"/>
+                </a:solidFill>
+                <a:latin typeface="BIZ UDPGothic"/>
+                <a:ea typeface="BIZ UDPGothic"/>
+              </a:rPr>
+              <a:t>短期</a:t>
+            </a:r>
+          </a:p>
+          <a:p>
+            <a:pPr algn="ctr">
+              <a:spcAft>
+                <a:spcPts val="800"/>
+              </a:spcAft>
+            </a:pPr>
+            <a:r>
+              <a:rPr sz="1450" b="1">
+                <a:solidFill>
+                  <a:srgbClr val="00219B"/>
+                </a:solidFill>
+                <a:latin typeface="BIZ UDPGothic"/>
+                <a:ea typeface="BIZ UDPGothic"/>
+              </a:rPr>
+              <a:t>AIOps・運用自動化</a:t>
+            </a:r>
+          </a:p>
+          <a:p>
+            <a:pPr marL="182880" indent="-182880">
+              <a:lnSpc>
+                <a:spcPct val="115000"/>
+              </a:lnSpc>
+              <a:spcAft>
+                <a:spcPts val="600"/>
+              </a:spcAft>
+              <a:buFont typeface="BIZ UDPGothic"/>
+              <a:buChar char="・"/>
+            </a:pPr>
+            <a:r>
+              <a:rPr sz="1150" b="0">
+                <a:solidFill>
+                  <a:srgbClr val="191919"/>
+                </a:solidFill>
+                <a:latin typeface="BIZ UDPGothic"/>
+                <a:ea typeface="BIZ UDPGothic"/>
+              </a:rPr>
+              <a:t>市場はCAGR約20%で安定成長</a:t>
+            </a:r>
+          </a:p>
+          <a:p>
+            <a:pPr marL="182880" indent="-182880">
+              <a:lnSpc>
+                <a:spcPct val="115000"/>
+              </a:lnSpc>
+              <a:spcAft>
+                <a:spcPts val="600"/>
+              </a:spcAft>
+              <a:buFont typeface="BIZ UDPGothic"/>
+              <a:buChar char="・"/>
+            </a:pPr>
+            <a:r>
+              <a:rPr sz="1150" b="0">
+                <a:solidFill>
+                  <a:srgbClr val="191919"/>
+                </a:solidFill>
+                <a:latin typeface="BIZ UDPGothic"/>
+                <a:ea typeface="BIZ UDPGothic"/>
+              </a:rPr>
+              <a:t>キャリアNW運用の知見を活かし、人手不足・運用高度化ニーズに応える</a:t>
+            </a:r>
+          </a:p>
+          <a:p>
+            <a:pPr marL="182880" indent="-182880">
+              <a:lnSpc>
+                <a:spcPct val="115000"/>
+              </a:lnSpc>
+              <a:spcAft>
+                <a:spcPts val="600"/>
+              </a:spcAft>
+              <a:buFont typeface="BIZ UDPGothic"/>
+              <a:buChar char="・"/>
+            </a:pPr>
+            <a:r>
+              <a:rPr sz="1150" b="0">
+                <a:solidFill>
+                  <a:srgbClr val="191919"/>
+                </a:solidFill>
+                <a:latin typeface="BIZ UDPGothic"/>
+                <a:ea typeface="BIZ UDPGothic"/>
+              </a:rPr>
+              <a:t>「販社かつ開発まで担える」企業は少なく、商圏獲得の見込みが高い</a:t>
+            </a:r>
+          </a:p>
+        </p:txBody>
+      </p:sp>
+      <p:sp>
+        <p:nvSpPr>
+          <p:cNvPr id="10" name="Rounded Rectangle 9"/>
+          <p:cNvSpPr/>
+          <p:nvPr/>
+        </p:nvSpPr>
+        <p:spPr>
+          <a:xfrm>
+            <a:off x="4251960" y="1737360"/>
+            <a:ext cx="3611880" cy="3246120"/>
+          </a:xfrm>
+          <a:prstGeom prst="roundRect">
+            <a:avLst>
+              <a:gd name="adj" fmla="val 8000"/>
+            </a:avLst>
+          </a:prstGeom>
+          <a:solidFill>
+            <a:srgbClr val="EDF4F9"/>
+          </a:solidFill>
+          <a:ln>
+            <a:noFill/>
+          </a:ln>
+          <a:effectLst/>
+        </p:spPr>
+        <p:style>
+          <a:lnRef idx="1">
+            <a:schemeClr val="accent1"/>
+          </a:lnRef>
+          <a:fillRef idx="3">
+            <a:schemeClr val="accent1"/>
+          </a:fillRef>
+          <a:effectRef idx="2">
+            <a:schemeClr val="accent1"/>
+          </a:effectRef>
+          <a:fontRef idx="minor">
+            <a:schemeClr val="lt1"/>
+          </a:fontRef>
+        </p:style>
+        <p:txBody>
+          <a:bodyPr rtlCol="0" anchor="t" wrap="square" lIns="201168" rIns="182880" tIns="146304" bIns="73152"/>
+          <a:lstStyle/>
+          <a:p>
+            <a:pPr algn="ctr">
+              <a:spcAft>
+                <a:spcPts val="200"/>
+              </a:spcAft>
+            </a:pPr>
+            <a:r>
+              <a:rPr sz="1200" b="1">
+                <a:solidFill>
+                  <a:srgbClr val="2A65F5"/>
+                </a:solidFill>
+                <a:latin typeface="BIZ UDPGothic"/>
+                <a:ea typeface="BIZ UDPGothic"/>
+              </a:rPr>
+              <a:t>中期</a:t>
+            </a:r>
+          </a:p>
+          <a:p>
+            <a:pPr algn="ctr">
+              <a:spcAft>
+                <a:spcPts val="800"/>
+              </a:spcAft>
+            </a:pPr>
+            <a:r>
+              <a:rPr sz="1450" b="1">
+                <a:solidFill>
+                  <a:srgbClr val="00219B"/>
+                </a:solidFill>
+                <a:latin typeface="BIZ UDPGothic"/>
+                <a:ea typeface="BIZ UDPGothic"/>
+              </a:rPr>
+              <a:t>推論基盤（オンプレ生成AI）</a:t>
+            </a:r>
+          </a:p>
+          <a:p>
+            <a:pPr marL="182880" indent="-182880">
+              <a:lnSpc>
+                <a:spcPct val="115000"/>
+              </a:lnSpc>
+              <a:spcAft>
+                <a:spcPts val="600"/>
+              </a:spcAft>
+              <a:buFont typeface="BIZ UDPGothic"/>
+              <a:buChar char="・"/>
+            </a:pPr>
+            <a:r>
+              <a:rPr sz="1150" b="0">
+                <a:solidFill>
+                  <a:srgbClr val="191919"/>
+                </a:solidFill>
+                <a:latin typeface="BIZ UDPGothic"/>
+                <a:ea typeface="BIZ UDPGothic"/>
+              </a:rPr>
+              <a:t>国内生成AI市場はFY30に約1.7兆円（CAGR 47%）</a:t>
+            </a:r>
+          </a:p>
+          <a:p>
+            <a:pPr marL="182880" indent="-182880">
+              <a:lnSpc>
+                <a:spcPct val="115000"/>
+              </a:lnSpc>
+              <a:spcAft>
+                <a:spcPts val="600"/>
+              </a:spcAft>
+              <a:buFont typeface="BIZ UDPGothic"/>
+              <a:buChar char="・"/>
+            </a:pPr>
+            <a:r>
+              <a:rPr sz="1150" b="0">
+                <a:solidFill>
+                  <a:srgbClr val="191919"/>
+                </a:solidFill>
+                <a:latin typeface="BIZ UDPGothic"/>
+                <a:ea typeface="BIZ UDPGothic"/>
+              </a:rPr>
+              <a:t>オンプレ比率3割とすると約5,000億円規模と推計</a:t>
+            </a:r>
+          </a:p>
+          <a:p>
+            <a:pPr marL="182880" indent="-182880">
+              <a:lnSpc>
+                <a:spcPct val="115000"/>
+              </a:lnSpc>
+              <a:spcAft>
+                <a:spcPts val="600"/>
+              </a:spcAft>
+              <a:buFont typeface="BIZ UDPGothic"/>
+              <a:buChar char="・"/>
+            </a:pPr>
+            <a:r>
+              <a:rPr sz="1150" b="0">
+                <a:solidFill>
+                  <a:srgbClr val="191919"/>
+                </a:solidFill>
+                <a:latin typeface="BIZ UDPGothic"/>
+                <a:ea typeface="BIZ UDPGothic"/>
+              </a:rPr>
+              <a:t>データ主権・コスト・低遅延の要求から、オンプレ・エッジ推論の構築需要が拡大</a:t>
+            </a:r>
+          </a:p>
+        </p:txBody>
+      </p:sp>
+      <p:sp>
+        <p:nvSpPr>
+          <p:cNvPr id="11" name="Rounded Rectangle 10"/>
+          <p:cNvSpPr/>
+          <p:nvPr/>
+        </p:nvSpPr>
+        <p:spPr>
+          <a:xfrm>
+            <a:off x="8037576" y="1737360"/>
+            <a:ext cx="3611880" cy="3246120"/>
+          </a:xfrm>
+          <a:prstGeom prst="roundRect">
+            <a:avLst>
+              <a:gd name="adj" fmla="val 8000"/>
+            </a:avLst>
+          </a:prstGeom>
+          <a:solidFill>
+            <a:srgbClr val="EDF4F9"/>
+          </a:solidFill>
+          <a:ln>
+            <a:noFill/>
+          </a:ln>
+          <a:effectLst/>
+        </p:spPr>
+        <p:style>
+          <a:lnRef idx="1">
+            <a:schemeClr val="accent1"/>
+          </a:lnRef>
+          <a:fillRef idx="3">
+            <a:schemeClr val="accent1"/>
+          </a:fillRef>
+          <a:effectRef idx="2">
+            <a:schemeClr val="accent1"/>
+          </a:effectRef>
+          <a:fontRef idx="minor">
+            <a:schemeClr val="lt1"/>
+          </a:fontRef>
+        </p:style>
+        <p:txBody>
+          <a:bodyPr rtlCol="0" anchor="t" wrap="square" lIns="201168" rIns="182880" tIns="146304" bIns="73152"/>
+          <a:lstStyle/>
+          <a:p>
+            <a:pPr algn="ctr">
+              <a:spcAft>
+                <a:spcPts val="200"/>
+              </a:spcAft>
+            </a:pPr>
+            <a:r>
+              <a:rPr sz="1200" b="1">
+                <a:solidFill>
+                  <a:srgbClr val="2A65F5"/>
+                </a:solidFill>
+                <a:latin typeface="BIZ UDPGothic"/>
+                <a:ea typeface="BIZ UDPGothic"/>
+              </a:rPr>
+              <a:t>中長期</a:t>
+            </a:r>
+          </a:p>
+          <a:p>
+            <a:pPr algn="ctr">
+              <a:spcAft>
+                <a:spcPts val="800"/>
+              </a:spcAft>
+            </a:pPr>
+            <a:r>
+              <a:rPr sz="1450" b="1">
+                <a:solidFill>
+                  <a:srgbClr val="00219B"/>
+                </a:solidFill>
+                <a:latin typeface="BIZ UDPGothic"/>
+                <a:ea typeface="BIZ UDPGothic"/>
+              </a:rPr>
+              <a:t>フィジカルAI・AIグリッド</a:t>
+            </a:r>
+          </a:p>
+          <a:p>
+            <a:pPr marL="182880" indent="-182880">
+              <a:lnSpc>
+                <a:spcPct val="115000"/>
+              </a:lnSpc>
+              <a:spcAft>
+                <a:spcPts val="600"/>
+              </a:spcAft>
+              <a:buFont typeface="BIZ UDPGothic"/>
+              <a:buChar char="・"/>
+            </a:pPr>
+            <a:r>
+              <a:rPr sz="1150" b="0">
+                <a:solidFill>
+                  <a:srgbClr val="191919"/>
+                </a:solidFill>
+                <a:latin typeface="BIZ UDPGothic"/>
+                <a:ea typeface="BIZ UDPGothic"/>
+              </a:rPr>
+              <a:t>国内フィジカルAI市場はFY30に約2,300億円（CAGR 36.2%）</a:t>
+            </a:r>
+          </a:p>
+          <a:p>
+            <a:pPr marL="182880" indent="-182880">
+              <a:lnSpc>
+                <a:spcPct val="115000"/>
+              </a:lnSpc>
+              <a:spcAft>
+                <a:spcPts val="600"/>
+              </a:spcAft>
+              <a:buFont typeface="BIZ UDPGothic"/>
+              <a:buChar char="・"/>
+            </a:pPr>
+            <a:r>
+              <a:rPr sz="1150" b="0">
+                <a:solidFill>
+                  <a:srgbClr val="191919"/>
+                </a:solidFill>
+                <a:latin typeface="BIZ UDPGothic"/>
+                <a:ea typeface="BIZ UDPGothic"/>
+              </a:rPr>
+              <a:t>GPU・ロボット本体は激戦区だが、SI・ユースケースは未確立</a:t>
+            </a:r>
+          </a:p>
+          <a:p>
+            <a:pPr marL="182880" indent="-182880">
+              <a:lnSpc>
+                <a:spcPct val="115000"/>
+              </a:lnSpc>
+              <a:spcAft>
+                <a:spcPts val="600"/>
+              </a:spcAft>
+              <a:buFont typeface="BIZ UDPGothic"/>
+              <a:buChar char="・"/>
+            </a:pPr>
+            <a:r>
+              <a:rPr sz="1150" b="0">
+                <a:solidFill>
+                  <a:srgbClr val="191919"/>
+                </a:solidFill>
+                <a:latin typeface="BIZ UDPGothic"/>
+                <a:ea typeface="BIZ UDPGothic"/>
+              </a:rPr>
+              <a:t>立ち上げ期の今なら、エコシステム構築から大手とも組める</a:t>
+            </a:r>
+          </a:p>
+        </p:txBody>
+      </p:sp>
+      <p:sp>
+        <p:nvSpPr>
+          <p:cNvPr id="12" name="Rounded Rectangle 11"/>
+          <p:cNvSpPr/>
+          <p:nvPr/>
+        </p:nvSpPr>
+        <p:spPr>
+          <a:xfrm>
+            <a:off x="466344" y="5257800"/>
+            <a:ext cx="11183112" cy="960120"/>
+          </a:xfrm>
+          <a:prstGeom prst="roundRect">
+            <a:avLst>
+              <a:gd name="adj" fmla="val 8000"/>
+            </a:avLst>
+          </a:prstGeom>
+          <a:solidFill>
+            <a:srgbClr val="00219B"/>
+          </a:solidFill>
+          <a:ln>
+            <a:noFill/>
+          </a:ln>
+          <a:effectLst/>
+        </p:spPr>
+        <p:style>
+          <a:lnRef idx="1">
+            <a:schemeClr val="accent1"/>
+          </a:lnRef>
+          <a:fillRef idx="3">
+            <a:schemeClr val="accent1"/>
+          </a:fillRef>
+          <a:effectRef idx="2">
+            <a:schemeClr val="accent1"/>
+          </a:effectRef>
+          <a:fontRef idx="minor">
+            <a:schemeClr val="lt1"/>
+          </a:fontRef>
+        </p:style>
+        <p:txBody>
+          <a:bodyPr rtlCol="0" anchor="ctr" wrap="square" lIns="274320" rIns="109728" tIns="73152" bIns="73152"/>
+          <a:lstStyle/>
+          <a:p>
+            <a:pPr algn="ctr">
+              <a:spcAft>
+                <a:spcPts val="300"/>
+              </a:spcAft>
+            </a:pPr>
+            <a:r>
+              <a:rPr sz="1300" b="1">
+                <a:solidFill>
+                  <a:srgbClr val="FFFFFF"/>
+                </a:solidFill>
+                <a:latin typeface="BIZ UDPGothic"/>
+                <a:ea typeface="BIZ UDPGothic"/>
+              </a:rPr>
+              <a:t>技術獲得のステップ：基礎技術（Kubernetes・Python・IaC）→ AIOps → 推論基盤 → AIグリッド・フィジカルAI</a:t>
+            </a:r>
+          </a:p>
+          <a:p>
+            <a:r>
+              <a:rPr sz="1100" b="0">
+                <a:solidFill>
+                  <a:srgbClr val="EDF4F9"/>
+                </a:solidFill>
+                <a:latin typeface="BIZ UDPGothic"/>
+                <a:ea typeface="BIZ UDPGothic"/>
+              </a:rPr>
+              <a:t>足元の商圏で稼ぎながら技術を積み上げ、フィジカルAIの立ち上がりに間に合わせる段階的アプローチ</a:t>
             </a:r>
           </a:p>
         </p:txBody>
@@ -16249,7 +16444,7 @@
     </p:spTree>
     <p:extLst>
       <p:ext uri="{BB962C8B-B14F-4D97-AF65-F5344CB8AC3E}">
-        <p14:creationId xmlns:p14="http://schemas.microsoft.com/office/powerpoint/2010/main" val="3507851067"/>
+        <p14:creationId xmlns:p14="http://schemas.microsoft.com/office/powerpoint/2010/main" val="3061702759"/>
       </p:ext>
     </p:extLst>
   </p:cSld>
@@ -16276,10 +16471,485 @@
           <a:chExt cx="0" cy="0"/>
         </a:xfrm>
       </p:grpSpPr>
+      <p:sp>
+        <p:nvSpPr>
+          <p:cNvPr id="6" name="タイトル 5">
+            <a:extLst>
+              <a:ext uri="{FF2B5EF4-FFF2-40B4-BE49-F238E27FC236}">
+                <a16:creationId xmlns:a16="http://schemas.microsoft.com/office/drawing/2014/main" id="{C61704E3-8110-72C8-5476-DAC03CA6A035}"/>
+              </a:ext>
+            </a:extLst>
+          </p:cNvPr>
+          <p:cNvSpPr>
+            <a:spLocks noGrp="1"/>
+          </p:cNvSpPr>
+          <p:nvPr>
+            <p:ph type="title"/>
+          </p:nvPr>
+        </p:nvSpPr>
+        <p:spPr/>
+        <p:txBody>
+          <a:bodyPr/>
+          <a:lstStyle/>
+          <a:p>
+            <a:r>
+              <a:rPr>
+                <a:latin typeface="BIZ UDPGothic"/>
+                <a:ea typeface="BIZ UDPGothic"/>
+              </a:rPr>
+              <a:t>検証で積み上げてきた技術アセット</a:t>
+            </a:r>
+            <a:endParaRPr lang="ja-JP" altLang="en-US"/>
+          </a:p>
+        </p:txBody>
+      </p:sp>
+      <p:sp>
+        <p:nvSpPr>
+          <p:cNvPr id="8" name="コンテンツ プレースホルダー 7">
+            <a:extLst>
+              <a:ext uri="{FF2B5EF4-FFF2-40B4-BE49-F238E27FC236}">
+                <a16:creationId xmlns:a16="http://schemas.microsoft.com/office/drawing/2014/main" id="{D4C96A99-692B-ED55-FB7F-403B2DCD88C7}"/>
+              </a:ext>
+            </a:extLst>
+          </p:cNvPr>
+          <p:cNvSpPr>
+            <a:spLocks noGrp="1"/>
+          </p:cNvSpPr>
+          <p:nvPr>
+            <p:ph idx="11"/>
+          </p:nvPr>
+        </p:nvSpPr>
+        <p:spPr/>
+        <p:txBody>
+          <a:bodyPr/>
+          <a:lstStyle/>
+          <a:p>
+            <a:r>
+              <a:rPr>
+                <a:latin typeface="BIZ UDPGothic"/>
+                <a:ea typeface="BIZ UDPGothic"/>
+              </a:rPr>
+              <a:t>机上調査ではなく、実機検証・パッケージ化まで進めている</a:t>
+            </a:r>
+            <a:endParaRPr lang="ja-JP" altLang="en-US"/>
+          </a:p>
+        </p:txBody>
+      </p:sp>
+      <p:sp>
+        <p:nvSpPr>
+          <p:cNvPr id="9" name="Rounded Rectangle 8"/>
+          <p:cNvSpPr/>
+          <p:nvPr/>
+        </p:nvSpPr>
+        <p:spPr>
+          <a:xfrm>
+            <a:off x="466344" y="1737360"/>
+            <a:ext cx="5504688" cy="2011680"/>
+          </a:xfrm>
+          <a:prstGeom prst="roundRect">
+            <a:avLst>
+              <a:gd name="adj" fmla="val 8000"/>
+            </a:avLst>
+          </a:prstGeom>
+          <a:solidFill>
+            <a:srgbClr val="EDF4F9"/>
+          </a:solidFill>
+          <a:ln>
+            <a:noFill/>
+          </a:ln>
+          <a:effectLst/>
+        </p:spPr>
+        <p:style>
+          <a:lnRef idx="1">
+            <a:schemeClr val="accent1"/>
+          </a:lnRef>
+          <a:fillRef idx="3">
+            <a:schemeClr val="accent1"/>
+          </a:fillRef>
+          <a:effectRef idx="2">
+            <a:schemeClr val="accent1"/>
+          </a:effectRef>
+          <a:fontRef idx="minor">
+            <a:schemeClr val="lt1"/>
+          </a:fontRef>
+        </p:style>
+        <p:txBody>
+          <a:bodyPr rtlCol="0" anchor="t" wrap="square" lIns="201168" rIns="182880" tIns="137160" bIns="73152"/>
+          <a:lstStyle/>
+          <a:p>
+            <a:pPr algn="ctr">
+              <a:spcAft>
+                <a:spcPts val="200"/>
+              </a:spcAft>
+            </a:pPr>
+            <a:r>
+              <a:rPr sz="1100" b="1">
+                <a:solidFill>
+                  <a:srgbClr val="A7ACAF"/>
+                </a:solidFill>
+                <a:latin typeface="BIZ UDPGothic"/>
+                <a:ea typeface="BIZ UDPGothic"/>
+              </a:rPr>
+              <a:t>オンプレ生成AI基盤パッケージ</a:t>
+            </a:r>
+          </a:p>
+          <a:p>
+            <a:pPr algn="ctr">
+              <a:spcAft>
+                <a:spcPts val="600"/>
+              </a:spcAft>
+            </a:pPr>
+            <a:r>
+              <a:rPr sz="1500" b="1">
+                <a:solidFill>
+                  <a:srgbClr val="00219B"/>
+                </a:solidFill>
+                <a:latin typeface="BIZ UDPGothic"/>
+                <a:ea typeface="BIZ UDPGothic"/>
+              </a:rPr>
+              <a:t>STech I-AI-Innovation Suite</a:t>
+            </a:r>
+          </a:p>
+          <a:p>
+            <a:pPr>
+              <a:lnSpc>
+                <a:spcPct val="120000"/>
+              </a:lnSpc>
+            </a:pPr>
+            <a:r>
+              <a:rPr sz="1150" b="0">
+                <a:solidFill>
+                  <a:srgbClr val="191919"/>
+                </a:solidFill>
+                <a:latin typeface="BIZ UDPGothic"/>
+                <a:ea typeface="BIZ UDPGothic"/>
+              </a:rPr>
+              <a:t>neoAI社LLM × HPEサーバーの事前検証済み構成。基盤SIに加え、伴走支援・AI教育まで一貫提供</a:t>
+            </a:r>
+          </a:p>
+        </p:txBody>
+      </p:sp>
+      <p:sp>
+        <p:nvSpPr>
+          <p:cNvPr id="10" name="Rounded Rectangle 9"/>
+          <p:cNvSpPr/>
+          <p:nvPr/>
+        </p:nvSpPr>
+        <p:spPr>
+          <a:xfrm>
+            <a:off x="6144768" y="1737360"/>
+            <a:ext cx="5504688" cy="2011680"/>
+          </a:xfrm>
+          <a:prstGeom prst="roundRect">
+            <a:avLst>
+              <a:gd name="adj" fmla="val 8000"/>
+            </a:avLst>
+          </a:prstGeom>
+          <a:solidFill>
+            <a:srgbClr val="EDF4F9"/>
+          </a:solidFill>
+          <a:ln>
+            <a:noFill/>
+          </a:ln>
+          <a:effectLst/>
+        </p:spPr>
+        <p:style>
+          <a:lnRef idx="1">
+            <a:schemeClr val="accent1"/>
+          </a:lnRef>
+          <a:fillRef idx="3">
+            <a:schemeClr val="accent1"/>
+          </a:fillRef>
+          <a:effectRef idx="2">
+            <a:schemeClr val="accent1"/>
+          </a:effectRef>
+          <a:fontRef idx="minor">
+            <a:schemeClr val="lt1"/>
+          </a:fontRef>
+        </p:style>
+        <p:txBody>
+          <a:bodyPr rtlCol="0" anchor="t" wrap="square" lIns="201168" rIns="182880" tIns="137160" bIns="73152"/>
+          <a:lstStyle/>
+          <a:p>
+            <a:pPr algn="ctr">
+              <a:spcAft>
+                <a:spcPts val="200"/>
+              </a:spcAft>
+            </a:pPr>
+            <a:r>
+              <a:rPr sz="1100" b="1">
+                <a:solidFill>
+                  <a:srgbClr val="A7ACAF"/>
+                </a:solidFill>
+                <a:latin typeface="BIZ UDPGothic"/>
+                <a:ea typeface="BIZ UDPGothic"/>
+              </a:rPr>
+              <a:t>エッジAIアクセラレータ実機検証</a:t>
+            </a:r>
+          </a:p>
+          <a:p>
+            <a:pPr algn="ctr">
+              <a:spcAft>
+                <a:spcPts val="600"/>
+              </a:spcAft>
+            </a:pPr>
+            <a:r>
+              <a:rPr sz="1500" b="1">
+                <a:solidFill>
+                  <a:srgbClr val="00219B"/>
+                </a:solidFill>
+                <a:latin typeface="BIZ UDPGothic"/>
+                <a:ea typeface="BIZ UDPGothic"/>
+              </a:rPr>
+              <a:t>EdgeCortix SAKURA-II</a:t>
+            </a:r>
+          </a:p>
+          <a:p>
+            <a:pPr>
+              <a:lnSpc>
+                <a:spcPct val="120000"/>
+              </a:lnSpc>
+            </a:pPr>
+            <a:r>
+              <a:rPr sz="1150" b="0">
+                <a:solidFill>
+                  <a:srgbClr val="191919"/>
+                </a:solidFill>
+                <a:latin typeface="BIZ UDPGothic"/>
+                <a:ea typeface="BIZ UDPGothic"/>
+              </a:rPr>
+              <a:t>データフロー型NPUで、遅延ゆらぎ±1ms未満・平均消費電力10W未満を実証。ロボット・VLA・自動運転などフィジカルAI領域に適合</a:t>
+            </a:r>
+          </a:p>
+        </p:txBody>
+      </p:sp>
+      <p:sp>
+        <p:nvSpPr>
+          <p:cNvPr id="11" name="Rounded Rectangle 10"/>
+          <p:cNvSpPr/>
+          <p:nvPr/>
+        </p:nvSpPr>
+        <p:spPr>
+          <a:xfrm>
+            <a:off x="466344" y="3931920"/>
+            <a:ext cx="5504688" cy="2011680"/>
+          </a:xfrm>
+          <a:prstGeom prst="roundRect">
+            <a:avLst>
+              <a:gd name="adj" fmla="val 8000"/>
+            </a:avLst>
+          </a:prstGeom>
+          <a:solidFill>
+            <a:srgbClr val="EDF4F9"/>
+          </a:solidFill>
+          <a:ln>
+            <a:noFill/>
+          </a:ln>
+          <a:effectLst/>
+        </p:spPr>
+        <p:style>
+          <a:lnRef idx="1">
+            <a:schemeClr val="accent1"/>
+          </a:lnRef>
+          <a:fillRef idx="3">
+            <a:schemeClr val="accent1"/>
+          </a:fillRef>
+          <a:effectRef idx="2">
+            <a:schemeClr val="accent1"/>
+          </a:effectRef>
+          <a:fontRef idx="minor">
+            <a:schemeClr val="lt1"/>
+          </a:fontRef>
+        </p:style>
+        <p:txBody>
+          <a:bodyPr rtlCol="0" anchor="t" wrap="square" lIns="201168" rIns="182880" tIns="137160" bIns="73152"/>
+          <a:lstStyle/>
+          <a:p>
+            <a:pPr algn="ctr">
+              <a:spcAft>
+                <a:spcPts val="200"/>
+              </a:spcAft>
+            </a:pPr>
+            <a:r>
+              <a:rPr sz="1100" b="1">
+                <a:solidFill>
+                  <a:srgbClr val="A7ACAF"/>
+                </a:solidFill>
+                <a:latin typeface="BIZ UDPGothic"/>
+                <a:ea typeface="BIZ UDPGothic"/>
+              </a:rPr>
+              <a:t>AI推論を支える分散ストレージ</a:t>
+            </a:r>
+          </a:p>
+          <a:p>
+            <a:pPr algn="ctr">
+              <a:spcAft>
+                <a:spcPts val="600"/>
+              </a:spcAft>
+            </a:pPr>
+            <a:r>
+              <a:rPr sz="1500" b="1">
+                <a:solidFill>
+                  <a:srgbClr val="00219B"/>
+                </a:solidFill>
+                <a:latin typeface="BIZ UDPGothic"/>
+                <a:ea typeface="BIZ UDPGothic"/>
+              </a:rPr>
+              <a:t>simplyblock</a:t>
+            </a:r>
+          </a:p>
+          <a:p>
+            <a:pPr>
+              <a:lnSpc>
+                <a:spcPct val="120000"/>
+              </a:lnSpc>
+            </a:pPr>
+            <a:r>
+              <a:rPr sz="1150" b="0">
+                <a:solidFill>
+                  <a:srgbClr val="191919"/>
+                </a:solidFill>
+                <a:latin typeface="BIZ UDPGothic"/>
+                <a:ea typeface="BIZ UDPGothic"/>
+              </a:rPr>
+              <a:t>LLM推論のKVキャッシュを永続化・ノード間共有して再計算を削減。Kubernetesネイティブな推論基盤を検証</a:t>
+            </a:r>
+          </a:p>
+        </p:txBody>
+      </p:sp>
+      <p:sp>
+        <p:nvSpPr>
+          <p:cNvPr id="12" name="Rounded Rectangle 11"/>
+          <p:cNvSpPr/>
+          <p:nvPr/>
+        </p:nvSpPr>
+        <p:spPr>
+          <a:xfrm>
+            <a:off x="6144768" y="3931920"/>
+            <a:ext cx="5504688" cy="2011680"/>
+          </a:xfrm>
+          <a:prstGeom prst="roundRect">
+            <a:avLst>
+              <a:gd name="adj" fmla="val 8000"/>
+            </a:avLst>
+          </a:prstGeom>
+          <a:solidFill>
+            <a:srgbClr val="EDF4F9"/>
+          </a:solidFill>
+          <a:ln>
+            <a:noFill/>
+          </a:ln>
+          <a:effectLst/>
+        </p:spPr>
+        <p:style>
+          <a:lnRef idx="1">
+            <a:schemeClr val="accent1"/>
+          </a:lnRef>
+          <a:fillRef idx="3">
+            <a:schemeClr val="accent1"/>
+          </a:fillRef>
+          <a:effectRef idx="2">
+            <a:schemeClr val="accent1"/>
+          </a:effectRef>
+          <a:fontRef idx="minor">
+            <a:schemeClr val="lt1"/>
+          </a:fontRef>
+        </p:style>
+        <p:txBody>
+          <a:bodyPr rtlCol="0" anchor="t" wrap="square" lIns="201168" rIns="182880" tIns="137160" bIns="73152"/>
+          <a:lstStyle/>
+          <a:p>
+            <a:pPr algn="ctr">
+              <a:spcAft>
+                <a:spcPts val="200"/>
+              </a:spcAft>
+            </a:pPr>
+            <a:r>
+              <a:rPr sz="1100" b="1">
+                <a:solidFill>
+                  <a:srgbClr val="A7ACAF"/>
+                </a:solidFill>
+                <a:latin typeface="BIZ UDPGothic"/>
+                <a:ea typeface="BIZ UDPGothic"/>
+              </a:rPr>
+              <a:t>「認識して動く」社内デモ</a:t>
+            </a:r>
+          </a:p>
+          <a:p>
+            <a:pPr algn="ctr">
+              <a:spcAft>
+                <a:spcPts val="600"/>
+              </a:spcAft>
+            </a:pPr>
+            <a:r>
+              <a:rPr sz="1500" b="1">
+                <a:solidFill>
+                  <a:srgbClr val="00219B"/>
+                </a:solidFill>
+                <a:latin typeface="BIZ UDPGothic"/>
+                <a:ea typeface="BIZ UDPGothic"/>
+              </a:rPr>
+              <a:t>ロボットアーム連携</a:t>
+            </a:r>
+          </a:p>
+          <a:p>
+            <a:pPr>
+              <a:lnSpc>
+                <a:spcPct val="120000"/>
+              </a:lnSpc>
+            </a:pPr>
+            <a:r>
+              <a:rPr sz="1150" b="0">
+                <a:solidFill>
+                  <a:srgbClr val="191919"/>
+                </a:solidFill>
+                <a:latin typeface="BIZ UDPGothic"/>
+                <a:ea typeface="BIZ UDPGothic"/>
+              </a:rPr>
+              <a:t>カメラの物体検知（エッジNPU）とロボットアームを連携。青いボールを認識してつかみ、所定位置へ配置する一連動作を実装</a:t>
+            </a:r>
+          </a:p>
+        </p:txBody>
+      </p:sp>
+      <p:sp>
+        <p:nvSpPr>
+          <p:cNvPr id="13" name="TextBox 12"/>
+          <p:cNvSpPr txBox="1"/>
+          <p:nvPr/>
+        </p:nvSpPr>
+        <p:spPr>
+          <a:xfrm>
+            <a:off x="466344" y="5989320"/>
+            <a:ext cx="11183112" cy="365760"/>
+          </a:xfrm>
+          <a:prstGeom prst="rect">
+            <a:avLst/>
+          </a:prstGeom>
+          <a:noFill/>
+        </p:spPr>
+        <p:txBody>
+          <a:bodyPr wrap="square" lIns="0" rIns="0" tIns="0" bIns="0" anchor="t">
+            <a:spAutoFit/>
+          </a:bodyPr>
+          <a:lstStyle/>
+          <a:p>
+            <a:r>
+              <a:rPr sz="1050" b="0">
+                <a:solidFill>
+                  <a:srgbClr val="A7ACAF"/>
+                </a:solidFill>
+                <a:latin typeface="BIZ UDPGothic"/>
+                <a:ea typeface="BIZ UDPGothic"/>
+              </a:rPr>
+              <a:t>※ 検証結果の詳細は技術共有会資料（2026年7月・ネットワークインテグレーション事業本部）を参照</a:t>
+            </a:r>
+          </a:p>
+        </p:txBody>
+      </p:sp>
     </p:spTree>
     <p:extLst>
       <p:ext uri="{BB962C8B-B14F-4D97-AF65-F5344CB8AC3E}">
-        <p14:creationId xmlns:p14="http://schemas.microsoft.com/office/powerpoint/2010/main" val="600665860"/>
+        <p14:creationId xmlns:p14="http://schemas.microsoft.com/office/powerpoint/2010/main" val="3061702759"/>
       </p:ext>
     </p:extLst>
   </p:cSld>
@@ -16346,7 +17016,7 @@
         </p:nvSpPr>
         <p:spPr>
           <a:xfrm>
-            <a:off x="548640" y="1600200"/>
+            <a:off x="548640" y="1417320"/>
             <a:ext cx="420624" cy="420624"/>
           </a:xfrm>
           <a:prstGeom prst="ellipse">
@@ -16400,7 +17070,7 @@
         </p:nvSpPr>
         <p:spPr>
           <a:xfrm>
-            <a:off x="1188720" y="1554480"/>
+            <a:off x="1188720" y="1371600"/>
             <a:ext cx="8412480" cy="914400"/>
           </a:xfrm>
           <a:prstGeom prst="rect">
@@ -16415,7 +17085,7 @@
           <a:lstStyle/>
           <a:p>
             <a:r>
-              <a:rPr sz="2000" b="1">
+              <a:rPr sz="1900" b="1">
                 <a:solidFill>
                   <a:srgbClr val="191919"/>
                 </a:solidFill>
@@ -16432,7 +17102,7 @@
               </a:spcBef>
             </a:pPr>
             <a:r>
-              <a:rPr sz="1200" b="0">
+              <a:rPr sz="1150" b="0">
                 <a:solidFill>
                   <a:srgbClr val="A7ACAF"/>
                 </a:solidFill>
@@ -16452,7 +17122,7 @@
         </p:nvSpPr>
         <p:spPr>
           <a:xfrm>
-            <a:off x="10469880" y="1618488"/>
+            <a:off x="10469880" y="1435608"/>
             <a:ext cx="1097280" cy="457200"/>
           </a:xfrm>
           <a:prstGeom prst="rect">
@@ -16498,7 +17168,7 @@
         </p:nvSpPr>
         <p:spPr>
           <a:xfrm>
-            <a:off x="548640" y="2715768"/>
+            <a:off x="548640" y="2423160"/>
             <a:ext cx="420624" cy="420624"/>
           </a:xfrm>
           <a:prstGeom prst="ellipse">
@@ -16552,7 +17222,7 @@
         </p:nvSpPr>
         <p:spPr>
           <a:xfrm>
-            <a:off x="1188720" y="2670048"/>
+            <a:off x="1188720" y="2377440"/>
             <a:ext cx="8412480" cy="914400"/>
           </a:xfrm>
           <a:prstGeom prst="rect">
@@ -16567,7 +17237,7 @@
           <a:lstStyle/>
           <a:p>
             <a:r>
-              <a:rPr sz="2000" b="1">
+              <a:rPr sz="1900" b="1">
                 <a:solidFill>
                   <a:srgbClr val="191919"/>
                 </a:solidFill>
@@ -16584,7 +17254,7 @@
               </a:spcBef>
             </a:pPr>
             <a:r>
-              <a:rPr sz="1200" b="0">
+              <a:rPr sz="1150" b="0">
                 <a:solidFill>
                   <a:srgbClr val="A7ACAF"/>
                 </a:solidFill>
@@ -16604,7 +17274,7 @@
         </p:nvSpPr>
         <p:spPr>
           <a:xfrm>
-            <a:off x="10469880" y="2734056"/>
+            <a:off x="10469880" y="2441448"/>
             <a:ext cx="1097280" cy="457200"/>
           </a:xfrm>
           <a:prstGeom prst="rect">
@@ -16650,7 +17320,7 @@
         </p:nvSpPr>
         <p:spPr>
           <a:xfrm>
-            <a:off x="548640" y="3831335"/>
+            <a:off x="548640" y="3429000"/>
             <a:ext cx="420624" cy="420624"/>
           </a:xfrm>
           <a:prstGeom prst="ellipse">
@@ -16704,7 +17374,7 @@
         </p:nvSpPr>
         <p:spPr>
           <a:xfrm>
-            <a:off x="1188720" y="3785615"/>
+            <a:off x="1188720" y="3383280"/>
             <a:ext cx="8412480" cy="914400"/>
           </a:xfrm>
           <a:prstGeom prst="rect">
@@ -16719,7 +17389,7 @@
           <a:lstStyle/>
           <a:p>
             <a:r>
-              <a:rPr sz="2000" b="1">
+              <a:rPr sz="1900" b="1">
                 <a:solidFill>
                   <a:srgbClr val="191919"/>
                 </a:solidFill>
@@ -16736,7 +17406,7 @@
               </a:spcBef>
             </a:pPr>
             <a:r>
-              <a:rPr sz="1200" b="0">
+              <a:rPr sz="1150" b="0">
                 <a:solidFill>
                   <a:srgbClr val="A7ACAF"/>
                 </a:solidFill>
@@ -16756,7 +17426,7 @@
         </p:nvSpPr>
         <p:spPr>
           <a:xfrm>
-            <a:off x="10469880" y="3849623"/>
+            <a:off x="10469880" y="3447288"/>
             <a:ext cx="1097280" cy="457200"/>
           </a:xfrm>
           <a:prstGeom prst="rect">
@@ -16802,7 +17472,7 @@
         </p:nvSpPr>
         <p:spPr>
           <a:xfrm>
-            <a:off x="548640" y="4946903"/>
+            <a:off x="548640" y="4434840"/>
             <a:ext cx="420624" cy="420624"/>
           </a:xfrm>
           <a:prstGeom prst="ellipse">
@@ -16856,7 +17526,7 @@
         </p:nvSpPr>
         <p:spPr>
           <a:xfrm>
-            <a:off x="1188720" y="4901183"/>
+            <a:off x="1188720" y="4389120"/>
             <a:ext cx="8412480" cy="914400"/>
           </a:xfrm>
           <a:prstGeom prst="rect">
@@ -16871,14 +17541,14 @@
           <a:lstStyle/>
           <a:p>
             <a:r>
-              <a:rPr sz="2000" b="1">
+              <a:rPr sz="1900" b="1">
                 <a:solidFill>
                   <a:srgbClr val="191919"/>
                 </a:solidFill>
                 <a:latin typeface="BIZ UDPGothic"/>
                 <a:ea typeface="BIZ UDPGothic"/>
               </a:rPr>
-              <a:t>ビジネスへの示唆・まとめ</a:t>
+              <a:t>ビジネスへの示唆</a:t>
             </a:r>
           </a:p>
           <a:p>
@@ -16888,14 +17558,14 @@
               </a:spcBef>
             </a:pPr>
             <a:r>
-              <a:rPr sz="1200" b="0">
+              <a:rPr sz="1150" b="0">
                 <a:solidFill>
                   <a:srgbClr val="A7ACAF"/>
                 </a:solidFill>
                 <a:latin typeface="BIZ UDPGothic"/>
                 <a:ea typeface="BIZ UDPGothic"/>
               </a:rPr>
-              <a:t>市場予測と課題、私たちの事業との接点</a:t>
+              <a:t>市場予測と普及への課題、私たちの事業との接点</a:t>
             </a:r>
           </a:p>
         </p:txBody>
@@ -16908,7 +17578,7 @@
         </p:nvSpPr>
         <p:spPr>
           <a:xfrm>
-            <a:off x="10469880" y="4965191"/>
+            <a:off x="10469880" y="4453128"/>
             <a:ext cx="1097280" cy="457200"/>
           </a:xfrm>
           <a:prstGeom prst="rect">
@@ -16946,10 +17616,1570 @@
           </a:p>
         </p:txBody>
       </p:sp>
+      <p:sp>
+        <p:nvSpPr>
+          <p:cNvPr id="16" name="Oval 15"/>
+          <p:cNvSpPr/>
+          <p:nvPr/>
+        </p:nvSpPr>
+        <p:spPr>
+          <a:xfrm>
+            <a:off x="548640" y="5440680"/>
+            <a:ext cx="420624" cy="420624"/>
+          </a:xfrm>
+          <a:prstGeom prst="ellipse">
+            <a:avLst/>
+          </a:prstGeom>
+          <a:solidFill>
+            <a:srgbClr val="00219B"/>
+          </a:solidFill>
+          <a:ln>
+            <a:noFill/>
+          </a:ln>
+          <a:effectLst/>
+        </p:spPr>
+        <p:style>
+          <a:lnRef idx="1">
+            <a:schemeClr val="accent1"/>
+          </a:lnRef>
+          <a:fillRef idx="3">
+            <a:schemeClr val="accent1"/>
+          </a:fillRef>
+          <a:effectRef idx="2">
+            <a:schemeClr val="accent1"/>
+          </a:effectRef>
+          <a:fontRef idx="minor">
+            <a:schemeClr val="lt1"/>
+          </a:fontRef>
+        </p:style>
+        <p:txBody>
+          <a:bodyPr rtlCol="0" anchor="ctr" wrap="square" lIns="0" rIns="0" tIns="0" bIns="0"/>
+          <a:lstStyle/>
+          <a:p>
+            <a:pPr algn="ctr"/>
+            <a:r>
+              <a:rPr sz="1400" b="1">
+                <a:solidFill>
+                  <a:srgbClr val="FFFFFF"/>
+                </a:solidFill>
+                <a:latin typeface="BIZ UDPGothic"/>
+                <a:ea typeface="BIZ UDPGothic"/>
+              </a:rPr>
+              <a:t>05</a:t>
+            </a:r>
+          </a:p>
+        </p:txBody>
+      </p:sp>
+      <p:sp>
+        <p:nvSpPr>
+          <p:cNvPr id="17" name="TextBox 16"/>
+          <p:cNvSpPr txBox="1"/>
+          <p:nvPr/>
+        </p:nvSpPr>
+        <p:spPr>
+          <a:xfrm>
+            <a:off x="1188720" y="5394960"/>
+            <a:ext cx="8412480" cy="914400"/>
+          </a:xfrm>
+          <a:prstGeom prst="rect">
+            <a:avLst/>
+          </a:prstGeom>
+          <a:noFill/>
+        </p:spPr>
+        <p:txBody>
+          <a:bodyPr wrap="square" lIns="0" rIns="0" tIns="0" bIns="0" anchor="t">
+            <a:spAutoFit/>
+          </a:bodyPr>
+          <a:lstStyle/>
+          <a:p>
+            <a:r>
+              <a:rPr sz="1900" b="1">
+                <a:solidFill>
+                  <a:srgbClr val="191919"/>
+                </a:solidFill>
+                <a:latin typeface="BIZ UDPGothic"/>
+                <a:ea typeface="BIZ UDPGothic"/>
+              </a:rPr>
+              <a:t>当社の取り組み・まとめ</a:t>
+            </a:r>
+          </a:p>
+          <a:p>
+            <a:pPr>
+              <a:spcBef>
+                <a:spcPts val="200"/>
+              </a:spcBef>
+            </a:pPr>
+            <a:r>
+              <a:rPr sz="1150" b="0">
+                <a:solidFill>
+                  <a:srgbClr val="A7ACAF"/>
+                </a:solidFill>
+                <a:latin typeface="BIZ UDPGothic"/>
+                <a:ea typeface="BIZ UDPGothic"/>
+              </a:rPr>
+              <a:t>市場の狙い方、検証済みの技術アセット、エッジソリューション構想</a:t>
+            </a:r>
+          </a:p>
+        </p:txBody>
+      </p:sp>
+      <p:sp>
+        <p:nvSpPr>
+          <p:cNvPr id="18" name="TextBox 17"/>
+          <p:cNvSpPr txBox="1"/>
+          <p:nvPr/>
+        </p:nvSpPr>
+        <p:spPr>
+          <a:xfrm>
+            <a:off x="10469880" y="5458968"/>
+            <a:ext cx="1097280" cy="457200"/>
+          </a:xfrm>
+          <a:prstGeom prst="rect">
+            <a:avLst/>
+          </a:prstGeom>
+          <a:noFill/>
+        </p:spPr>
+        <p:txBody>
+          <a:bodyPr wrap="square" lIns="0" rIns="0" tIns="0" bIns="0" anchor="t">
+            <a:spAutoFit/>
+          </a:bodyPr>
+          <a:lstStyle/>
+          <a:p>
+            <a:pPr algn="r"/>
+            <a:r>
+              <a:rPr sz="1200" b="0">
+                <a:solidFill>
+                  <a:srgbClr val="A7ACAF"/>
+                </a:solidFill>
+                <a:latin typeface="BIZ UDPGothic"/>
+                <a:ea typeface="BIZ UDPGothic"/>
+              </a:rPr>
+              <a:t>p. </a:t>
+            </a:r>
+            <a:r>
+              <a:rPr sz="1800" b="1">
+                <a:solidFill>
+                  <a:srgbClr val="00219B"/>
+                </a:solidFill>
+                <a:latin typeface="BIZ UDPGothic"/>
+                <a:ea typeface="BIZ UDPGothic"/>
+              </a:rPr>
+              <a:t>17</a:t>
+            </a:r>
+          </a:p>
+        </p:txBody>
+      </p:sp>
     </p:spTree>
     <p:extLst>
       <p:ext uri="{BB962C8B-B14F-4D97-AF65-F5344CB8AC3E}">
         <p14:creationId xmlns:p14="http://schemas.microsoft.com/office/powerpoint/2010/main" val="1701623771"/>
+      </p:ext>
+    </p:extLst>
+  </p:cSld>
+  <p:clrMapOvr>
+    <a:masterClrMapping/>
+  </p:clrMapOvr>
+</p:sld>
+</file>
+
+<file path=ppt/slides/slide20.xml><?xml version="1.0" encoding="utf-8"?>
+<p:sld xmlns:a="http://schemas.openxmlformats.org/drawingml/2006/main" xmlns:r="http://schemas.openxmlformats.org/officeDocument/2006/relationships" xmlns:p="http://schemas.openxmlformats.org/presentationml/2006/main">
+  <p:cSld>
+    <p:spTree>
+      <p:nvGrpSpPr>
+        <p:cNvPr id="1" name=""/>
+        <p:cNvGrpSpPr/>
+        <p:nvPr/>
+      </p:nvGrpSpPr>
+      <p:grpSpPr>
+        <a:xfrm>
+          <a:off x="0" y="0"/>
+          <a:ext cx="0" cy="0"/>
+          <a:chOff x="0" y="0"/>
+          <a:chExt cx="0" cy="0"/>
+        </a:xfrm>
+      </p:grpSpPr>
+      <p:sp>
+        <p:nvSpPr>
+          <p:cNvPr id="6" name="タイトル 5">
+            <a:extLst>
+              <a:ext uri="{FF2B5EF4-FFF2-40B4-BE49-F238E27FC236}">
+                <a16:creationId xmlns:a16="http://schemas.microsoft.com/office/drawing/2014/main" id="{C61704E3-8110-72C8-5476-DAC03CA6A035}"/>
+              </a:ext>
+            </a:extLst>
+          </p:cNvPr>
+          <p:cNvSpPr>
+            <a:spLocks noGrp="1"/>
+          </p:cNvSpPr>
+          <p:nvPr>
+            <p:ph type="title"/>
+          </p:nvPr>
+        </p:nvSpPr>
+        <p:spPr/>
+        <p:txBody>
+          <a:bodyPr/>
+          <a:lstStyle/>
+          <a:p>
+            <a:r>
+              <a:rPr>
+                <a:latin typeface="BIZ UDPGothic"/>
+                <a:ea typeface="BIZ UDPGothic"/>
+              </a:rPr>
+              <a:t>構想 — エッジAI × 地域デジタルツインで「認識・予測・行動」を回す</a:t>
+            </a:r>
+            <a:endParaRPr lang="ja-JP" altLang="en-US"/>
+          </a:p>
+        </p:txBody>
+      </p:sp>
+      <p:sp>
+        <p:nvSpPr>
+          <p:cNvPr id="8" name="コンテンツ プレースホルダー 7">
+            <a:extLst>
+              <a:ext uri="{FF2B5EF4-FFF2-40B4-BE49-F238E27FC236}">
+                <a16:creationId xmlns:a16="http://schemas.microsoft.com/office/drawing/2014/main" id="{D4C96A99-692B-ED55-FB7F-403B2DCD88C7}"/>
+              </a:ext>
+            </a:extLst>
+          </p:cNvPr>
+          <p:cNvSpPr>
+            <a:spLocks noGrp="1"/>
+          </p:cNvSpPr>
+          <p:nvPr>
+            <p:ph idx="11"/>
+          </p:nvPr>
+        </p:nvSpPr>
+        <p:spPr/>
+        <p:txBody>
+          <a:bodyPr/>
+          <a:lstStyle/>
+          <a:p>
+            <a:r>
+              <a:rPr>
+                <a:latin typeface="BIZ UDPGothic"/>
+                <a:ea typeface="BIZ UDPGothic"/>
+              </a:rPr>
+              <a:t>フィジカルAIの構成要素を、防災・害獣対策などの地域課題に応用する</a:t>
+            </a:r>
+            <a:endParaRPr lang="ja-JP" altLang="en-US"/>
+          </a:p>
+        </p:txBody>
+      </p:sp>
+      <p:sp>
+        <p:nvSpPr>
+          <p:cNvPr id="9" name="Rounded Rectangle 8"/>
+          <p:cNvSpPr/>
+          <p:nvPr/>
+        </p:nvSpPr>
+        <p:spPr>
+          <a:xfrm>
+            <a:off x="466344" y="1783080"/>
+            <a:ext cx="3493008" cy="2103120"/>
+          </a:xfrm>
+          <a:prstGeom prst="roundRect">
+            <a:avLst>
+              <a:gd name="adj" fmla="val 8000"/>
+            </a:avLst>
+          </a:prstGeom>
+          <a:solidFill>
+            <a:srgbClr val="EDF4F9"/>
+          </a:solidFill>
+          <a:ln>
+            <a:noFill/>
+          </a:ln>
+          <a:effectLst/>
+        </p:spPr>
+        <p:style>
+          <a:lnRef idx="1">
+            <a:schemeClr val="accent1"/>
+          </a:lnRef>
+          <a:fillRef idx="3">
+            <a:schemeClr val="accent1"/>
+          </a:fillRef>
+          <a:effectRef idx="2">
+            <a:schemeClr val="accent1"/>
+          </a:effectRef>
+          <a:fontRef idx="minor">
+            <a:schemeClr val="lt1"/>
+          </a:fontRef>
+        </p:style>
+        <p:txBody>
+          <a:bodyPr rtlCol="0" anchor="t" wrap="square" lIns="182880" rIns="182880" tIns="146304" bIns="73152"/>
+          <a:lstStyle/>
+          <a:p>
+            <a:pPr algn="ctr">
+              <a:spcAft>
+                <a:spcPts val="300"/>
+              </a:spcAft>
+            </a:pPr>
+            <a:r>
+              <a:rPr sz="1200" b="1">
+                <a:solidFill>
+                  <a:srgbClr val="2A65F5"/>
+                </a:solidFill>
+                <a:latin typeface="BIZ UDPGothic"/>
+                <a:ea typeface="BIZ UDPGothic"/>
+              </a:rPr>
+              <a:t>認識</a:t>
+            </a:r>
+          </a:p>
+          <a:p>
+            <a:pPr algn="ctr">
+              <a:spcAft>
+                <a:spcPts val="700"/>
+              </a:spcAft>
+            </a:pPr>
+            <a:r>
+              <a:rPr sz="1500" b="1">
+                <a:solidFill>
+                  <a:srgbClr val="00219B"/>
+                </a:solidFill>
+                <a:latin typeface="BIZ UDPGothic"/>
+                <a:ea typeface="BIZ UDPGothic"/>
+              </a:rPr>
+              <a:t>現場のエッジAI端末</a:t>
+            </a:r>
+          </a:p>
+          <a:p>
+            <a:pPr>
+              <a:lnSpc>
+                <a:spcPct val="120000"/>
+              </a:lnSpc>
+            </a:pPr>
+            <a:r>
+              <a:rPr sz="1150" b="0">
+                <a:solidFill>
+                  <a:srgbClr val="191919"/>
+                </a:solidFill>
+                <a:latin typeface="BIZ UDPGothic"/>
+                <a:ea typeface="BIZ UDPGothic"/>
+              </a:rPr>
+              <a:t>ドローン・カメラ・センサーが対象（被災者・害獣など）と周囲環境をリアルタイムに認識</a:t>
+            </a:r>
+          </a:p>
+        </p:txBody>
+      </p:sp>
+      <p:sp>
+        <p:nvSpPr>
+          <p:cNvPr id="10" name="Chevron 9"/>
+          <p:cNvSpPr/>
+          <p:nvPr/>
+        </p:nvSpPr>
+        <p:spPr>
+          <a:xfrm>
+            <a:off x="3995928" y="2606040"/>
+            <a:ext cx="237744" cy="457200"/>
+          </a:xfrm>
+          <a:prstGeom prst="chevron">
+            <a:avLst>
+              <a:gd name="adj" fmla="val 80000"/>
+            </a:avLst>
+          </a:prstGeom>
+          <a:solidFill>
+            <a:srgbClr val="2A65F5"/>
+          </a:solidFill>
+          <a:ln>
+            <a:noFill/>
+          </a:ln>
+          <a:effectLst/>
+        </p:spPr>
+        <p:style>
+          <a:lnRef idx="1">
+            <a:schemeClr val="accent1"/>
+          </a:lnRef>
+          <a:fillRef idx="3">
+            <a:schemeClr val="accent1"/>
+          </a:fillRef>
+          <a:effectRef idx="2">
+            <a:schemeClr val="accent1"/>
+          </a:effectRef>
+          <a:fontRef idx="minor">
+            <a:schemeClr val="lt1"/>
+          </a:fontRef>
+        </p:style>
+        <p:txBody>
+          <a:bodyPr rtlCol="0" anchor="t" wrap="square" lIns="109728" rIns="109728" tIns="73152" bIns="73152"/>
+          <a:lstStyle/>
+          <a:p>
+            <a:pPr algn="ctr"/>
+          </a:p>
+        </p:txBody>
+      </p:sp>
+      <p:sp>
+        <p:nvSpPr>
+          <p:cNvPr id="11" name="Rounded Rectangle 10"/>
+          <p:cNvSpPr/>
+          <p:nvPr/>
+        </p:nvSpPr>
+        <p:spPr>
+          <a:xfrm>
+            <a:off x="4306824" y="1783080"/>
+            <a:ext cx="3493008" cy="2103120"/>
+          </a:xfrm>
+          <a:prstGeom prst="roundRect">
+            <a:avLst>
+              <a:gd name="adj" fmla="val 8000"/>
+            </a:avLst>
+          </a:prstGeom>
+          <a:solidFill>
+            <a:srgbClr val="EDF4F9"/>
+          </a:solidFill>
+          <a:ln>
+            <a:noFill/>
+          </a:ln>
+          <a:effectLst/>
+        </p:spPr>
+        <p:style>
+          <a:lnRef idx="1">
+            <a:schemeClr val="accent1"/>
+          </a:lnRef>
+          <a:fillRef idx="3">
+            <a:schemeClr val="accent1"/>
+          </a:fillRef>
+          <a:effectRef idx="2">
+            <a:schemeClr val="accent1"/>
+          </a:effectRef>
+          <a:fontRef idx="minor">
+            <a:schemeClr val="lt1"/>
+          </a:fontRef>
+        </p:style>
+        <p:txBody>
+          <a:bodyPr rtlCol="0" anchor="t" wrap="square" lIns="182880" rIns="182880" tIns="146304" bIns="73152"/>
+          <a:lstStyle/>
+          <a:p>
+            <a:pPr algn="ctr">
+              <a:spcAft>
+                <a:spcPts val="300"/>
+              </a:spcAft>
+            </a:pPr>
+            <a:r>
+              <a:rPr sz="1200" b="1">
+                <a:solidFill>
+                  <a:srgbClr val="2A65F5"/>
+                </a:solidFill>
+                <a:latin typeface="BIZ UDPGothic"/>
+                <a:ea typeface="BIZ UDPGothic"/>
+              </a:rPr>
+              <a:t>予測</a:t>
+            </a:r>
+          </a:p>
+          <a:p>
+            <a:pPr algn="ctr">
+              <a:spcAft>
+                <a:spcPts val="700"/>
+              </a:spcAft>
+            </a:pPr>
+            <a:r>
+              <a:rPr sz="1500" b="1">
+                <a:solidFill>
+                  <a:srgbClr val="00219B"/>
+                </a:solidFill>
+                <a:latin typeface="BIZ UDPGothic"/>
+                <a:ea typeface="BIZ UDPGothic"/>
+              </a:rPr>
+              <a:t>地域デジタルツイン</a:t>
+            </a:r>
+          </a:p>
+          <a:p>
+            <a:pPr>
+              <a:lnSpc>
+                <a:spcPct val="120000"/>
+              </a:lnSpc>
+            </a:pPr>
+            <a:r>
+              <a:rPr sz="1150" b="0">
+                <a:solidFill>
+                  <a:srgbClr val="191919"/>
+                </a:solidFill>
+                <a:latin typeface="BIZ UDPGothic"/>
+                <a:ea typeface="BIZ UDPGothic"/>
+              </a:rPr>
+              <a:t>地域共有型のGPU/NPU基盤上で現実を再現し、氾濫・行動などの未来をシミュレーション</a:t>
+            </a:r>
+          </a:p>
+        </p:txBody>
+      </p:sp>
+      <p:sp>
+        <p:nvSpPr>
+          <p:cNvPr id="12" name="Chevron 11"/>
+          <p:cNvSpPr/>
+          <p:nvPr/>
+        </p:nvSpPr>
+        <p:spPr>
+          <a:xfrm>
+            <a:off x="7836407" y="2606040"/>
+            <a:ext cx="237744" cy="457200"/>
+          </a:xfrm>
+          <a:prstGeom prst="chevron">
+            <a:avLst>
+              <a:gd name="adj" fmla="val 80000"/>
+            </a:avLst>
+          </a:prstGeom>
+          <a:solidFill>
+            <a:srgbClr val="2A65F5"/>
+          </a:solidFill>
+          <a:ln>
+            <a:noFill/>
+          </a:ln>
+          <a:effectLst/>
+        </p:spPr>
+        <p:style>
+          <a:lnRef idx="1">
+            <a:schemeClr val="accent1"/>
+          </a:lnRef>
+          <a:fillRef idx="3">
+            <a:schemeClr val="accent1"/>
+          </a:fillRef>
+          <a:effectRef idx="2">
+            <a:schemeClr val="accent1"/>
+          </a:effectRef>
+          <a:fontRef idx="minor">
+            <a:schemeClr val="lt1"/>
+          </a:fontRef>
+        </p:style>
+        <p:txBody>
+          <a:bodyPr rtlCol="0" anchor="t" wrap="square" lIns="109728" rIns="109728" tIns="73152" bIns="73152"/>
+          <a:lstStyle/>
+          <a:p>
+            <a:pPr algn="ctr"/>
+          </a:p>
+        </p:txBody>
+      </p:sp>
+      <p:sp>
+        <p:nvSpPr>
+          <p:cNvPr id="13" name="Rounded Rectangle 12"/>
+          <p:cNvSpPr/>
+          <p:nvPr/>
+        </p:nvSpPr>
+        <p:spPr>
+          <a:xfrm>
+            <a:off x="8147304" y="1783080"/>
+            <a:ext cx="3493008" cy="2103120"/>
+          </a:xfrm>
+          <a:prstGeom prst="roundRect">
+            <a:avLst>
+              <a:gd name="adj" fmla="val 8000"/>
+            </a:avLst>
+          </a:prstGeom>
+          <a:solidFill>
+            <a:srgbClr val="EDF4F9"/>
+          </a:solidFill>
+          <a:ln>
+            <a:noFill/>
+          </a:ln>
+          <a:effectLst/>
+        </p:spPr>
+        <p:style>
+          <a:lnRef idx="1">
+            <a:schemeClr val="accent1"/>
+          </a:lnRef>
+          <a:fillRef idx="3">
+            <a:schemeClr val="accent1"/>
+          </a:fillRef>
+          <a:effectRef idx="2">
+            <a:schemeClr val="accent1"/>
+          </a:effectRef>
+          <a:fontRef idx="minor">
+            <a:schemeClr val="lt1"/>
+          </a:fontRef>
+        </p:style>
+        <p:txBody>
+          <a:bodyPr rtlCol="0" anchor="t" wrap="square" lIns="182880" rIns="182880" tIns="146304" bIns="73152"/>
+          <a:lstStyle/>
+          <a:p>
+            <a:pPr algn="ctr">
+              <a:spcAft>
+                <a:spcPts val="300"/>
+              </a:spcAft>
+            </a:pPr>
+            <a:r>
+              <a:rPr sz="1200" b="1">
+                <a:solidFill>
+                  <a:srgbClr val="2A65F5"/>
+                </a:solidFill>
+                <a:latin typeface="BIZ UDPGothic"/>
+                <a:ea typeface="BIZ UDPGothic"/>
+              </a:rPr>
+              <a:t>行動</a:t>
+            </a:r>
+          </a:p>
+          <a:p>
+            <a:pPr algn="ctr">
+              <a:spcAft>
+                <a:spcPts val="700"/>
+              </a:spcAft>
+            </a:pPr>
+            <a:r>
+              <a:rPr sz="1500" b="1">
+                <a:solidFill>
+                  <a:srgbClr val="00219B"/>
+                </a:solidFill>
+                <a:latin typeface="BIZ UDPGothic"/>
+                <a:ea typeface="BIZ UDPGothic"/>
+              </a:rPr>
+              <a:t>現場へフィードバック</a:t>
+            </a:r>
+          </a:p>
+          <a:p>
+            <a:pPr>
+              <a:lnSpc>
+                <a:spcPct val="120000"/>
+              </a:lnSpc>
+            </a:pPr>
+            <a:r>
+              <a:rPr sz="1150" b="0">
+                <a:solidFill>
+                  <a:srgbClr val="191919"/>
+                </a:solidFill>
+                <a:latin typeface="BIZ UDPGothic"/>
+                <a:ea typeface="BIZ UDPGothic"/>
+              </a:rPr>
+              <a:t>予測結果をエッジへ返し、ドローン群制御・誘導・追い込みなどの協調行動につなげる</a:t>
+            </a:r>
+          </a:p>
+        </p:txBody>
+      </p:sp>
+      <p:sp>
+        <p:nvSpPr>
+          <p:cNvPr id="14" name="Rounded Rectangle 13"/>
+          <p:cNvSpPr/>
+          <p:nvPr/>
+        </p:nvSpPr>
+        <p:spPr>
+          <a:xfrm>
+            <a:off x="466344" y="4206240"/>
+            <a:ext cx="5504688" cy="1234440"/>
+          </a:xfrm>
+          <a:prstGeom prst="roundRect">
+            <a:avLst>
+              <a:gd name="adj" fmla="val 8000"/>
+            </a:avLst>
+          </a:prstGeom>
+          <a:solidFill>
+            <a:srgbClr val="FFFFFF"/>
+          </a:solidFill>
+          <a:ln w="12700">
+            <a:solidFill>
+              <a:srgbClr val="2A65F5"/>
+            </a:solidFill>
+          </a:ln>
+          <a:effectLst/>
+        </p:spPr>
+        <p:style>
+          <a:lnRef idx="1">
+            <a:schemeClr val="accent1"/>
+          </a:lnRef>
+          <a:fillRef idx="3">
+            <a:schemeClr val="accent1"/>
+          </a:fillRef>
+          <a:effectRef idx="2">
+            <a:schemeClr val="accent1"/>
+          </a:effectRef>
+          <a:fontRef idx="minor">
+            <a:schemeClr val="lt1"/>
+          </a:fontRef>
+        </p:style>
+        <p:txBody>
+          <a:bodyPr rtlCol="0" anchor="t" wrap="square" lIns="201168" rIns="109728" tIns="118872" bIns="73152"/>
+          <a:lstStyle/>
+          <a:p>
+            <a:pPr algn="ctr">
+              <a:spcAft>
+                <a:spcPts val="400"/>
+              </a:spcAft>
+            </a:pPr>
+            <a:r>
+              <a:rPr sz="1200" b="1">
+                <a:solidFill>
+                  <a:srgbClr val="E86487"/>
+                </a:solidFill>
+                <a:latin typeface="BIZ UDPGothic"/>
+                <a:ea typeface="BIZ UDPGothic"/>
+              </a:rPr>
+              <a:t>■ </a:t>
+            </a:r>
+            <a:r>
+              <a:rPr sz="1300" b="1">
+                <a:solidFill>
+                  <a:srgbClr val="00219B"/>
+                </a:solidFill>
+                <a:latin typeface="BIZ UDPGothic"/>
+                <a:ea typeface="BIZ UDPGothic"/>
+              </a:rPr>
+              <a:t>ユースケース：防災</a:t>
+            </a:r>
+          </a:p>
+          <a:p>
+            <a:pPr>
+              <a:lnSpc>
+                <a:spcPct val="120000"/>
+              </a:lnSpc>
+            </a:pPr>
+            <a:r>
+              <a:rPr sz="1150" b="0">
+                <a:solidFill>
+                  <a:srgbClr val="191919"/>
+                </a:solidFill>
+                <a:latin typeface="BIZ UDPGothic"/>
+                <a:ea typeface="BIZ UDPGothic"/>
+              </a:rPr>
+              <a:t>河川監視データから氾濫・浸水を予測し、逃げ遅れをドローンが発見・避難誘導</a:t>
+            </a:r>
+          </a:p>
+        </p:txBody>
+      </p:sp>
+      <p:sp>
+        <p:nvSpPr>
+          <p:cNvPr id="15" name="Rounded Rectangle 14"/>
+          <p:cNvSpPr/>
+          <p:nvPr/>
+        </p:nvSpPr>
+        <p:spPr>
+          <a:xfrm>
+            <a:off x="6144768" y="4206240"/>
+            <a:ext cx="5504688" cy="1234440"/>
+          </a:xfrm>
+          <a:prstGeom prst="roundRect">
+            <a:avLst>
+              <a:gd name="adj" fmla="val 8000"/>
+            </a:avLst>
+          </a:prstGeom>
+          <a:solidFill>
+            <a:srgbClr val="FFFFFF"/>
+          </a:solidFill>
+          <a:ln w="12700">
+            <a:solidFill>
+              <a:srgbClr val="2A65F5"/>
+            </a:solidFill>
+          </a:ln>
+          <a:effectLst/>
+        </p:spPr>
+        <p:style>
+          <a:lnRef idx="1">
+            <a:schemeClr val="accent1"/>
+          </a:lnRef>
+          <a:fillRef idx="3">
+            <a:schemeClr val="accent1"/>
+          </a:fillRef>
+          <a:effectRef idx="2">
+            <a:schemeClr val="accent1"/>
+          </a:effectRef>
+          <a:fontRef idx="minor">
+            <a:schemeClr val="lt1"/>
+          </a:fontRef>
+        </p:style>
+        <p:txBody>
+          <a:bodyPr rtlCol="0" anchor="t" wrap="square" lIns="201168" rIns="109728" tIns="118872" bIns="73152"/>
+          <a:lstStyle/>
+          <a:p>
+            <a:pPr algn="ctr">
+              <a:spcAft>
+                <a:spcPts val="400"/>
+              </a:spcAft>
+            </a:pPr>
+            <a:r>
+              <a:rPr sz="1200" b="1">
+                <a:solidFill>
+                  <a:srgbClr val="55D2D8"/>
+                </a:solidFill>
+                <a:latin typeface="BIZ UDPGothic"/>
+                <a:ea typeface="BIZ UDPGothic"/>
+              </a:rPr>
+              <a:t>■ </a:t>
+            </a:r>
+            <a:r>
+              <a:rPr sz="1300" b="1">
+                <a:solidFill>
+                  <a:srgbClr val="00219B"/>
+                </a:solidFill>
+                <a:latin typeface="BIZ UDPGothic"/>
+                <a:ea typeface="BIZ UDPGothic"/>
+              </a:rPr>
+              <a:t>ユースケース：害獣対策</a:t>
+            </a:r>
+          </a:p>
+          <a:p>
+            <a:pPr>
+              <a:lnSpc>
+                <a:spcPct val="120000"/>
+              </a:lnSpc>
+            </a:pPr>
+            <a:r>
+              <a:rPr sz="1150" b="0">
+                <a:solidFill>
+                  <a:srgbClr val="191919"/>
+                </a:solidFill>
+                <a:latin typeface="BIZ UDPGothic"/>
+                <a:ea typeface="BIZ UDPGothic"/>
+              </a:rPr>
+              <a:t>行動予知と包囲計算に基づき、ドローン群を再配置して音・光で追い込み・誘導</a:t>
+            </a:r>
+          </a:p>
+        </p:txBody>
+      </p:sp>
+      <p:sp>
+        <p:nvSpPr>
+          <p:cNvPr id="16" name="TextBox 15"/>
+          <p:cNvSpPr txBox="1"/>
+          <p:nvPr/>
+        </p:nvSpPr>
+        <p:spPr>
+          <a:xfrm>
+            <a:off x="466344" y="5715000"/>
+            <a:ext cx="11183112" cy="548640"/>
+          </a:xfrm>
+          <a:prstGeom prst="rect">
+            <a:avLst/>
+          </a:prstGeom>
+          <a:noFill/>
+        </p:spPr>
+        <p:txBody>
+          <a:bodyPr wrap="square" lIns="0" rIns="0" tIns="0" bIns="0" anchor="t">
+            <a:spAutoFit/>
+          </a:bodyPr>
+          <a:lstStyle/>
+          <a:p>
+            <a:pPr>
+              <a:lnSpc>
+                <a:spcPct val="120000"/>
+              </a:lnSpc>
+            </a:pPr>
+            <a:r>
+              <a:rPr sz="1050" b="0">
+                <a:solidFill>
+                  <a:srgbClr val="A7ACAF"/>
+                </a:solidFill>
+                <a:latin typeface="BIZ UDPGothic"/>
+                <a:ea typeface="BIZ UDPGothic"/>
+              </a:rPr>
+              <a:t>※ エッジAI・ローカル5G・デジタルツインを通信基盤で相互接続する構想。将来はシミュレーション結果の自動運転への応用展開も視野</a:t>
+            </a:r>
+          </a:p>
+        </p:txBody>
+      </p:sp>
+    </p:spTree>
+    <p:extLst>
+      <p:ext uri="{BB962C8B-B14F-4D97-AF65-F5344CB8AC3E}">
+        <p14:creationId xmlns:p14="http://schemas.microsoft.com/office/powerpoint/2010/main" val="3061702759"/>
+      </p:ext>
+    </p:extLst>
+  </p:cSld>
+  <p:clrMapOvr>
+    <a:masterClrMapping/>
+  </p:clrMapOvr>
+</p:sld>
+</file>
+
+<file path=ppt/slides/slide21.xml><?xml version="1.0" encoding="utf-8"?>
+<p:sld xmlns:a="http://schemas.openxmlformats.org/drawingml/2006/main" xmlns:r="http://schemas.openxmlformats.org/officeDocument/2006/relationships" xmlns:p="http://schemas.openxmlformats.org/presentationml/2006/main">
+  <p:cSld>
+    <p:spTree>
+      <p:nvGrpSpPr>
+        <p:cNvPr id="1" name=""/>
+        <p:cNvGrpSpPr/>
+        <p:nvPr/>
+      </p:nvGrpSpPr>
+      <p:grpSpPr>
+        <a:xfrm>
+          <a:off x="0" y="0"/>
+          <a:ext cx="0" cy="0"/>
+          <a:chOff x="0" y="0"/>
+          <a:chExt cx="0" cy="0"/>
+        </a:xfrm>
+      </p:grpSpPr>
+      <p:sp>
+        <p:nvSpPr>
+          <p:cNvPr id="6" name="タイトル 5">
+            <a:extLst>
+              <a:ext uri="{FF2B5EF4-FFF2-40B4-BE49-F238E27FC236}">
+                <a16:creationId xmlns:a16="http://schemas.microsoft.com/office/drawing/2014/main" id="{C61704E3-8110-72C8-5476-DAC03CA6A035}"/>
+              </a:ext>
+            </a:extLst>
+          </p:cNvPr>
+          <p:cNvSpPr>
+            <a:spLocks noGrp="1"/>
+          </p:cNvSpPr>
+          <p:nvPr>
+            <p:ph type="title"/>
+          </p:nvPr>
+        </p:nvSpPr>
+        <p:spPr/>
+        <p:txBody>
+          <a:bodyPr/>
+          <a:lstStyle/>
+          <a:p>
+            <a:r>
+              <a:rPr>
+                <a:latin typeface="BIZ UDPGothic"/>
+                <a:ea typeface="BIZ UDPGothic"/>
+              </a:rPr>
+              <a:t>まとめ</a:t>
+            </a:r>
+            <a:endParaRPr lang="ja-JP" altLang="en-US"/>
+          </a:p>
+        </p:txBody>
+      </p:sp>
+      <p:sp>
+        <p:nvSpPr>
+          <p:cNvPr id="8" name="コンテンツ プレースホルダー 7">
+            <a:extLst>
+              <a:ext uri="{FF2B5EF4-FFF2-40B4-BE49-F238E27FC236}">
+                <a16:creationId xmlns:a16="http://schemas.microsoft.com/office/drawing/2014/main" id="{D4C96A99-692B-ED55-FB7F-403B2DCD88C7}"/>
+              </a:ext>
+            </a:extLst>
+          </p:cNvPr>
+          <p:cNvSpPr>
+            <a:spLocks noGrp="1"/>
+          </p:cNvSpPr>
+          <p:nvPr>
+            <p:ph idx="11"/>
+          </p:nvPr>
+        </p:nvSpPr>
+        <p:spPr/>
+        <p:txBody>
+          <a:bodyPr/>
+          <a:lstStyle/>
+          <a:p>
+            <a:r>
+              <a:rPr>
+                <a:latin typeface="BIZ UDPGothic"/>
+                <a:ea typeface="BIZ UDPGothic"/>
+              </a:rPr>
+              <a:t>本日押さえてほしい3点と、ディスカッション</a:t>
+            </a:r>
+            <a:endParaRPr lang="ja-JP" altLang="en-US"/>
+          </a:p>
+        </p:txBody>
+      </p:sp>
+      <p:sp>
+        <p:nvSpPr>
+          <p:cNvPr id="9" name="Oval 8"/>
+          <p:cNvSpPr/>
+          <p:nvPr/>
+        </p:nvSpPr>
+        <p:spPr>
+          <a:xfrm>
+            <a:off x="466344" y="1892807"/>
+            <a:ext cx="475488" cy="475488"/>
+          </a:xfrm>
+          <a:prstGeom prst="ellipse">
+            <a:avLst/>
+          </a:prstGeom>
+          <a:solidFill>
+            <a:srgbClr val="00219B"/>
+          </a:solidFill>
+          <a:ln>
+            <a:noFill/>
+          </a:ln>
+          <a:effectLst/>
+        </p:spPr>
+        <p:style>
+          <a:lnRef idx="1">
+            <a:schemeClr val="accent1"/>
+          </a:lnRef>
+          <a:fillRef idx="3">
+            <a:schemeClr val="accent1"/>
+          </a:fillRef>
+          <a:effectRef idx="2">
+            <a:schemeClr val="accent1"/>
+          </a:effectRef>
+          <a:fontRef idx="minor">
+            <a:schemeClr val="lt1"/>
+          </a:fontRef>
+        </p:style>
+        <p:txBody>
+          <a:bodyPr rtlCol="0" anchor="ctr" wrap="square" lIns="0" rIns="0" tIns="0" bIns="0"/>
+          <a:lstStyle/>
+          <a:p>
+            <a:pPr algn="ctr"/>
+            <a:r>
+              <a:rPr sz="1600" b="1">
+                <a:solidFill>
+                  <a:srgbClr val="FFFFFF"/>
+                </a:solidFill>
+                <a:latin typeface="BIZ UDPGothic"/>
+                <a:ea typeface="BIZ UDPGothic"/>
+              </a:rPr>
+              <a:t>1</a:t>
+            </a:r>
+          </a:p>
+        </p:txBody>
+      </p:sp>
+      <p:sp>
+        <p:nvSpPr>
+          <p:cNvPr id="10" name="Rounded Rectangle 9"/>
+          <p:cNvSpPr/>
+          <p:nvPr/>
+        </p:nvSpPr>
+        <p:spPr>
+          <a:xfrm>
+            <a:off x="1143000" y="1783080"/>
+            <a:ext cx="10506456" cy="1097280"/>
+          </a:xfrm>
+          <a:prstGeom prst="roundRect">
+            <a:avLst>
+              <a:gd name="adj" fmla="val 8000"/>
+            </a:avLst>
+          </a:prstGeom>
+          <a:solidFill>
+            <a:srgbClr val="EDF4F9"/>
+          </a:solidFill>
+          <a:ln>
+            <a:noFill/>
+          </a:ln>
+          <a:effectLst/>
+        </p:spPr>
+        <p:style>
+          <a:lnRef idx="1">
+            <a:schemeClr val="accent1"/>
+          </a:lnRef>
+          <a:fillRef idx="3">
+            <a:schemeClr val="accent1"/>
+          </a:fillRef>
+          <a:effectRef idx="2">
+            <a:schemeClr val="accent1"/>
+          </a:effectRef>
+          <a:fontRef idx="minor">
+            <a:schemeClr val="lt1"/>
+          </a:fontRef>
+        </p:style>
+        <p:txBody>
+          <a:bodyPr rtlCol="0" anchor="t" wrap="square" lIns="219456" rIns="109728" tIns="109728" bIns="73152"/>
+          <a:lstStyle/>
+          <a:p>
+            <a:pPr algn="ctr">
+              <a:spcAft>
+                <a:spcPts val="300"/>
+              </a:spcAft>
+            </a:pPr>
+            <a:r>
+              <a:rPr sz="1450" b="1">
+                <a:solidFill>
+                  <a:srgbClr val="00219B"/>
+                </a:solidFill>
+                <a:latin typeface="BIZ UDPGothic"/>
+                <a:ea typeface="BIZ UDPGothic"/>
+              </a:rPr>
+              <a:t>フィジカルAIは、AI進化の「次章」</a:t>
+            </a:r>
+          </a:p>
+          <a:p>
+            <a:r>
+              <a:rPr sz="1200" b="0">
+                <a:solidFill>
+                  <a:srgbClr val="191919"/>
+                </a:solidFill>
+                <a:latin typeface="BIZ UDPGothic"/>
+                <a:ea typeface="BIZ UDPGothic"/>
+              </a:rPr>
+              <a:t>デジタルの知能が現実世界で働く段階へ。出力がテキストから「動作」に変わる</a:t>
+            </a:r>
+          </a:p>
+        </p:txBody>
+      </p:sp>
+      <p:sp>
+        <p:nvSpPr>
+          <p:cNvPr id="11" name="Oval 10"/>
+          <p:cNvSpPr/>
+          <p:nvPr/>
+        </p:nvSpPr>
+        <p:spPr>
+          <a:xfrm>
+            <a:off x="466344" y="3154680"/>
+            <a:ext cx="475488" cy="475488"/>
+          </a:xfrm>
+          <a:prstGeom prst="ellipse">
+            <a:avLst/>
+          </a:prstGeom>
+          <a:solidFill>
+            <a:srgbClr val="00219B"/>
+          </a:solidFill>
+          <a:ln>
+            <a:noFill/>
+          </a:ln>
+          <a:effectLst/>
+        </p:spPr>
+        <p:style>
+          <a:lnRef idx="1">
+            <a:schemeClr val="accent1"/>
+          </a:lnRef>
+          <a:fillRef idx="3">
+            <a:schemeClr val="accent1"/>
+          </a:fillRef>
+          <a:effectRef idx="2">
+            <a:schemeClr val="accent1"/>
+          </a:effectRef>
+          <a:fontRef idx="minor">
+            <a:schemeClr val="lt1"/>
+          </a:fontRef>
+        </p:style>
+        <p:txBody>
+          <a:bodyPr rtlCol="0" anchor="ctr" wrap="square" lIns="0" rIns="0" tIns="0" bIns="0"/>
+          <a:lstStyle/>
+          <a:p>
+            <a:pPr algn="ctr"/>
+            <a:r>
+              <a:rPr sz="1600" b="1">
+                <a:solidFill>
+                  <a:srgbClr val="FFFFFF"/>
+                </a:solidFill>
+                <a:latin typeface="BIZ UDPGothic"/>
+                <a:ea typeface="BIZ UDPGothic"/>
+              </a:rPr>
+              <a:t>2</a:t>
+            </a:r>
+          </a:p>
+        </p:txBody>
+      </p:sp>
+      <p:sp>
+        <p:nvSpPr>
+          <p:cNvPr id="12" name="Rounded Rectangle 11"/>
+          <p:cNvSpPr/>
+          <p:nvPr/>
+        </p:nvSpPr>
+        <p:spPr>
+          <a:xfrm>
+            <a:off x="1143000" y="3044952"/>
+            <a:ext cx="10506456" cy="1097280"/>
+          </a:xfrm>
+          <a:prstGeom prst="roundRect">
+            <a:avLst>
+              <a:gd name="adj" fmla="val 8000"/>
+            </a:avLst>
+          </a:prstGeom>
+          <a:solidFill>
+            <a:srgbClr val="EDF4F9"/>
+          </a:solidFill>
+          <a:ln>
+            <a:noFill/>
+          </a:ln>
+          <a:effectLst/>
+        </p:spPr>
+        <p:style>
+          <a:lnRef idx="1">
+            <a:schemeClr val="accent1"/>
+          </a:lnRef>
+          <a:fillRef idx="3">
+            <a:schemeClr val="accent1"/>
+          </a:fillRef>
+          <a:effectRef idx="2">
+            <a:schemeClr val="accent1"/>
+          </a:effectRef>
+          <a:fontRef idx="minor">
+            <a:schemeClr val="lt1"/>
+          </a:fontRef>
+        </p:style>
+        <p:txBody>
+          <a:bodyPr rtlCol="0" anchor="t" wrap="square" lIns="219456" rIns="109728" tIns="109728" bIns="73152"/>
+          <a:lstStyle/>
+          <a:p>
+            <a:pPr algn="ctr">
+              <a:spcAft>
+                <a:spcPts val="300"/>
+              </a:spcAft>
+            </a:pPr>
+            <a:r>
+              <a:rPr sz="1450" b="1">
+                <a:solidFill>
+                  <a:srgbClr val="00219B"/>
+                </a:solidFill>
+                <a:latin typeface="BIZ UDPGothic"/>
+                <a:ea typeface="BIZ UDPGothic"/>
+              </a:rPr>
+              <a:t>2025〜26年は実証から初期導入への転換点</a:t>
+            </a:r>
+          </a:p>
+          <a:p>
+            <a:r>
+              <a:rPr sz="1200" b="0">
+                <a:solidFill>
+                  <a:srgbClr val="191919"/>
+                </a:solidFill>
+                <a:latin typeface="BIZ UDPGothic"/>
+                <a:ea typeface="BIZ UDPGothic"/>
+              </a:rPr>
+              <a:t>労働力不足を背景に、製造・物流など環境の整った現場から実装が始まっている</a:t>
+            </a:r>
+          </a:p>
+        </p:txBody>
+      </p:sp>
+      <p:sp>
+        <p:nvSpPr>
+          <p:cNvPr id="13" name="Oval 12"/>
+          <p:cNvSpPr/>
+          <p:nvPr/>
+        </p:nvSpPr>
+        <p:spPr>
+          <a:xfrm>
+            <a:off x="466344" y="4416552"/>
+            <a:ext cx="475488" cy="475488"/>
+          </a:xfrm>
+          <a:prstGeom prst="ellipse">
+            <a:avLst/>
+          </a:prstGeom>
+          <a:solidFill>
+            <a:srgbClr val="00219B"/>
+          </a:solidFill>
+          <a:ln>
+            <a:noFill/>
+          </a:ln>
+          <a:effectLst/>
+        </p:spPr>
+        <p:style>
+          <a:lnRef idx="1">
+            <a:schemeClr val="accent1"/>
+          </a:lnRef>
+          <a:fillRef idx="3">
+            <a:schemeClr val="accent1"/>
+          </a:fillRef>
+          <a:effectRef idx="2">
+            <a:schemeClr val="accent1"/>
+          </a:effectRef>
+          <a:fontRef idx="minor">
+            <a:schemeClr val="lt1"/>
+          </a:fontRef>
+        </p:style>
+        <p:txBody>
+          <a:bodyPr rtlCol="0" anchor="ctr" wrap="square" lIns="0" rIns="0" tIns="0" bIns="0"/>
+          <a:lstStyle/>
+          <a:p>
+            <a:pPr algn="ctr"/>
+            <a:r>
+              <a:rPr sz="1600" b="1">
+                <a:solidFill>
+                  <a:srgbClr val="FFFFFF"/>
+                </a:solidFill>
+                <a:latin typeface="BIZ UDPGothic"/>
+                <a:ea typeface="BIZ UDPGothic"/>
+              </a:rPr>
+              <a:t>3</a:t>
+            </a:r>
+          </a:p>
+        </p:txBody>
+      </p:sp>
+      <p:sp>
+        <p:nvSpPr>
+          <p:cNvPr id="14" name="Rounded Rectangle 13"/>
+          <p:cNvSpPr/>
+          <p:nvPr/>
+        </p:nvSpPr>
+        <p:spPr>
+          <a:xfrm>
+            <a:off x="1143000" y="4306824"/>
+            <a:ext cx="10506456" cy="1097280"/>
+          </a:xfrm>
+          <a:prstGeom prst="roundRect">
+            <a:avLst>
+              <a:gd name="adj" fmla="val 8000"/>
+            </a:avLst>
+          </a:prstGeom>
+          <a:solidFill>
+            <a:srgbClr val="EDF4F9"/>
+          </a:solidFill>
+          <a:ln>
+            <a:noFill/>
+          </a:ln>
+          <a:effectLst/>
+        </p:spPr>
+        <p:style>
+          <a:lnRef idx="1">
+            <a:schemeClr val="accent1"/>
+          </a:lnRef>
+          <a:fillRef idx="3">
+            <a:schemeClr val="accent1"/>
+          </a:fillRef>
+          <a:effectRef idx="2">
+            <a:schemeClr val="accent1"/>
+          </a:effectRef>
+          <a:fontRef idx="minor">
+            <a:schemeClr val="lt1"/>
+          </a:fontRef>
+        </p:style>
+        <p:txBody>
+          <a:bodyPr rtlCol="0" anchor="t" wrap="square" lIns="219456" rIns="109728" tIns="109728" bIns="73152"/>
+          <a:lstStyle/>
+          <a:p>
+            <a:pPr algn="ctr">
+              <a:spcAft>
+                <a:spcPts val="300"/>
+              </a:spcAft>
+            </a:pPr>
+            <a:r>
+              <a:rPr sz="1450" b="1">
+                <a:solidFill>
+                  <a:srgbClr val="00219B"/>
+                </a:solidFill>
+                <a:latin typeface="BIZ UDPGothic"/>
+                <a:ea typeface="BIZ UDPGothic"/>
+              </a:rPr>
+              <a:t>価値の源泉はハードではなく「統合」</a:t>
+            </a:r>
+          </a:p>
+          <a:p>
+            <a:r>
+              <a:rPr sz="1200" b="0">
+                <a:solidFill>
+                  <a:srgbClr val="191919"/>
+                </a:solidFill>
+                <a:latin typeface="BIZ UDPGothic"/>
+                <a:ea typeface="BIZ UDPGothic"/>
+              </a:rPr>
+              <a:t>基盤モデル × シミュレーション × 現場データ。つなぎ込む力が競争力になる</a:t>
+            </a:r>
+          </a:p>
+        </p:txBody>
+      </p:sp>
+      <p:sp>
+        <p:nvSpPr>
+          <p:cNvPr id="15" name="Rounded Rectangle 14"/>
+          <p:cNvSpPr/>
+          <p:nvPr/>
+        </p:nvSpPr>
+        <p:spPr>
+          <a:xfrm>
+            <a:off x="466344" y="5532120"/>
+            <a:ext cx="11183112" cy="777240"/>
+          </a:xfrm>
+          <a:prstGeom prst="roundRect">
+            <a:avLst>
+              <a:gd name="adj" fmla="val 8000"/>
+            </a:avLst>
+          </a:prstGeom>
+          <a:solidFill>
+            <a:srgbClr val="FFFFFF"/>
+          </a:solidFill>
+          <a:ln w="15875">
+            <a:solidFill>
+              <a:srgbClr val="2A65F5"/>
+            </a:solidFill>
+          </a:ln>
+          <a:effectLst/>
+        </p:spPr>
+        <p:style>
+          <a:lnRef idx="1">
+            <a:schemeClr val="accent1"/>
+          </a:lnRef>
+          <a:fillRef idx="3">
+            <a:schemeClr val="accent1"/>
+          </a:fillRef>
+          <a:effectRef idx="2">
+            <a:schemeClr val="accent1"/>
+          </a:effectRef>
+          <a:fontRef idx="minor">
+            <a:schemeClr val="lt1"/>
+          </a:fontRef>
+        </p:style>
+        <p:txBody>
+          <a:bodyPr rtlCol="0" anchor="ctr" wrap="square" lIns="256032" rIns="109728" tIns="73152" bIns="73152"/>
+          <a:lstStyle/>
+          <a:p>
+            <a:pPr algn="ctr"/>
+            <a:r>
+              <a:rPr sz="1300" b="1">
+                <a:solidFill>
+                  <a:srgbClr val="2A65F5"/>
+                </a:solidFill>
+                <a:latin typeface="BIZ UDPGothic"/>
+                <a:ea typeface="BIZ UDPGothic"/>
+              </a:rPr>
+              <a:t>ディスカッション：</a:t>
+            </a:r>
+            <a:r>
+              <a:rPr sz="1300" b="1">
+                <a:solidFill>
+                  <a:srgbClr val="191919"/>
+                </a:solidFill>
+                <a:latin typeface="BIZ UDPGothic"/>
+                <a:ea typeface="BIZ UDPGothic"/>
+              </a:rPr>
+              <a:t>私たちの顧客の現場で、フィジカルAIが最初に価値を出せそうな業務はどこか？</a:t>
+            </a:r>
+          </a:p>
+        </p:txBody>
+      </p:sp>
+    </p:spTree>
+    <p:extLst>
+      <p:ext uri="{BB962C8B-B14F-4D97-AF65-F5344CB8AC3E}">
+        <p14:creationId xmlns:p14="http://schemas.microsoft.com/office/powerpoint/2010/main" val="3061702759"/>
+      </p:ext>
+    </p:extLst>
+  </p:cSld>
+  <p:clrMapOvr>
+    <a:masterClrMapping/>
+  </p:clrMapOvr>
+</p:sld>
+</file>
+
+<file path=ppt/slides/slide22.xml><?xml version="1.0" encoding="utf-8"?>
+<p:sld xmlns:a="http://schemas.openxmlformats.org/drawingml/2006/main" xmlns:r="http://schemas.openxmlformats.org/officeDocument/2006/relationships" xmlns:p="http://schemas.openxmlformats.org/presentationml/2006/main">
+  <p:cSld>
+    <p:spTree>
+      <p:nvGrpSpPr>
+        <p:cNvPr id="1" name=""/>
+        <p:cNvGrpSpPr/>
+        <p:nvPr/>
+      </p:nvGrpSpPr>
+      <p:grpSpPr>
+        <a:xfrm>
+          <a:off x="0" y="0"/>
+          <a:ext cx="0" cy="0"/>
+          <a:chOff x="0" y="0"/>
+          <a:chExt cx="0" cy="0"/>
+        </a:xfrm>
+      </p:grpSpPr>
+      <p:sp>
+        <p:nvSpPr>
+          <p:cNvPr id="2" name="タイトル 1">
+            <a:extLst>
+              <a:ext uri="{FF2B5EF4-FFF2-40B4-BE49-F238E27FC236}">
+                <a16:creationId xmlns:a16="http://schemas.microsoft.com/office/drawing/2014/main" id="{5CCA871B-1D64-6422-1825-AE06F8DFBBC1}"/>
+              </a:ext>
+            </a:extLst>
+          </p:cNvPr>
+          <p:cNvSpPr>
+            <a:spLocks noGrp="1"/>
+          </p:cNvSpPr>
+          <p:nvPr>
+            <p:ph type="ctrTitle"/>
+          </p:nvPr>
+        </p:nvSpPr>
+        <p:spPr/>
+        <p:txBody>
+          <a:bodyPr/>
+          <a:lstStyle/>
+          <a:p>
+            <a:pPr algn="l"/>
+            <a:r>
+              <a:rPr kumimoji="1" lang="en-US" altLang="ja-JP" dirty="0"/>
+              <a:t>End of Document</a:t>
+            </a:r>
+            <a:endParaRPr kumimoji="1" lang="ja-JP" altLang="en-US" dirty="0"/>
+          </a:p>
+        </p:txBody>
+      </p:sp>
+      <p:sp>
+        <p:nvSpPr>
+          <p:cNvPr id="3" name="コンテンツ プレースホルダー 2">
+            <a:extLst>
+              <a:ext uri="{FF2B5EF4-FFF2-40B4-BE49-F238E27FC236}">
+                <a16:creationId xmlns:a16="http://schemas.microsoft.com/office/drawing/2014/main" id="{7644250D-28F8-6DF2-7E14-230A7268ED08}"/>
+              </a:ext>
+            </a:extLst>
+          </p:cNvPr>
+          <p:cNvSpPr>
+            <a:spLocks noGrp="1"/>
+          </p:cNvSpPr>
+          <p:nvPr>
+            <p:ph idx="1"/>
+          </p:nvPr>
+        </p:nvSpPr>
+        <p:spPr>
+          <a:xfrm>
+            <a:off x="503858" y="4353680"/>
+            <a:ext cx="11184283" cy="784912"/>
+          </a:xfrm>
+        </p:spPr>
+        <p:txBody>
+          <a:bodyPr/>
+          <a:lstStyle/>
+          <a:p>
+            <a:r>
+              <a:rPr lang="ja-JP" altLang="en-US" dirty="0"/>
+              <a:t>双日テックイノベーション、双日テックイノベーションのロゴは、双日テックイノベーション株式会社の登録商標です。 </a:t>
+            </a:r>
+            <a:endParaRPr lang="en-US" altLang="ja-JP" dirty="0"/>
+          </a:p>
+          <a:p>
+            <a:r>
+              <a:rPr lang="ja-JP" altLang="en-US" dirty="0"/>
+              <a:t>その他記載されている全ての商標、サービスマーク、登録商標、登録サービスマークは、各所有者に所有権があります。 </a:t>
+            </a:r>
+            <a:endParaRPr lang="en-US" altLang="ja-JP" dirty="0"/>
+          </a:p>
+          <a:p>
+            <a:endParaRPr lang="en-US" altLang="ja-JP" dirty="0"/>
+          </a:p>
+          <a:p>
+            <a:r>
+              <a:rPr lang="ja-JP" altLang="en-US" dirty="0"/>
+              <a:t>本書記載の仕様はすべて予告なく変更される場合があります。</a:t>
+            </a:r>
+            <a:endParaRPr lang="en-US" altLang="ja-JP" dirty="0"/>
+          </a:p>
+          <a:p>
+            <a:r>
+              <a:rPr lang="ja-JP" altLang="en-US" dirty="0"/>
+              <a:t>本書の記載内容に誤りがあった場合、 あるいは記載内容を更新する義務が生じた場合も、双日テックイノベーションは一切責任を負いません。 </a:t>
+            </a:r>
+            <a:endParaRPr lang="en-US" altLang="ja-JP" dirty="0"/>
+          </a:p>
+          <a:p>
+            <a:r>
+              <a:rPr lang="ja-JP" altLang="en-US" dirty="0"/>
+              <a:t>双日テックイノベーションは、本書を予告無く変更、修正、または改訂する権利を有します。 </a:t>
+            </a:r>
+            <a:endParaRPr lang="en-US" altLang="ja-JP" dirty="0"/>
+          </a:p>
+          <a:p>
+            <a:r>
+              <a:rPr lang="ja-JP" altLang="en-US" dirty="0"/>
+              <a:t>本書に記載されている内容を無断で複写、複製することを禁じます。</a:t>
+            </a:r>
+            <a:endParaRPr lang="en-US" altLang="ja-JP" dirty="0"/>
+          </a:p>
+          <a:p>
+            <a:r>
+              <a:rPr lang="ja-JP" altLang="en-US" dirty="0"/>
+              <a:t> </a:t>
+            </a:r>
+            <a:endParaRPr lang="en-US" altLang="ja-JP" dirty="0"/>
+          </a:p>
+          <a:p>
+            <a:r>
+              <a:rPr lang="ja-JP" altLang="en-US" dirty="0"/>
+              <a:t>記載の価格は参考価格となり、ご検討の際にはお見積りのご依頼をお願いいたします。 </a:t>
+            </a:r>
+            <a:endParaRPr lang="en-US" altLang="ja-JP" dirty="0"/>
+          </a:p>
+          <a:p>
+            <a:r>
+              <a:rPr lang="ja-JP" altLang="en-US" dirty="0"/>
+              <a:t>為替変更やメーカーの価格改定により予告なく変更することがあります。</a:t>
+            </a:r>
+          </a:p>
+        </p:txBody>
+      </p:sp>
+    </p:spTree>
+    <p:extLst>
+      <p:ext uri="{BB962C8B-B14F-4D97-AF65-F5344CB8AC3E}">
+        <p14:creationId xmlns:p14="http://schemas.microsoft.com/office/powerpoint/2010/main" val="3507851067"/>
+      </p:ext>
+    </p:extLst>
+  </p:cSld>
+  <p:clrMapOvr>
+    <a:masterClrMapping/>
+  </p:clrMapOvr>
+</p:sld>
+</file>
+
+<file path=ppt/slides/slide23.xml><?xml version="1.0" encoding="utf-8"?>
+<p:sld xmlns:a="http://schemas.openxmlformats.org/drawingml/2006/main" xmlns:r="http://schemas.openxmlformats.org/officeDocument/2006/relationships" xmlns:p="http://schemas.openxmlformats.org/presentationml/2006/main">
+  <p:cSld>
+    <p:spTree>
+      <p:nvGrpSpPr>
+        <p:cNvPr id="1" name=""/>
+        <p:cNvGrpSpPr/>
+        <p:nvPr/>
+      </p:nvGrpSpPr>
+      <p:grpSpPr>
+        <a:xfrm>
+          <a:off x="0" y="0"/>
+          <a:ext cx="0" cy="0"/>
+          <a:chOff x="0" y="0"/>
+          <a:chExt cx="0" cy="0"/>
+        </a:xfrm>
+      </p:grpSpPr>
+    </p:spTree>
+    <p:extLst>
+      <p:ext uri="{BB962C8B-B14F-4D97-AF65-F5344CB8AC3E}">
+        <p14:creationId xmlns:p14="http://schemas.microsoft.com/office/powerpoint/2010/main" val="600665860"/>
       </p:ext>
     </p:extLst>
   </p:cSld>

--- a/docs/フィジカルAI勉強会.pptx
+++ b/docs/フィジカルAI勉強会.pptx
@@ -14213,53 +14213,9 @@
           </a:p>
         </p:txBody>
       </p:sp>
-      <p:sp>
-        <p:nvSpPr>
-          <p:cNvPr id="10" name="Oval 9"/>
-          <p:cNvSpPr/>
-          <p:nvPr/>
-        </p:nvSpPr>
-        <p:spPr>
-          <a:xfrm>
-            <a:off x="667512" y="1947672"/>
-            <a:ext cx="438912" cy="438912"/>
-          </a:xfrm>
-          <a:prstGeom prst="ellipse">
-            <a:avLst/>
-          </a:prstGeom>
-          <a:solidFill>
-            <a:srgbClr val="2A65F5"/>
-          </a:solidFill>
-          <a:ln>
-            <a:noFill/>
-          </a:ln>
-          <a:effectLst/>
-        </p:spPr>
-        <p:style>
-          <a:lnRef idx="1">
-            <a:schemeClr val="accent1"/>
-          </a:lnRef>
-          <a:fillRef idx="3">
-            <a:schemeClr val="accent1"/>
-          </a:fillRef>
-          <a:effectRef idx="2">
-            <a:schemeClr val="accent1"/>
-          </a:effectRef>
-          <a:fontRef idx="minor">
-            <a:schemeClr val="lt1"/>
-          </a:fontRef>
-        </p:style>
-        <p:txBody>
-          <a:bodyPr rtlCol="0" anchor="t" wrap="square" lIns="109728" rIns="109728" tIns="73152" bIns="73152"/>
-          <a:lstStyle/>
-          <a:p>
-            <a:pPr algn="ctr"/>
-          </a:p>
-        </p:txBody>
-      </p:sp>
       <p:pic>
         <p:nvPicPr>
-          <p:cNvPr id="11" name="Picture 10" descr="industry_w.png"/>
+          <p:cNvPr id="10" name="Picture 9" descr="industry_primary.png"/>
           <p:cNvPicPr>
             <a:picLocks noChangeAspect="1"/>
           </p:cNvPicPr>
@@ -14273,8 +14229,8 @@
         </p:blipFill>
         <p:spPr>
           <a:xfrm>
-            <a:off x="781629" y="2061789"/>
-            <a:ext cx="210677" cy="210677"/>
+            <a:off x="597286" y="1877446"/>
+            <a:ext cx="579363" cy="579363"/>
           </a:xfrm>
           <a:prstGeom prst="rect">
             <a:avLst/>
@@ -14283,7 +14239,7 @@
       </p:pic>
       <p:sp>
         <p:nvSpPr>
-          <p:cNvPr id="12" name="Rounded Rectangle 11"/>
+          <p:cNvPr id="11" name="Rounded Rectangle 10"/>
           <p:cNvSpPr/>
           <p:nvPr/>
         </p:nvSpPr>
@@ -14358,53 +14314,9 @@
           </a:p>
         </p:txBody>
       </p:sp>
-      <p:sp>
-        <p:nvSpPr>
-          <p:cNvPr id="13" name="Oval 12"/>
-          <p:cNvSpPr/>
-          <p:nvPr/>
-        </p:nvSpPr>
-        <p:spPr>
-          <a:xfrm>
-            <a:off x="6345936" y="1947672"/>
-            <a:ext cx="438912" cy="438912"/>
-          </a:xfrm>
-          <a:prstGeom prst="ellipse">
-            <a:avLst/>
-          </a:prstGeom>
-          <a:solidFill>
-            <a:srgbClr val="55D2D8"/>
-          </a:solidFill>
-          <a:ln>
-            <a:noFill/>
-          </a:ln>
-          <a:effectLst/>
-        </p:spPr>
-        <p:style>
-          <a:lnRef idx="1">
-            <a:schemeClr val="accent1"/>
-          </a:lnRef>
-          <a:fillRef idx="3">
-            <a:schemeClr val="accent1"/>
-          </a:fillRef>
-          <a:effectRef idx="2">
-            <a:schemeClr val="accent1"/>
-          </a:effectRef>
-          <a:fontRef idx="minor">
-            <a:schemeClr val="lt1"/>
-          </a:fontRef>
-        </p:style>
-        <p:txBody>
-          <a:bodyPr rtlCol="0" anchor="t" wrap="square" lIns="109728" rIns="109728" tIns="73152" bIns="73152"/>
-          <a:lstStyle/>
-          <a:p>
-            <a:pPr algn="ctr"/>
-          </a:p>
-        </p:txBody>
-      </p:sp>
       <p:pic>
         <p:nvPicPr>
-          <p:cNvPr id="14" name="Picture 13" descr="warehouse_w.png"/>
+          <p:cNvPr id="12" name="Picture 11" descr="warehouse_teal.png"/>
           <p:cNvPicPr>
             <a:picLocks noChangeAspect="1"/>
           </p:cNvPicPr>
@@ -14418,8 +14330,8 @@
         </p:blipFill>
         <p:spPr>
           <a:xfrm>
-            <a:off x="6460053" y="2061789"/>
-            <a:ext cx="210677" cy="210677"/>
+            <a:off x="6275710" y="1877446"/>
+            <a:ext cx="579363" cy="579363"/>
           </a:xfrm>
           <a:prstGeom prst="rect">
             <a:avLst/>
@@ -14428,7 +14340,7 @@
       </p:pic>
       <p:sp>
         <p:nvSpPr>
-          <p:cNvPr id="15" name="Rounded Rectangle 14"/>
+          <p:cNvPr id="13" name="Rounded Rectangle 12"/>
           <p:cNvSpPr/>
           <p:nvPr/>
         </p:nvSpPr>
@@ -14503,53 +14415,9 @@
           </a:p>
         </p:txBody>
       </p:sp>
-      <p:sp>
-        <p:nvSpPr>
-          <p:cNvPr id="16" name="Oval 15"/>
-          <p:cNvSpPr/>
-          <p:nvPr/>
-        </p:nvSpPr>
-        <p:spPr>
-          <a:xfrm>
-            <a:off x="667512" y="4142232"/>
-            <a:ext cx="438912" cy="438912"/>
-          </a:xfrm>
-          <a:prstGeom prst="ellipse">
-            <a:avLst/>
-          </a:prstGeom>
-          <a:solidFill>
-            <a:srgbClr val="AAA5FD"/>
-          </a:solidFill>
-          <a:ln>
-            <a:noFill/>
-          </a:ln>
-          <a:effectLst/>
-        </p:spPr>
-        <p:style>
-          <a:lnRef idx="1">
-            <a:schemeClr val="accent1"/>
-          </a:lnRef>
-          <a:fillRef idx="3">
-            <a:schemeClr val="accent1"/>
-          </a:fillRef>
-          <a:effectRef idx="2">
-            <a:schemeClr val="accent1"/>
-          </a:effectRef>
-          <a:fontRef idx="minor">
-            <a:schemeClr val="lt1"/>
-          </a:fontRef>
-        </p:style>
-        <p:txBody>
-          <a:bodyPr rtlCol="0" anchor="t" wrap="square" lIns="109728" rIns="109728" tIns="73152" bIns="73152"/>
-          <a:lstStyle/>
-          <a:p>
-            <a:pPr algn="ctr"/>
-          </a:p>
-        </p:txBody>
-      </p:sp>
       <p:pic>
         <p:nvPicPr>
-          <p:cNvPr id="17" name="Picture 16" descr="helmet_w.png"/>
+          <p:cNvPr id="14" name="Picture 13" descr="helmet_purple.png"/>
           <p:cNvPicPr>
             <a:picLocks noChangeAspect="1"/>
           </p:cNvPicPr>
@@ -14563,8 +14431,8 @@
         </p:blipFill>
         <p:spPr>
           <a:xfrm>
-            <a:off x="781629" y="4256349"/>
-            <a:ext cx="210677" cy="210677"/>
+            <a:off x="597286" y="4072006"/>
+            <a:ext cx="579363" cy="579363"/>
           </a:xfrm>
           <a:prstGeom prst="rect">
             <a:avLst/>
@@ -14573,7 +14441,7 @@
       </p:pic>
       <p:sp>
         <p:nvSpPr>
-          <p:cNvPr id="18" name="Rounded Rectangle 17"/>
+          <p:cNvPr id="15" name="Rounded Rectangle 14"/>
           <p:cNvSpPr/>
           <p:nvPr/>
         </p:nvSpPr>
@@ -14648,53 +14516,9 @@
           </a:p>
         </p:txBody>
       </p:sp>
-      <p:sp>
-        <p:nvSpPr>
-          <p:cNvPr id="19" name="Oval 18"/>
-          <p:cNvSpPr/>
-          <p:nvPr/>
-        </p:nvSpPr>
-        <p:spPr>
-          <a:xfrm>
-            <a:off x="6345936" y="4142232"/>
-            <a:ext cx="438912" cy="438912"/>
-          </a:xfrm>
-          <a:prstGeom prst="ellipse">
-            <a:avLst/>
-          </a:prstGeom>
-          <a:solidFill>
-            <a:srgbClr val="E86487"/>
-          </a:solidFill>
-          <a:ln>
-            <a:noFill/>
-          </a:ln>
-          <a:effectLst/>
-        </p:spPr>
-        <p:style>
-          <a:lnRef idx="1">
-            <a:schemeClr val="accent1"/>
-          </a:lnRef>
-          <a:fillRef idx="3">
-            <a:schemeClr val="accent1"/>
-          </a:fillRef>
-          <a:effectRef idx="2">
-            <a:schemeClr val="accent1"/>
-          </a:effectRef>
-          <a:fontRef idx="minor">
-            <a:schemeClr val="lt1"/>
-          </a:fontRef>
-        </p:style>
-        <p:txBody>
-          <a:bodyPr rtlCol="0" anchor="t" wrap="square" lIns="109728" rIns="109728" tIns="73152" bIns="73152"/>
-          <a:lstStyle/>
-          <a:p>
-            <a:pPr algn="ctr"/>
-          </a:p>
-        </p:txBody>
-      </p:sp>
       <p:pic>
         <p:nvPicPr>
-          <p:cNvPr id="20" name="Picture 19" descr="store_w.png"/>
+          <p:cNvPr id="16" name="Picture 15" descr="store_red.png"/>
           <p:cNvPicPr>
             <a:picLocks noChangeAspect="1"/>
           </p:cNvPicPr>
@@ -14708,8 +14532,8 @@
         </p:blipFill>
         <p:spPr>
           <a:xfrm>
-            <a:off x="6460053" y="4256349"/>
-            <a:ext cx="210677" cy="210677"/>
+            <a:off x="6275710" y="4072006"/>
+            <a:ext cx="579363" cy="579363"/>
           </a:xfrm>
           <a:prstGeom prst="rect">
             <a:avLst/>
@@ -14718,7 +14542,7 @@
       </p:pic>
       <p:sp>
         <p:nvSpPr>
-          <p:cNvPr id="21" name="TextBox 20"/>
+          <p:cNvPr id="17" name="TextBox 16"/>
           <p:cNvSpPr txBox="1"/>
           <p:nvPr/>
         </p:nvSpPr>
@@ -15001,53 +14825,9 @@
           </a:p>
         </p:txBody>
       </p:sp>
-      <p:sp>
-        <p:nvSpPr>
-          <p:cNvPr id="10" name="Oval 9"/>
-          <p:cNvSpPr/>
-          <p:nvPr/>
-        </p:nvSpPr>
-        <p:spPr>
-          <a:xfrm>
-            <a:off x="3392424" y="1929384"/>
-            <a:ext cx="402336" cy="402336"/>
-          </a:xfrm>
-          <a:prstGeom prst="ellipse">
-            <a:avLst/>
-          </a:prstGeom>
-          <a:solidFill>
-            <a:srgbClr val="2A65F5"/>
-          </a:solidFill>
-          <a:ln>
-            <a:noFill/>
-          </a:ln>
-          <a:effectLst/>
-        </p:spPr>
-        <p:style>
-          <a:lnRef idx="1">
-            <a:schemeClr val="accent1"/>
-          </a:lnRef>
-          <a:fillRef idx="3">
-            <a:schemeClr val="accent1"/>
-          </a:fillRef>
-          <a:effectRef idx="2">
-            <a:schemeClr val="accent1"/>
-          </a:effectRef>
-          <a:fontRef idx="minor">
-            <a:schemeClr val="lt1"/>
-          </a:fontRef>
-        </p:style>
-        <p:txBody>
-          <a:bodyPr rtlCol="0" anchor="t" wrap="square" lIns="109728" rIns="109728" tIns="73152" bIns="73152"/>
-          <a:lstStyle/>
-          <a:p>
-            <a:pPr algn="ctr"/>
-          </a:p>
-        </p:txBody>
-      </p:sp>
       <p:pic>
         <p:nvPicPr>
-          <p:cNvPr id="11" name="Picture 10" descr="building_w.png"/>
+          <p:cNvPr id="10" name="Picture 9" descr="building_primary.png"/>
           <p:cNvPicPr>
             <a:picLocks noChangeAspect="1"/>
           </p:cNvPicPr>
@@ -15061,8 +14841,8 @@
         </p:blipFill>
         <p:spPr>
           <a:xfrm>
-            <a:off x="3497031" y="2033991"/>
-            <a:ext cx="193121" cy="193121"/>
+            <a:off x="3328050" y="1865010"/>
+            <a:ext cx="531083" cy="531083"/>
           </a:xfrm>
           <a:prstGeom prst="rect">
             <a:avLst/>
@@ -15071,7 +14851,7 @@
       </p:pic>
       <p:sp>
         <p:nvSpPr>
-          <p:cNvPr id="12" name="Chevron 11"/>
+          <p:cNvPr id="11" name="Chevron 10"/>
           <p:cNvSpPr/>
           <p:nvPr/>
         </p:nvSpPr>
@@ -15117,7 +14897,7 @@
       </p:sp>
       <p:sp>
         <p:nvSpPr>
-          <p:cNvPr id="13" name="Rounded Rectangle 12"/>
+          <p:cNvPr id="12" name="Rounded Rectangle 11"/>
           <p:cNvSpPr/>
           <p:nvPr/>
         </p:nvSpPr>
@@ -15209,53 +14989,9 @@
           </a:p>
         </p:txBody>
       </p:sp>
-      <p:sp>
-        <p:nvSpPr>
-          <p:cNvPr id="14" name="Oval 13"/>
-          <p:cNvSpPr/>
-          <p:nvPr/>
-        </p:nvSpPr>
-        <p:spPr>
-          <a:xfrm>
-            <a:off x="7232903" y="1929384"/>
-            <a:ext cx="402336" cy="402336"/>
-          </a:xfrm>
-          <a:prstGeom prst="ellipse">
-            <a:avLst/>
-          </a:prstGeom>
-          <a:solidFill>
-            <a:srgbClr val="2A65F5"/>
-          </a:solidFill>
-          <a:ln>
-            <a:noFill/>
-          </a:ln>
-          <a:effectLst/>
-        </p:spPr>
-        <p:style>
-          <a:lnRef idx="1">
-            <a:schemeClr val="accent1"/>
-          </a:lnRef>
-          <a:fillRef idx="3">
-            <a:schemeClr val="accent1"/>
-          </a:fillRef>
-          <a:effectRef idx="2">
-            <a:schemeClr val="accent1"/>
-          </a:effectRef>
-          <a:fontRef idx="minor">
-            <a:schemeClr val="lt1"/>
-          </a:fontRef>
-        </p:style>
-        <p:txBody>
-          <a:bodyPr rtlCol="0" anchor="t" wrap="square" lIns="109728" rIns="109728" tIns="73152" bIns="73152"/>
-          <a:lstStyle/>
-          <a:p>
-            <a:pPr algn="ctr"/>
-          </a:p>
-        </p:txBody>
-      </p:sp>
       <p:pic>
         <p:nvPicPr>
-          <p:cNvPr id="15" name="Picture 14" descr="cubes_w.png"/>
+          <p:cNvPr id="13" name="Picture 12" descr="cubes_primary.png"/>
           <p:cNvPicPr>
             <a:picLocks noChangeAspect="1"/>
           </p:cNvPicPr>
@@ -15269,8 +15005,8 @@
         </p:blipFill>
         <p:spPr>
           <a:xfrm>
-            <a:off x="7337511" y="2033991"/>
-            <a:ext cx="193121" cy="193121"/>
+            <a:off x="7168530" y="1865010"/>
+            <a:ext cx="531083" cy="531083"/>
           </a:xfrm>
           <a:prstGeom prst="rect">
             <a:avLst/>
@@ -15279,7 +15015,7 @@
       </p:pic>
       <p:sp>
         <p:nvSpPr>
-          <p:cNvPr id="16" name="Chevron 15"/>
+          <p:cNvPr id="14" name="Chevron 13"/>
           <p:cNvSpPr/>
           <p:nvPr/>
         </p:nvSpPr>
@@ -15325,7 +15061,7 @@
       </p:sp>
       <p:sp>
         <p:nvSpPr>
-          <p:cNvPr id="17" name="Rounded Rectangle 16"/>
+          <p:cNvPr id="15" name="Rounded Rectangle 14"/>
           <p:cNvSpPr/>
           <p:nvPr/>
         </p:nvSpPr>
@@ -15417,53 +15153,9 @@
           </a:p>
         </p:txBody>
       </p:sp>
-      <p:sp>
-        <p:nvSpPr>
-          <p:cNvPr id="18" name="Oval 17"/>
-          <p:cNvSpPr/>
-          <p:nvPr/>
-        </p:nvSpPr>
-        <p:spPr>
-          <a:xfrm>
-            <a:off x="11073384" y="1929384"/>
-            <a:ext cx="402336" cy="402336"/>
-          </a:xfrm>
-          <a:prstGeom prst="ellipse">
-            <a:avLst/>
-          </a:prstGeom>
-          <a:solidFill>
-            <a:srgbClr val="2A65F5"/>
-          </a:solidFill>
-          <a:ln>
-            <a:noFill/>
-          </a:ln>
-          <a:effectLst/>
-        </p:spPr>
-        <p:style>
-          <a:lnRef idx="1">
-            <a:schemeClr val="accent1"/>
-          </a:lnRef>
-          <a:fillRef idx="3">
-            <a:schemeClr val="accent1"/>
-          </a:fillRef>
-          <a:effectRef idx="2">
-            <a:schemeClr val="accent1"/>
-          </a:effectRef>
-          <a:fontRef idx="minor">
-            <a:schemeClr val="lt1"/>
-          </a:fontRef>
-        </p:style>
-        <p:txBody>
-          <a:bodyPr rtlCol="0" anchor="t" wrap="square" lIns="109728" rIns="109728" tIns="73152" bIns="73152"/>
-          <a:lstStyle/>
-          <a:p>
-            <a:pPr algn="ctr"/>
-          </a:p>
-        </p:txBody>
-      </p:sp>
       <p:pic>
         <p:nvPicPr>
-          <p:cNvPr id="19" name="Picture 18" descr="robot_w.png"/>
+          <p:cNvPr id="16" name="Picture 15" descr="robot_primary.png"/>
           <p:cNvPicPr>
             <a:picLocks noChangeAspect="1"/>
           </p:cNvPicPr>
@@ -15477,8 +15169,8 @@
         </p:blipFill>
         <p:spPr>
           <a:xfrm>
-            <a:off x="11177991" y="2033991"/>
-            <a:ext cx="193121" cy="193121"/>
+            <a:off x="11009010" y="1865010"/>
+            <a:ext cx="531083" cy="531083"/>
           </a:xfrm>
           <a:prstGeom prst="rect">
             <a:avLst/>
@@ -15487,7 +15179,7 @@
       </p:pic>
       <p:sp>
         <p:nvSpPr>
-          <p:cNvPr id="20" name="Rounded Rectangle 19"/>
+          <p:cNvPr id="17" name="Rounded Rectangle 16"/>
           <p:cNvSpPr/>
           <p:nvPr/>
         </p:nvSpPr>
@@ -15769,53 +15461,9 @@
           </a:p>
         </p:txBody>
       </p:sp>
-      <p:sp>
-        <p:nvSpPr>
-          <p:cNvPr id="10" name="Oval 9"/>
-          <p:cNvSpPr/>
-          <p:nvPr/>
-        </p:nvSpPr>
-        <p:spPr>
-          <a:xfrm>
-            <a:off x="3145535" y="1929384"/>
-            <a:ext cx="402336" cy="402336"/>
-          </a:xfrm>
-          <a:prstGeom prst="ellipse">
-            <a:avLst/>
-          </a:prstGeom>
-          <a:solidFill>
-            <a:srgbClr val="2A65F5"/>
-          </a:solidFill>
-          <a:ln>
-            <a:noFill/>
-          </a:ln>
-          <a:effectLst/>
-        </p:spPr>
-        <p:style>
-          <a:lnRef idx="1">
-            <a:schemeClr val="accent1"/>
-          </a:lnRef>
-          <a:fillRef idx="3">
-            <a:schemeClr val="accent1"/>
-          </a:fillRef>
-          <a:effectRef idx="2">
-            <a:schemeClr val="accent1"/>
-          </a:effectRef>
-          <a:fontRef idx="minor">
-            <a:schemeClr val="lt1"/>
-          </a:fontRef>
-        </p:style>
-        <p:txBody>
-          <a:bodyPr rtlCol="0" anchor="t" wrap="square" lIns="109728" rIns="109728" tIns="73152" bIns="73152"/>
-          <a:lstStyle/>
-          <a:p>
-            <a:pPr algn="ctr"/>
-          </a:p>
-        </p:txBody>
-      </p:sp>
       <p:pic>
         <p:nvPicPr>
-          <p:cNvPr id="11" name="Picture 10" descr="camera_w.png"/>
+          <p:cNvPr id="10" name="Picture 9" descr="camera_primary.png"/>
           <p:cNvPicPr>
             <a:picLocks noChangeAspect="1"/>
           </p:cNvPicPr>
@@ -15829,8 +15477,8 @@
         </p:blipFill>
         <p:spPr>
           <a:xfrm>
-            <a:off x="3250143" y="2033991"/>
-            <a:ext cx="193121" cy="193121"/>
+            <a:off x="3081162" y="1865010"/>
+            <a:ext cx="531083" cy="531083"/>
           </a:xfrm>
           <a:prstGeom prst="rect">
             <a:avLst/>
@@ -15839,7 +15487,7 @@
       </p:pic>
       <p:sp>
         <p:nvSpPr>
-          <p:cNvPr id="12" name="Chevron 11"/>
+          <p:cNvPr id="11" name="Chevron 10"/>
           <p:cNvSpPr/>
           <p:nvPr/>
         </p:nvSpPr>
@@ -15885,7 +15533,7 @@
       </p:sp>
       <p:sp>
         <p:nvSpPr>
-          <p:cNvPr id="13" name="Rounded Rectangle 12"/>
+          <p:cNvPr id="12" name="Rounded Rectangle 11"/>
           <p:cNvSpPr/>
           <p:nvPr/>
         </p:nvSpPr>
@@ -15982,7 +15630,7 @@
       </p:sp>
       <p:pic>
         <p:nvPicPr>
-          <p:cNvPr id="14" name="Picture 13" descr="brain_w.png"/>
+          <p:cNvPr id="13" name="Picture 12" descr="brain.png"/>
           <p:cNvPicPr>
             <a:picLocks noChangeAspect="1"/>
           </p:cNvPicPr>
@@ -15996,8 +15644,8 @@
         </p:blipFill>
         <p:spPr>
           <a:xfrm>
-            <a:off x="5870447" y="1920240"/>
-            <a:ext cx="347472" cy="347472"/>
+            <a:off x="5806440" y="1847088"/>
+            <a:ext cx="475488" cy="475488"/>
           </a:xfrm>
           <a:prstGeom prst="rect">
             <a:avLst/>
@@ -16006,7 +15654,7 @@
       </p:pic>
       <p:sp>
         <p:nvSpPr>
-          <p:cNvPr id="15" name="Chevron 14"/>
+          <p:cNvPr id="14" name="Chevron 13"/>
           <p:cNvSpPr/>
           <p:nvPr/>
         </p:nvSpPr>
@@ -16052,7 +15700,7 @@
       </p:sp>
       <p:sp>
         <p:nvSpPr>
-          <p:cNvPr id="16" name="Rounded Rectangle 15"/>
+          <p:cNvPr id="15" name="Rounded Rectangle 14"/>
           <p:cNvSpPr/>
           <p:nvPr/>
         </p:nvSpPr>
@@ -16144,53 +15792,9 @@
           </a:p>
         </p:txBody>
       </p:sp>
-      <p:sp>
-        <p:nvSpPr>
-          <p:cNvPr id="17" name="Oval 16"/>
-          <p:cNvSpPr/>
-          <p:nvPr/>
-        </p:nvSpPr>
-        <p:spPr>
-          <a:xfrm>
-            <a:off x="11082528" y="1929384"/>
-            <a:ext cx="402336" cy="402336"/>
-          </a:xfrm>
-          <a:prstGeom prst="ellipse">
-            <a:avLst/>
-          </a:prstGeom>
-          <a:solidFill>
-            <a:srgbClr val="2A65F5"/>
-          </a:solidFill>
-          <a:ln>
-            <a:noFill/>
-          </a:ln>
-          <a:effectLst/>
-        </p:spPr>
-        <p:style>
-          <a:lnRef idx="1">
-            <a:schemeClr val="accent1"/>
-          </a:lnRef>
-          <a:fillRef idx="3">
-            <a:schemeClr val="accent1"/>
-          </a:fillRef>
-          <a:effectRef idx="2">
-            <a:schemeClr val="accent1"/>
-          </a:effectRef>
-          <a:fontRef idx="minor">
-            <a:schemeClr val="lt1"/>
-          </a:fontRef>
-        </p:style>
-        <p:txBody>
-          <a:bodyPr rtlCol="0" anchor="t" wrap="square" lIns="109728" rIns="109728" tIns="73152" bIns="73152"/>
-          <a:lstStyle/>
-          <a:p>
-            <a:pPr algn="ctr"/>
-          </a:p>
-        </p:txBody>
-      </p:sp>
       <p:pic>
         <p:nvPicPr>
-          <p:cNvPr id="18" name="Picture 17" descr="arm_w.png"/>
+          <p:cNvPr id="16" name="Picture 15" descr="arm_primary.png"/>
           <p:cNvPicPr>
             <a:picLocks noChangeAspect="1"/>
           </p:cNvPicPr>
@@ -16204,8 +15808,8 @@
         </p:blipFill>
         <p:spPr>
           <a:xfrm>
-            <a:off x="11187135" y="2033991"/>
-            <a:ext cx="193121" cy="193121"/>
+            <a:off x="11018154" y="1865010"/>
+            <a:ext cx="531083" cy="531083"/>
           </a:xfrm>
           <a:prstGeom prst="rect">
             <a:avLst/>
@@ -16214,7 +15818,7 @@
       </p:pic>
       <p:sp>
         <p:nvSpPr>
-          <p:cNvPr id="19" name="Rounded Rectangle 18"/>
+          <p:cNvPr id="17" name="Rounded Rectangle 16"/>
           <p:cNvSpPr/>
           <p:nvPr/>
         </p:nvSpPr>
@@ -16291,7 +15895,7 @@
       </p:sp>
       <p:sp>
         <p:nvSpPr>
-          <p:cNvPr id="20" name="Rounded Rectangle 19"/>
+          <p:cNvPr id="18" name="Rounded Rectangle 17"/>
           <p:cNvSpPr/>
           <p:nvPr/>
         </p:nvSpPr>
@@ -16462,109 +16066,9 @@
           </a:p>
         </p:txBody>
       </p:sp>
-      <p:sp>
-        <p:nvSpPr>
-          <p:cNvPr id="9" name="Rounded Rectangle 8"/>
-          <p:cNvSpPr/>
-          <p:nvPr/>
-        </p:nvSpPr>
-        <p:spPr>
-          <a:xfrm>
-            <a:off x="466344" y="1783080"/>
-            <a:ext cx="3840480" cy="2651760"/>
-          </a:xfrm>
-          <a:prstGeom prst="roundRect">
-            <a:avLst>
-              <a:gd name="adj" fmla="val 5000"/>
-            </a:avLst>
-          </a:prstGeom>
-          <a:solidFill>
-            <a:srgbClr val="00219B"/>
-          </a:solidFill>
-          <a:ln>
-            <a:noFill/>
-          </a:ln>
-          <a:effectLst/>
-        </p:spPr>
-        <p:style>
-          <a:lnRef idx="1">
-            <a:schemeClr val="accent1"/>
-          </a:lnRef>
-          <a:fillRef idx="3">
-            <a:schemeClr val="accent1"/>
-          </a:fillRef>
-          <a:effectRef idx="2">
-            <a:schemeClr val="accent1"/>
-          </a:effectRef>
-          <a:fontRef idx="minor">
-            <a:schemeClr val="lt1"/>
-          </a:fontRef>
-        </p:style>
-        <p:txBody>
-          <a:bodyPr rtlCol="0" anchor="t" wrap="square" lIns="146304" rIns="109728" tIns="109728" bIns="73152"/>
-          <a:lstStyle/>
-          <a:p>
-            <a:pPr algn="ctr"/>
-            <a:r>
-              <a:rPr sz="1050" b="1">
-                <a:solidFill>
-                  <a:srgbClr val="6BB8F2"/>
-                </a:solidFill>
-                <a:latin typeface="BIZ UDPGothic"/>
-                <a:ea typeface="BIZ UDPGothic"/>
-              </a:rPr>
-              <a:t>物体検知のイメージ（カメラ映像）</a:t>
-            </a:r>
-          </a:p>
-        </p:txBody>
-      </p:sp>
-      <p:sp>
-        <p:nvSpPr>
-          <p:cNvPr id="10" name="Rectangle 9"/>
-          <p:cNvSpPr/>
-          <p:nvPr/>
-        </p:nvSpPr>
-        <p:spPr>
-          <a:xfrm>
-            <a:off x="868680" y="2331720"/>
-            <a:ext cx="1188720" cy="1783080"/>
-          </a:xfrm>
-          <a:prstGeom prst="rect">
-            <a:avLst/>
-          </a:prstGeom>
-          <a:noFill/>
-          <a:ln w="25400">
-            <a:solidFill>
-              <a:srgbClr val="55D2D8"/>
-            </a:solidFill>
-          </a:ln>
-          <a:effectLst/>
-        </p:spPr>
-        <p:style>
-          <a:lnRef idx="1">
-            <a:schemeClr val="accent1"/>
-          </a:lnRef>
-          <a:fillRef idx="3">
-            <a:schemeClr val="accent1"/>
-          </a:fillRef>
-          <a:effectRef idx="2">
-            <a:schemeClr val="accent1"/>
-          </a:effectRef>
-          <a:fontRef idx="minor">
-            <a:schemeClr val="lt1"/>
-          </a:fontRef>
-        </p:style>
-        <p:txBody>
-          <a:bodyPr rtlCol="0" anchor="t" wrap="square" lIns="109728" rIns="109728" tIns="73152" bIns="73152"/>
-          <a:lstStyle/>
-          <a:p>
-            <a:pPr algn="ctr"/>
-          </a:p>
-        </p:txBody>
-      </p:sp>
       <p:pic>
         <p:nvPicPr>
-          <p:cNvPr id="11" name="Picture 10" descr="person_w.png"/>
+          <p:cNvPr id="9" name="Picture 8" descr="scene_detect.png"/>
           <p:cNvPicPr>
             <a:picLocks noChangeAspect="1"/>
           </p:cNvPicPr>
@@ -16578,8 +16082,8 @@
         </p:blipFill>
         <p:spPr>
           <a:xfrm>
-            <a:off x="1170432" y="2606040"/>
-            <a:ext cx="566928" cy="566928"/>
+            <a:off x="466344" y="1783080"/>
+            <a:ext cx="3840480" cy="2606040"/>
           </a:xfrm>
           <a:prstGeom prst="rect">
             <a:avLst/>
@@ -16588,145 +16092,7 @@
       </p:pic>
       <p:sp>
         <p:nvSpPr>
-          <p:cNvPr id="12" name="TextBox 11"/>
-          <p:cNvSpPr txBox="1"/>
-          <p:nvPr/>
-        </p:nvSpPr>
-        <p:spPr>
-          <a:xfrm>
-            <a:off x="868680" y="2121408"/>
-            <a:ext cx="1463040" cy="274320"/>
-          </a:xfrm>
-          <a:prstGeom prst="rect">
-            <a:avLst/>
-          </a:prstGeom>
-          <a:noFill/>
-        </p:spPr>
-        <p:txBody>
-          <a:bodyPr wrap="square" lIns="0" rIns="0" tIns="0" bIns="0" anchor="t">
-            <a:spAutoFit/>
-          </a:bodyPr>
-          <a:lstStyle/>
-          <a:p>
-            <a:r>
-              <a:rPr sz="950" b="1">
-                <a:solidFill>
-                  <a:srgbClr val="55D2D8"/>
-                </a:solidFill>
-                <a:latin typeface="BIZ UDPGothic"/>
-                <a:ea typeface="BIZ UDPGothic"/>
-              </a:rPr>
-              <a:t>作業員 0.97</a:t>
-            </a:r>
-          </a:p>
-        </p:txBody>
-      </p:sp>
-      <p:sp>
-        <p:nvSpPr>
-          <p:cNvPr id="13" name="Rectangle 12"/>
-          <p:cNvSpPr/>
-          <p:nvPr/>
-        </p:nvSpPr>
-        <p:spPr>
-          <a:xfrm>
-            <a:off x="2514600" y="3017520"/>
-            <a:ext cx="1417320" cy="1097280"/>
-          </a:xfrm>
-          <a:prstGeom prst="rect">
-            <a:avLst/>
-          </a:prstGeom>
-          <a:noFill/>
-          <a:ln w="25400">
-            <a:solidFill>
-              <a:srgbClr val="E86487"/>
-            </a:solidFill>
-          </a:ln>
-          <a:effectLst/>
-        </p:spPr>
-        <p:style>
-          <a:lnRef idx="1">
-            <a:schemeClr val="accent1"/>
-          </a:lnRef>
-          <a:fillRef idx="3">
-            <a:schemeClr val="accent1"/>
-          </a:fillRef>
-          <a:effectRef idx="2">
-            <a:schemeClr val="accent1"/>
-          </a:effectRef>
-          <a:fontRef idx="minor">
-            <a:schemeClr val="lt1"/>
-          </a:fontRef>
-        </p:style>
-        <p:txBody>
-          <a:bodyPr rtlCol="0" anchor="t" wrap="square" lIns="109728" rIns="109728" tIns="73152" bIns="73152"/>
-          <a:lstStyle/>
-          <a:p>
-            <a:pPr algn="ctr"/>
-          </a:p>
-        </p:txBody>
-      </p:sp>
-      <p:pic>
-        <p:nvPicPr>
-          <p:cNvPr id="14" name="Picture 13" descr="boxopen_w.png"/>
-          <p:cNvPicPr>
-            <a:picLocks noChangeAspect="1"/>
-          </p:cNvPicPr>
-          <p:nvPr/>
-        </p:nvPicPr>
-        <p:blipFill>
-          <a:blip r:embed="rId3"/>
-          <a:stretch>
-            <a:fillRect/>
-          </a:stretch>
-        </p:blipFill>
-        <p:spPr>
-          <a:xfrm>
-            <a:off x="2944368" y="3246120"/>
-            <a:ext cx="548640" cy="548640"/>
-          </a:xfrm>
-          <a:prstGeom prst="rect">
-            <a:avLst/>
-          </a:prstGeom>
-        </p:spPr>
-      </p:pic>
-      <p:sp>
-        <p:nvSpPr>
-          <p:cNvPr id="15" name="TextBox 14"/>
-          <p:cNvSpPr txBox="1"/>
-          <p:nvPr/>
-        </p:nvSpPr>
-        <p:spPr>
-          <a:xfrm>
-            <a:off x="2514600" y="2807208"/>
-            <a:ext cx="1463040" cy="274320"/>
-          </a:xfrm>
-          <a:prstGeom prst="rect">
-            <a:avLst/>
-          </a:prstGeom>
-          <a:noFill/>
-        </p:spPr>
-        <p:txBody>
-          <a:bodyPr wrap="square" lIns="0" rIns="0" tIns="0" bIns="0" anchor="t">
-            <a:spAutoFit/>
-          </a:bodyPr>
-          <a:lstStyle/>
-          <a:p>
-            <a:r>
-              <a:rPr sz="950" b="1">
-                <a:solidFill>
-                  <a:srgbClr val="E86487"/>
-                </a:solidFill>
-                <a:latin typeface="BIZ UDPGothic"/>
-                <a:ea typeface="BIZ UDPGothic"/>
-              </a:rPr>
-              <a:t>パレット 0.88</a:t>
-            </a:r>
-          </a:p>
-        </p:txBody>
-      </p:sp>
-      <p:sp>
-        <p:nvSpPr>
-          <p:cNvPr id="16" name="TextBox 15"/>
+          <p:cNvPr id="10" name="TextBox 9"/>
           <p:cNvSpPr txBox="1"/>
           <p:nvPr/>
         </p:nvSpPr>
@@ -16766,7 +16132,7 @@
       </p:sp>
       <p:sp>
         <p:nvSpPr>
-          <p:cNvPr id="17" name="Rounded Rectangle 16"/>
+          <p:cNvPr id="11" name="Rounded Rectangle 10"/>
           <p:cNvSpPr/>
           <p:nvPr/>
         </p:nvSpPr>
@@ -16836,68 +16202,24 @@
           </a:p>
         </p:txBody>
       </p:sp>
-      <p:sp>
-        <p:nvSpPr>
-          <p:cNvPr id="18" name="Oval 17"/>
-          <p:cNvSpPr/>
-          <p:nvPr/>
-        </p:nvSpPr>
-        <p:spPr>
-          <a:xfrm>
-            <a:off x="4709160" y="2029967"/>
-            <a:ext cx="420624" cy="420624"/>
-          </a:xfrm>
-          <a:prstGeom prst="ellipse">
-            <a:avLst/>
-          </a:prstGeom>
-          <a:solidFill>
-            <a:srgbClr val="00219B"/>
-          </a:solidFill>
-          <a:ln>
-            <a:noFill/>
-          </a:ln>
-          <a:effectLst/>
-        </p:spPr>
-        <p:style>
-          <a:lnRef idx="1">
-            <a:schemeClr val="accent1"/>
-          </a:lnRef>
-          <a:fillRef idx="3">
-            <a:schemeClr val="accent1"/>
-          </a:fillRef>
-          <a:effectRef idx="2">
-            <a:schemeClr val="accent1"/>
-          </a:effectRef>
-          <a:fontRef idx="minor">
-            <a:schemeClr val="lt1"/>
-          </a:fontRef>
-        </p:style>
-        <p:txBody>
-          <a:bodyPr rtlCol="0" anchor="t" wrap="square" lIns="109728" rIns="109728" tIns="73152" bIns="73152"/>
-          <a:lstStyle/>
-          <a:p>
-            <a:pPr algn="ctr"/>
-          </a:p>
-        </p:txBody>
-      </p:sp>
       <p:pic>
         <p:nvPicPr>
-          <p:cNvPr id="19" name="Picture 18" descr="crosshairs_w.png"/>
+          <p:cNvPr id="12" name="Picture 11" descr="crosshairs_primary.png"/>
           <p:cNvPicPr>
             <a:picLocks noChangeAspect="1"/>
           </p:cNvPicPr>
           <p:nvPr/>
         </p:nvPicPr>
         <p:blipFill>
-          <a:blip r:embed="rId4"/>
+          <a:blip r:embed="rId3"/>
           <a:stretch>
             <a:fillRect/>
           </a:stretch>
         </p:blipFill>
         <p:spPr>
           <a:xfrm>
-            <a:off x="4818522" y="2139330"/>
-            <a:ext cx="201899" cy="201899"/>
+            <a:off x="4641860" y="1962668"/>
+            <a:ext cx="555223" cy="555223"/>
           </a:xfrm>
           <a:prstGeom prst="rect">
             <a:avLst/>
@@ -16906,7 +16228,7 @@
       </p:pic>
       <p:sp>
         <p:nvSpPr>
-          <p:cNvPr id="20" name="Rounded Rectangle 19"/>
+          <p:cNvPr id="13" name="Rounded Rectangle 12"/>
           <p:cNvSpPr/>
           <p:nvPr/>
         </p:nvSpPr>
@@ -16976,68 +16298,24 @@
           </a:p>
         </p:txBody>
       </p:sp>
-      <p:sp>
-        <p:nvSpPr>
-          <p:cNvPr id="21" name="Oval 20"/>
-          <p:cNvSpPr/>
-          <p:nvPr/>
-        </p:nvSpPr>
-        <p:spPr>
-          <a:xfrm>
-            <a:off x="4709160" y="3054096"/>
-            <a:ext cx="420624" cy="420624"/>
-          </a:xfrm>
-          <a:prstGeom prst="ellipse">
-            <a:avLst/>
-          </a:prstGeom>
-          <a:solidFill>
-            <a:srgbClr val="00219B"/>
-          </a:solidFill>
-          <a:ln>
-            <a:noFill/>
-          </a:ln>
-          <a:effectLst/>
-        </p:spPr>
-        <p:style>
-          <a:lnRef idx="1">
-            <a:schemeClr val="accent1"/>
-          </a:lnRef>
-          <a:fillRef idx="3">
-            <a:schemeClr val="accent1"/>
-          </a:fillRef>
-          <a:effectRef idx="2">
-            <a:schemeClr val="accent1"/>
-          </a:effectRef>
-          <a:fontRef idx="minor">
-            <a:schemeClr val="lt1"/>
-          </a:fontRef>
-        </p:style>
-        <p:txBody>
-          <a:bodyPr rtlCol="0" anchor="t" wrap="square" lIns="109728" rIns="109728" tIns="73152" bIns="73152"/>
-          <a:lstStyle/>
-          <a:p>
-            <a:pPr algn="ctr"/>
-          </a:p>
-        </p:txBody>
-      </p:sp>
       <p:pic>
         <p:nvPicPr>
-          <p:cNvPr id="22" name="Picture 21" descr="image_w.png"/>
+          <p:cNvPr id="14" name="Picture 13" descr="image_primary.png"/>
           <p:cNvPicPr>
             <a:picLocks noChangeAspect="1"/>
           </p:cNvPicPr>
           <p:nvPr/>
         </p:nvPicPr>
         <p:blipFill>
-          <a:blip r:embed="rId5"/>
+          <a:blip r:embed="rId4"/>
           <a:stretch>
             <a:fillRect/>
           </a:stretch>
         </p:blipFill>
         <p:spPr>
           <a:xfrm>
-            <a:off x="4818522" y="3163458"/>
-            <a:ext cx="201899" cy="201899"/>
+            <a:off x="4641860" y="2986796"/>
+            <a:ext cx="555223" cy="555223"/>
           </a:xfrm>
           <a:prstGeom prst="rect">
             <a:avLst/>
@@ -17046,7 +16324,7 @@
       </p:pic>
       <p:sp>
         <p:nvSpPr>
-          <p:cNvPr id="23" name="Rounded Rectangle 22"/>
+          <p:cNvPr id="15" name="Rounded Rectangle 14"/>
           <p:cNvSpPr/>
           <p:nvPr/>
         </p:nvSpPr>
@@ -17116,68 +16394,24 @@
           </a:p>
         </p:txBody>
       </p:sp>
-      <p:sp>
-        <p:nvSpPr>
-          <p:cNvPr id="24" name="Oval 23"/>
-          <p:cNvSpPr/>
-          <p:nvPr/>
-        </p:nvSpPr>
-        <p:spPr>
-          <a:xfrm>
-            <a:off x="4709160" y="4078224"/>
-            <a:ext cx="420624" cy="420624"/>
-          </a:xfrm>
-          <a:prstGeom prst="ellipse">
-            <a:avLst/>
-          </a:prstGeom>
-          <a:solidFill>
-            <a:srgbClr val="00219B"/>
-          </a:solidFill>
-          <a:ln>
-            <a:noFill/>
-          </a:ln>
-          <a:effectLst/>
-        </p:spPr>
-        <p:style>
-          <a:lnRef idx="1">
-            <a:schemeClr val="accent1"/>
-          </a:lnRef>
-          <a:fillRef idx="3">
-            <a:schemeClr val="accent1"/>
-          </a:fillRef>
-          <a:effectRef idx="2">
-            <a:schemeClr val="accent1"/>
-          </a:effectRef>
-          <a:fontRef idx="minor">
-            <a:schemeClr val="lt1"/>
-          </a:fontRef>
-        </p:style>
-        <p:txBody>
-          <a:bodyPr rtlCol="0" anchor="t" wrap="square" lIns="109728" rIns="109728" tIns="73152" bIns="73152"/>
-          <a:lstStyle/>
-          <a:p>
-            <a:pPr algn="ctr"/>
-          </a:p>
-        </p:txBody>
-      </p:sp>
       <p:pic>
         <p:nvPicPr>
-          <p:cNvPr id="25" name="Picture 24" descr="route_w.png"/>
+          <p:cNvPr id="16" name="Picture 15" descr="route_primary.png"/>
           <p:cNvPicPr>
             <a:picLocks noChangeAspect="1"/>
           </p:cNvPicPr>
           <p:nvPr/>
         </p:nvPicPr>
         <p:blipFill>
-          <a:blip r:embed="rId6"/>
+          <a:blip r:embed="rId5"/>
           <a:stretch>
             <a:fillRect/>
           </a:stretch>
         </p:blipFill>
         <p:spPr>
           <a:xfrm>
-            <a:off x="4818522" y="4187586"/>
-            <a:ext cx="201899" cy="201899"/>
+            <a:off x="4641860" y="4010924"/>
+            <a:ext cx="555223" cy="555223"/>
           </a:xfrm>
           <a:prstGeom prst="rect">
             <a:avLst/>
@@ -17186,7 +16420,7 @@
       </p:pic>
       <p:sp>
         <p:nvSpPr>
-          <p:cNvPr id="26" name="Rounded Rectangle 25"/>
+          <p:cNvPr id="17" name="Rounded Rectangle 16"/>
           <p:cNvSpPr/>
           <p:nvPr/>
         </p:nvSpPr>
@@ -17256,68 +16490,24 @@
           </a:p>
         </p:txBody>
       </p:sp>
-      <p:sp>
-        <p:nvSpPr>
-          <p:cNvPr id="27" name="Oval 26"/>
-          <p:cNvSpPr/>
-          <p:nvPr/>
-        </p:nvSpPr>
-        <p:spPr>
-          <a:xfrm>
-            <a:off x="4709160" y="5102352"/>
-            <a:ext cx="420624" cy="420624"/>
-          </a:xfrm>
-          <a:prstGeom prst="ellipse">
-            <a:avLst/>
-          </a:prstGeom>
-          <a:solidFill>
-            <a:srgbClr val="00219B"/>
-          </a:solidFill>
-          <a:ln>
-            <a:noFill/>
-          </a:ln>
-          <a:effectLst/>
-        </p:spPr>
-        <p:style>
-          <a:lnRef idx="1">
-            <a:schemeClr val="accent1"/>
-          </a:lnRef>
-          <a:fillRef idx="3">
-            <a:schemeClr val="accent1"/>
-          </a:fillRef>
-          <a:effectRef idx="2">
-            <a:schemeClr val="accent1"/>
-          </a:effectRef>
-          <a:fontRef idx="minor">
-            <a:schemeClr val="lt1"/>
-          </a:fontRef>
-        </p:style>
-        <p:txBody>
-          <a:bodyPr rtlCol="0" anchor="t" wrap="square" lIns="109728" rIns="109728" tIns="73152" bIns="73152"/>
-          <a:lstStyle/>
-          <a:p>
-            <a:pPr algn="ctr"/>
-          </a:p>
-        </p:txBody>
-      </p:sp>
       <p:pic>
         <p:nvPicPr>
-          <p:cNvPr id="28" name="Picture 27" descr="glasschart_w.png"/>
+          <p:cNvPr id="18" name="Picture 17" descr="glasschart_primary.png"/>
           <p:cNvPicPr>
             <a:picLocks noChangeAspect="1"/>
           </p:cNvPicPr>
           <p:nvPr/>
         </p:nvPicPr>
         <p:blipFill>
-          <a:blip r:embed="rId7"/>
+          <a:blip r:embed="rId6"/>
           <a:stretch>
             <a:fillRect/>
           </a:stretch>
         </p:blipFill>
         <p:spPr>
           <a:xfrm>
-            <a:off x="4818522" y="5211714"/>
-            <a:ext cx="201899" cy="201899"/>
+            <a:off x="4641860" y="5035052"/>
+            <a:ext cx="555223" cy="555223"/>
           </a:xfrm>
           <a:prstGeom prst="rect">
             <a:avLst/>
@@ -17326,7 +16516,7 @@
       </p:pic>
       <p:sp>
         <p:nvSpPr>
-          <p:cNvPr id="29" name="Rounded Rectangle 28"/>
+          <p:cNvPr id="19" name="Rounded Rectangle 18"/>
           <p:cNvSpPr/>
           <p:nvPr/>
         </p:nvSpPr>
@@ -17691,7 +16881,7 @@
       </p:sp>
       <p:pic>
         <p:nvPicPr>
-          <p:cNvPr id="10" name="Picture 9" descr="chartline_b.png"/>
+          <p:cNvPr id="10" name="Picture 9" descr="chartline.png"/>
           <p:cNvPicPr>
             <a:picLocks noChangeAspect="1"/>
           </p:cNvPicPr>
@@ -17705,8 +16895,8 @@
         </p:blipFill>
         <p:spPr>
           <a:xfrm>
-            <a:off x="4535424" y="2011680"/>
-            <a:ext cx="411480" cy="411480"/>
+            <a:off x="4443984" y="1938528"/>
+            <a:ext cx="502920" cy="502920"/>
           </a:xfrm>
           <a:prstGeom prst="rect">
             <a:avLst/>
@@ -17785,53 +16975,9 @@
           </a:p>
         </p:txBody>
       </p:sp>
-      <p:sp>
-        <p:nvSpPr>
-          <p:cNvPr id="12" name="Oval 11"/>
-          <p:cNvSpPr/>
-          <p:nvPr/>
-        </p:nvSpPr>
-        <p:spPr>
-          <a:xfrm>
-            <a:off x="5605272" y="2039112"/>
-            <a:ext cx="402336" cy="402336"/>
-          </a:xfrm>
-          <a:prstGeom prst="ellipse">
-            <a:avLst/>
-          </a:prstGeom>
-          <a:solidFill>
-            <a:srgbClr val="A7ACAF"/>
-          </a:solidFill>
-          <a:ln>
-            <a:noFill/>
-          </a:ln>
-          <a:effectLst/>
-        </p:spPr>
-        <p:style>
-          <a:lnRef idx="1">
-            <a:schemeClr val="accent1"/>
-          </a:lnRef>
-          <a:fillRef idx="3">
-            <a:schemeClr val="accent1"/>
-          </a:fillRef>
-          <a:effectRef idx="2">
-            <a:schemeClr val="accent1"/>
-          </a:effectRef>
-          <a:fontRef idx="minor">
-            <a:schemeClr val="lt1"/>
-          </a:fontRef>
-        </p:style>
-        <p:txBody>
-          <a:bodyPr rtlCol="0" anchor="t" wrap="square" lIns="109728" rIns="109728" tIns="73152" bIns="73152"/>
-          <a:lstStyle/>
-          <a:p>
-            <a:pPr algn="ctr"/>
-          </a:p>
-        </p:txBody>
-      </p:sp>
       <p:pic>
         <p:nvPicPr>
-          <p:cNvPr id="13" name="Picture 12" descr="warning_w.png"/>
+          <p:cNvPr id="12" name="Picture 11" descr="warning_slate.png"/>
           <p:cNvPicPr>
             <a:picLocks noChangeAspect="1"/>
           </p:cNvPicPr>
@@ -17845,8 +16991,8 @@
         </p:blipFill>
         <p:spPr>
           <a:xfrm>
-            <a:off x="5709879" y="2143719"/>
-            <a:ext cx="193121" cy="193121"/>
+            <a:off x="5540898" y="1974738"/>
+            <a:ext cx="531083" cy="531083"/>
           </a:xfrm>
           <a:prstGeom prst="rect">
             <a:avLst/>
@@ -17855,7 +17001,7 @@
       </p:pic>
       <p:sp>
         <p:nvSpPr>
-          <p:cNvPr id="14" name="Rounded Rectangle 13"/>
+          <p:cNvPr id="13" name="Rounded Rectangle 12"/>
           <p:cNvSpPr/>
           <p:nvPr/>
         </p:nvSpPr>
@@ -17925,53 +17071,9 @@
           </a:p>
         </p:txBody>
       </p:sp>
-      <p:sp>
-        <p:nvSpPr>
-          <p:cNvPr id="15" name="Oval 14"/>
-          <p:cNvSpPr/>
-          <p:nvPr/>
-        </p:nvSpPr>
-        <p:spPr>
-          <a:xfrm>
-            <a:off x="5605272" y="3127248"/>
-            <a:ext cx="402336" cy="402336"/>
-          </a:xfrm>
-          <a:prstGeom prst="ellipse">
-            <a:avLst/>
-          </a:prstGeom>
-          <a:solidFill>
-            <a:srgbClr val="A7ACAF"/>
-          </a:solidFill>
-          <a:ln>
-            <a:noFill/>
-          </a:ln>
-          <a:effectLst/>
-        </p:spPr>
-        <p:style>
-          <a:lnRef idx="1">
-            <a:schemeClr val="accent1"/>
-          </a:lnRef>
-          <a:fillRef idx="3">
-            <a:schemeClr val="accent1"/>
-          </a:fillRef>
-          <a:effectRef idx="2">
-            <a:schemeClr val="accent1"/>
-          </a:effectRef>
-          <a:fontRef idx="minor">
-            <a:schemeClr val="lt1"/>
-          </a:fontRef>
-        </p:style>
-        <p:txBody>
-          <a:bodyPr rtlCol="0" anchor="t" wrap="square" lIns="109728" rIns="109728" tIns="73152" bIns="73152"/>
-          <a:lstStyle/>
-          <a:p>
-            <a:pPr algn="ctr"/>
-          </a:p>
-        </p:txBody>
-      </p:sp>
       <p:pic>
         <p:nvPicPr>
-          <p:cNvPr id="16" name="Picture 15" descr="warning_w.png"/>
+          <p:cNvPr id="14" name="Picture 13" descr="warning_slate.png"/>
           <p:cNvPicPr>
             <a:picLocks noChangeAspect="1"/>
           </p:cNvPicPr>
@@ -17985,8 +17087,8 @@
         </p:blipFill>
         <p:spPr>
           <a:xfrm>
-            <a:off x="5709879" y="3231855"/>
-            <a:ext cx="193121" cy="193121"/>
+            <a:off x="5540898" y="3062874"/>
+            <a:ext cx="531083" cy="531083"/>
           </a:xfrm>
           <a:prstGeom prst="rect">
             <a:avLst/>
@@ -17995,7 +17097,7 @@
       </p:pic>
       <p:sp>
         <p:nvSpPr>
-          <p:cNvPr id="17" name="Rounded Rectangle 16"/>
+          <p:cNvPr id="15" name="Rounded Rectangle 14"/>
           <p:cNvSpPr/>
           <p:nvPr/>
         </p:nvSpPr>
@@ -18065,53 +17167,9 @@
           </a:p>
         </p:txBody>
       </p:sp>
-      <p:sp>
-        <p:nvSpPr>
-          <p:cNvPr id="18" name="Oval 17"/>
-          <p:cNvSpPr/>
-          <p:nvPr/>
-        </p:nvSpPr>
-        <p:spPr>
-          <a:xfrm>
-            <a:off x="5605272" y="4215384"/>
-            <a:ext cx="402336" cy="402336"/>
-          </a:xfrm>
-          <a:prstGeom prst="ellipse">
-            <a:avLst/>
-          </a:prstGeom>
-          <a:solidFill>
-            <a:srgbClr val="A7ACAF"/>
-          </a:solidFill>
-          <a:ln>
-            <a:noFill/>
-          </a:ln>
-          <a:effectLst/>
-        </p:spPr>
-        <p:style>
-          <a:lnRef idx="1">
-            <a:schemeClr val="accent1"/>
-          </a:lnRef>
-          <a:fillRef idx="3">
-            <a:schemeClr val="accent1"/>
-          </a:fillRef>
-          <a:effectRef idx="2">
-            <a:schemeClr val="accent1"/>
-          </a:effectRef>
-          <a:fontRef idx="minor">
-            <a:schemeClr val="lt1"/>
-          </a:fontRef>
-        </p:style>
-        <p:txBody>
-          <a:bodyPr rtlCol="0" anchor="t" wrap="square" lIns="109728" rIns="109728" tIns="73152" bIns="73152"/>
-          <a:lstStyle/>
-          <a:p>
-            <a:pPr algn="ctr"/>
-          </a:p>
-        </p:txBody>
-      </p:sp>
       <p:pic>
         <p:nvPicPr>
-          <p:cNvPr id="19" name="Picture 18" descr="warning_w.png"/>
+          <p:cNvPr id="16" name="Picture 15" descr="warning_slate.png"/>
           <p:cNvPicPr>
             <a:picLocks noChangeAspect="1"/>
           </p:cNvPicPr>
@@ -18125,8 +17183,8 @@
         </p:blipFill>
         <p:spPr>
           <a:xfrm>
-            <a:off x="5709879" y="4319991"/>
-            <a:ext cx="193121" cy="193121"/>
+            <a:off x="5540898" y="4151010"/>
+            <a:ext cx="531083" cy="531083"/>
           </a:xfrm>
           <a:prstGeom prst="rect">
             <a:avLst/>
@@ -18135,7 +17193,7 @@
       </p:pic>
       <p:sp>
         <p:nvSpPr>
-          <p:cNvPr id="20" name="Rounded Rectangle 19"/>
+          <p:cNvPr id="17" name="Rounded Rectangle 16"/>
           <p:cNvSpPr/>
           <p:nvPr/>
         </p:nvSpPr>
@@ -18205,53 +17263,9 @@
           </a:p>
         </p:txBody>
       </p:sp>
-      <p:sp>
-        <p:nvSpPr>
-          <p:cNvPr id="21" name="Oval 20"/>
-          <p:cNvSpPr/>
-          <p:nvPr/>
-        </p:nvSpPr>
-        <p:spPr>
-          <a:xfrm>
-            <a:off x="5605272" y="5303520"/>
-            <a:ext cx="402336" cy="402336"/>
-          </a:xfrm>
-          <a:prstGeom prst="ellipse">
-            <a:avLst/>
-          </a:prstGeom>
-          <a:solidFill>
-            <a:srgbClr val="A7ACAF"/>
-          </a:solidFill>
-          <a:ln>
-            <a:noFill/>
-          </a:ln>
-          <a:effectLst/>
-        </p:spPr>
-        <p:style>
-          <a:lnRef idx="1">
-            <a:schemeClr val="accent1"/>
-          </a:lnRef>
-          <a:fillRef idx="3">
-            <a:schemeClr val="accent1"/>
-          </a:fillRef>
-          <a:effectRef idx="2">
-            <a:schemeClr val="accent1"/>
-          </a:effectRef>
-          <a:fontRef idx="minor">
-            <a:schemeClr val="lt1"/>
-          </a:fontRef>
-        </p:style>
-        <p:txBody>
-          <a:bodyPr rtlCol="0" anchor="t" wrap="square" lIns="109728" rIns="109728" tIns="73152" bIns="73152"/>
-          <a:lstStyle/>
-          <a:p>
-            <a:pPr algn="ctr"/>
-          </a:p>
-        </p:txBody>
-      </p:sp>
       <p:pic>
         <p:nvPicPr>
-          <p:cNvPr id="22" name="Picture 21" descr="warning_w.png"/>
+          <p:cNvPr id="18" name="Picture 17" descr="warning_slate.png"/>
           <p:cNvPicPr>
             <a:picLocks noChangeAspect="1"/>
           </p:cNvPicPr>
@@ -18265,8 +17279,8 @@
         </p:blipFill>
         <p:spPr>
           <a:xfrm>
-            <a:off x="5709879" y="5408127"/>
-            <a:ext cx="193121" cy="193121"/>
+            <a:off x="5540898" y="5239146"/>
+            <a:ext cx="531083" cy="531083"/>
           </a:xfrm>
           <a:prstGeom prst="rect">
             <a:avLst/>
@@ -18444,53 +17458,9 @@
           </a:p>
         </p:txBody>
       </p:sp>
-      <p:sp>
-        <p:nvSpPr>
-          <p:cNvPr id="10" name="Oval 9"/>
-          <p:cNvSpPr/>
-          <p:nvPr/>
-        </p:nvSpPr>
-        <p:spPr>
-          <a:xfrm>
-            <a:off x="667512" y="1929384"/>
-            <a:ext cx="438912" cy="438912"/>
-          </a:xfrm>
-          <a:prstGeom prst="ellipse">
-            <a:avLst/>
-          </a:prstGeom>
-          <a:solidFill>
-            <a:srgbClr val="00219B"/>
-          </a:solidFill>
-          <a:ln>
-            <a:noFill/>
-          </a:ln>
-          <a:effectLst/>
-        </p:spPr>
-        <p:style>
-          <a:lnRef idx="1">
-            <a:schemeClr val="accent1"/>
-          </a:lnRef>
-          <a:fillRef idx="3">
-            <a:schemeClr val="accent1"/>
-          </a:fillRef>
-          <a:effectRef idx="2">
-            <a:schemeClr val="accent1"/>
-          </a:effectRef>
-          <a:fontRef idx="minor">
-            <a:schemeClr val="lt1"/>
-          </a:fontRef>
-        </p:style>
-        <p:txBody>
-          <a:bodyPr rtlCol="0" anchor="t" wrap="square" lIns="109728" rIns="109728" tIns="73152" bIns="73152"/>
-          <a:lstStyle/>
-          <a:p>
-            <a:pPr algn="ctr"/>
-          </a:p>
-        </p:txBody>
-      </p:sp>
       <p:pic>
         <p:nvPicPr>
-          <p:cNvPr id="11" name="Picture 10" descr="server_w.png"/>
+          <p:cNvPr id="10" name="Picture 9" descr="server_primary.png"/>
           <p:cNvPicPr>
             <a:picLocks noChangeAspect="1"/>
           </p:cNvPicPr>
@@ -18504,8 +17474,8 @@
         </p:blipFill>
         <p:spPr>
           <a:xfrm>
-            <a:off x="781629" y="2043501"/>
-            <a:ext cx="210677" cy="210677"/>
+            <a:off x="597286" y="1859158"/>
+            <a:ext cx="579363" cy="579363"/>
           </a:xfrm>
           <a:prstGeom prst="rect">
             <a:avLst/>
@@ -18514,7 +17484,7 @@
       </p:pic>
       <p:sp>
         <p:nvSpPr>
-          <p:cNvPr id="12" name="Rounded Rectangle 11"/>
+          <p:cNvPr id="11" name="Rounded Rectangle 10"/>
           <p:cNvSpPr/>
           <p:nvPr/>
         </p:nvSpPr>
@@ -18589,53 +17559,9 @@
           </a:p>
         </p:txBody>
       </p:sp>
-      <p:sp>
-        <p:nvSpPr>
-          <p:cNvPr id="13" name="Oval 12"/>
-          <p:cNvSpPr/>
-          <p:nvPr/>
-        </p:nvSpPr>
-        <p:spPr>
-          <a:xfrm>
-            <a:off x="6345936" y="1929384"/>
-            <a:ext cx="438912" cy="438912"/>
-          </a:xfrm>
-          <a:prstGeom prst="ellipse">
-            <a:avLst/>
-          </a:prstGeom>
-          <a:solidFill>
-            <a:srgbClr val="00219B"/>
-          </a:solidFill>
-          <a:ln>
-            <a:noFill/>
-          </a:ln>
-          <a:effectLst/>
-        </p:spPr>
-        <p:style>
-          <a:lnRef idx="1">
-            <a:schemeClr val="accent1"/>
-          </a:lnRef>
-          <a:fillRef idx="3">
-            <a:schemeClr val="accent1"/>
-          </a:fillRef>
-          <a:effectRef idx="2">
-            <a:schemeClr val="accent1"/>
-          </a:effectRef>
-          <a:fontRef idx="minor">
-            <a:schemeClr val="lt1"/>
-          </a:fontRef>
-        </p:style>
-        <p:txBody>
-          <a:bodyPr rtlCol="0" anchor="t" wrap="square" lIns="109728" rIns="109728" tIns="73152" bIns="73152"/>
-          <a:lstStyle/>
-          <a:p>
-            <a:pPr algn="ctr"/>
-          </a:p>
-        </p:txBody>
-      </p:sp>
       <p:pic>
         <p:nvPicPr>
-          <p:cNvPr id="14" name="Picture 13" descr="network_w.png"/>
+          <p:cNvPr id="12" name="Picture 11" descr="network_primary.png"/>
           <p:cNvPicPr>
             <a:picLocks noChangeAspect="1"/>
           </p:cNvPicPr>
@@ -18649,8 +17575,8 @@
         </p:blipFill>
         <p:spPr>
           <a:xfrm>
-            <a:off x="6460053" y="2043501"/>
-            <a:ext cx="210677" cy="210677"/>
+            <a:off x="6275710" y="1859158"/>
+            <a:ext cx="579363" cy="579363"/>
           </a:xfrm>
           <a:prstGeom prst="rect">
             <a:avLst/>
@@ -18659,7 +17585,7 @@
       </p:pic>
       <p:sp>
         <p:nvSpPr>
-          <p:cNvPr id="15" name="Rounded Rectangle 14"/>
+          <p:cNvPr id="13" name="Rounded Rectangle 12"/>
           <p:cNvSpPr/>
           <p:nvPr/>
         </p:nvSpPr>
@@ -18734,53 +17660,9 @@
           </a:p>
         </p:txBody>
       </p:sp>
-      <p:sp>
-        <p:nvSpPr>
-          <p:cNvPr id="16" name="Oval 15"/>
-          <p:cNvSpPr/>
-          <p:nvPr/>
-        </p:nvSpPr>
-        <p:spPr>
-          <a:xfrm>
-            <a:off x="667512" y="3895344"/>
-            <a:ext cx="438912" cy="438912"/>
-          </a:xfrm>
-          <a:prstGeom prst="ellipse">
-            <a:avLst/>
-          </a:prstGeom>
-          <a:solidFill>
-            <a:srgbClr val="00219B"/>
-          </a:solidFill>
-          <a:ln>
-            <a:noFill/>
-          </a:ln>
-          <a:effectLst/>
-        </p:spPr>
-        <p:style>
-          <a:lnRef idx="1">
-            <a:schemeClr val="accent1"/>
-          </a:lnRef>
-          <a:fillRef idx="3">
-            <a:schemeClr val="accent1"/>
-          </a:fillRef>
-          <a:effectRef idx="2">
-            <a:schemeClr val="accent1"/>
-          </a:effectRef>
-          <a:fontRef idx="minor">
-            <a:schemeClr val="lt1"/>
-          </a:fontRef>
-        </p:style>
-        <p:txBody>
-          <a:bodyPr rtlCol="0" anchor="t" wrap="square" lIns="109728" rIns="109728" tIns="73152" bIns="73152"/>
-          <a:lstStyle/>
-          <a:p>
-            <a:pPr algn="ctr"/>
-          </a:p>
-        </p:txBody>
-      </p:sp>
       <p:pic>
         <p:nvPicPr>
-          <p:cNvPr id="17" name="Picture 16" descr="database_w.png"/>
+          <p:cNvPr id="14" name="Picture 13" descr="database_primary.png"/>
           <p:cNvPicPr>
             <a:picLocks noChangeAspect="1"/>
           </p:cNvPicPr>
@@ -18794,8 +17676,8 @@
         </p:blipFill>
         <p:spPr>
           <a:xfrm>
-            <a:off x="781629" y="4009461"/>
-            <a:ext cx="210677" cy="210677"/>
+            <a:off x="597286" y="3825118"/>
+            <a:ext cx="579363" cy="579363"/>
           </a:xfrm>
           <a:prstGeom prst="rect">
             <a:avLst/>
@@ -18804,7 +17686,7 @@
       </p:pic>
       <p:sp>
         <p:nvSpPr>
-          <p:cNvPr id="18" name="Rounded Rectangle 17"/>
+          <p:cNvPr id="15" name="Rounded Rectangle 14"/>
           <p:cNvSpPr/>
           <p:nvPr/>
         </p:nvSpPr>
@@ -18879,53 +17761,9 @@
           </a:p>
         </p:txBody>
       </p:sp>
-      <p:sp>
-        <p:nvSpPr>
-          <p:cNvPr id="19" name="Oval 18"/>
-          <p:cNvSpPr/>
-          <p:nvPr/>
-        </p:nvSpPr>
-        <p:spPr>
-          <a:xfrm>
-            <a:off x="6345936" y="3895344"/>
-            <a:ext cx="438912" cy="438912"/>
-          </a:xfrm>
-          <a:prstGeom prst="ellipse">
-            <a:avLst/>
-          </a:prstGeom>
-          <a:solidFill>
-            <a:srgbClr val="00219B"/>
-          </a:solidFill>
-          <a:ln>
-            <a:noFill/>
-          </a:ln>
-          <a:effectLst/>
-        </p:spPr>
-        <p:style>
-          <a:lnRef idx="1">
-            <a:schemeClr val="accent1"/>
-          </a:lnRef>
-          <a:fillRef idx="3">
-            <a:schemeClr val="accent1"/>
-          </a:fillRef>
-          <a:effectRef idx="2">
-            <a:schemeClr val="accent1"/>
-          </a:effectRef>
-          <a:fontRef idx="minor">
-            <a:schemeClr val="lt1"/>
-          </a:fontRef>
-        </p:style>
-        <p:txBody>
-          <a:bodyPr rtlCol="0" anchor="t" wrap="square" lIns="109728" rIns="109728" tIns="73152" bIns="73152"/>
-          <a:lstStyle/>
-          <a:p>
-            <a:pPr algn="ctr"/>
-          </a:p>
-        </p:txBody>
-      </p:sp>
       <p:pic>
         <p:nvPicPr>
-          <p:cNvPr id="20" name="Picture 19" descr="shield_w.png"/>
+          <p:cNvPr id="16" name="Picture 15" descr="shield_primary.png"/>
           <p:cNvPicPr>
             <a:picLocks noChangeAspect="1"/>
           </p:cNvPicPr>
@@ -18939,8 +17777,8 @@
         </p:blipFill>
         <p:spPr>
           <a:xfrm>
-            <a:off x="6460053" y="4009461"/>
-            <a:ext cx="210677" cy="210677"/>
+            <a:off x="6275710" y="3825118"/>
+            <a:ext cx="579363" cy="579363"/>
           </a:xfrm>
           <a:prstGeom prst="rect">
             <a:avLst/>
@@ -18949,7 +17787,7 @@
       </p:pic>
       <p:sp>
         <p:nvSpPr>
-          <p:cNvPr id="21" name="Rounded Rectangle 20"/>
+          <p:cNvPr id="17" name="Rounded Rectangle 16"/>
           <p:cNvSpPr/>
           <p:nvPr/>
         </p:nvSpPr>
@@ -19318,53 +18156,9 @@
           </a:p>
         </p:txBody>
       </p:sp>
-      <p:sp>
-        <p:nvSpPr>
-          <p:cNvPr id="10" name="Oval 9"/>
-          <p:cNvSpPr/>
-          <p:nvPr/>
-        </p:nvSpPr>
-        <p:spPr>
-          <a:xfrm>
-            <a:off x="3511296" y="1883664"/>
-            <a:ext cx="402336" cy="402336"/>
-          </a:xfrm>
-          <a:prstGeom prst="ellipse">
-            <a:avLst/>
-          </a:prstGeom>
-          <a:solidFill>
-            <a:srgbClr val="00219B"/>
-          </a:solidFill>
-          <a:ln>
-            <a:noFill/>
-          </a:ln>
-          <a:effectLst/>
-        </p:spPr>
-        <p:style>
-          <a:lnRef idx="1">
-            <a:schemeClr val="accent1"/>
-          </a:lnRef>
-          <a:fillRef idx="3">
-            <a:schemeClr val="accent1"/>
-          </a:fillRef>
-          <a:effectRef idx="2">
-            <a:schemeClr val="accent1"/>
-          </a:effectRef>
-          <a:fontRef idx="minor">
-            <a:schemeClr val="lt1"/>
-          </a:fontRef>
-        </p:style>
-        <p:txBody>
-          <a:bodyPr rtlCol="0" anchor="t" wrap="square" lIns="109728" rIns="109728" tIns="73152" bIns="73152"/>
-          <a:lstStyle/>
-          <a:p>
-            <a:pPr algn="ctr"/>
-          </a:p>
-        </p:txBody>
-      </p:sp>
       <p:pic>
         <p:nvPicPr>
-          <p:cNvPr id="11" name="Picture 10" descr="gears_w.png"/>
+          <p:cNvPr id="10" name="Picture 9" descr="gears_primary.png"/>
           <p:cNvPicPr>
             <a:picLocks noChangeAspect="1"/>
           </p:cNvPicPr>
@@ -19378,8 +18172,8 @@
         </p:blipFill>
         <p:spPr>
           <a:xfrm>
-            <a:off x="3615903" y="1988271"/>
-            <a:ext cx="193121" cy="193121"/>
+            <a:off x="3446922" y="1819290"/>
+            <a:ext cx="531083" cy="531083"/>
           </a:xfrm>
           <a:prstGeom prst="rect">
             <a:avLst/>
@@ -19388,7 +18182,7 @@
       </p:pic>
       <p:sp>
         <p:nvSpPr>
-          <p:cNvPr id="12" name="Rounded Rectangle 11"/>
+          <p:cNvPr id="11" name="Rounded Rectangle 10"/>
           <p:cNvSpPr/>
           <p:nvPr/>
         </p:nvSpPr>
@@ -19529,53 +18323,9 @@
           </a:p>
         </p:txBody>
       </p:sp>
-      <p:sp>
-        <p:nvSpPr>
-          <p:cNvPr id="13" name="Oval 12"/>
-          <p:cNvSpPr/>
-          <p:nvPr/>
-        </p:nvSpPr>
-        <p:spPr>
-          <a:xfrm>
-            <a:off x="7296912" y="1883664"/>
-            <a:ext cx="402336" cy="402336"/>
-          </a:xfrm>
-          <a:prstGeom prst="ellipse">
-            <a:avLst/>
-          </a:prstGeom>
-          <a:solidFill>
-            <a:srgbClr val="00219B"/>
-          </a:solidFill>
-          <a:ln>
-            <a:noFill/>
-          </a:ln>
-          <a:effectLst/>
-        </p:spPr>
-        <p:style>
-          <a:lnRef idx="1">
-            <a:schemeClr val="accent1"/>
-          </a:lnRef>
-          <a:fillRef idx="3">
-            <a:schemeClr val="accent1"/>
-          </a:fillRef>
-          <a:effectRef idx="2">
-            <a:schemeClr val="accent1"/>
-          </a:effectRef>
-          <a:fontRef idx="minor">
-            <a:schemeClr val="lt1"/>
-          </a:fontRef>
-        </p:style>
-        <p:txBody>
-          <a:bodyPr rtlCol="0" anchor="t" wrap="square" lIns="109728" rIns="109728" tIns="73152" bIns="73152"/>
-          <a:lstStyle/>
-          <a:p>
-            <a:pPr algn="ctr"/>
-          </a:p>
-        </p:txBody>
-      </p:sp>
       <p:pic>
         <p:nvPicPr>
-          <p:cNvPr id="14" name="Picture 13" descr="server_w.png"/>
+          <p:cNvPr id="12" name="Picture 11" descr="server_primary.png"/>
           <p:cNvPicPr>
             <a:picLocks noChangeAspect="1"/>
           </p:cNvPicPr>
@@ -19589,8 +18339,8 @@
         </p:blipFill>
         <p:spPr>
           <a:xfrm>
-            <a:off x="7401519" y="1988271"/>
-            <a:ext cx="193121" cy="193121"/>
+            <a:off x="7232538" y="1819290"/>
+            <a:ext cx="531083" cy="531083"/>
           </a:xfrm>
           <a:prstGeom prst="rect">
             <a:avLst/>
@@ -19599,7 +18349,7 @@
       </p:pic>
       <p:sp>
         <p:nvSpPr>
-          <p:cNvPr id="15" name="Rounded Rectangle 14"/>
+          <p:cNvPr id="13" name="Rounded Rectangle 12"/>
           <p:cNvSpPr/>
           <p:nvPr/>
         </p:nvSpPr>
@@ -19740,53 +18490,9 @@
           </a:p>
         </p:txBody>
       </p:sp>
-      <p:sp>
-        <p:nvSpPr>
-          <p:cNvPr id="16" name="Oval 15"/>
-          <p:cNvSpPr/>
-          <p:nvPr/>
-        </p:nvSpPr>
-        <p:spPr>
-          <a:xfrm>
-            <a:off x="11082528" y="1883664"/>
-            <a:ext cx="402336" cy="402336"/>
-          </a:xfrm>
-          <a:prstGeom prst="ellipse">
-            <a:avLst/>
-          </a:prstGeom>
-          <a:solidFill>
-            <a:srgbClr val="00219B"/>
-          </a:solidFill>
-          <a:ln>
-            <a:noFill/>
-          </a:ln>
-          <a:effectLst/>
-        </p:spPr>
-        <p:style>
-          <a:lnRef idx="1">
-            <a:schemeClr val="accent1"/>
-          </a:lnRef>
-          <a:fillRef idx="3">
-            <a:schemeClr val="accent1"/>
-          </a:fillRef>
-          <a:effectRef idx="2">
-            <a:schemeClr val="accent1"/>
-          </a:effectRef>
-          <a:fontRef idx="minor">
-            <a:schemeClr val="lt1"/>
-          </a:fontRef>
-        </p:style>
-        <p:txBody>
-          <a:bodyPr rtlCol="0" anchor="t" wrap="square" lIns="109728" rIns="109728" tIns="73152" bIns="73152"/>
-          <a:lstStyle/>
-          <a:p>
-            <a:pPr algn="ctr"/>
-          </a:p>
-        </p:txBody>
-      </p:sp>
       <p:pic>
         <p:nvPicPr>
-          <p:cNvPr id="17" name="Picture 16" descr="robot_w.png"/>
+          <p:cNvPr id="14" name="Picture 13" descr="robot_primary.png"/>
           <p:cNvPicPr>
             <a:picLocks noChangeAspect="1"/>
           </p:cNvPicPr>
@@ -19800,8 +18506,8 @@
         </p:blipFill>
         <p:spPr>
           <a:xfrm>
-            <a:off x="11187135" y="1988271"/>
-            <a:ext cx="193121" cy="193121"/>
+            <a:off x="11018154" y="1819290"/>
+            <a:ext cx="531083" cy="531083"/>
           </a:xfrm>
           <a:prstGeom prst="rect">
             <a:avLst/>
@@ -19810,7 +18516,7 @@
       </p:pic>
       <p:sp>
         <p:nvSpPr>
-          <p:cNvPr id="18" name="Rounded Rectangle 17"/>
+          <p:cNvPr id="15" name="Rounded Rectangle 14"/>
           <p:cNvSpPr/>
           <p:nvPr/>
         </p:nvSpPr>
@@ -20890,53 +19596,9 @@
           </a:p>
         </p:txBody>
       </p:sp>
-      <p:sp>
-        <p:nvSpPr>
-          <p:cNvPr id="10" name="Oval 9"/>
-          <p:cNvSpPr/>
-          <p:nvPr/>
-        </p:nvSpPr>
-        <p:spPr>
-          <a:xfrm>
-            <a:off x="649224" y="1883664"/>
-            <a:ext cx="420624" cy="420624"/>
-          </a:xfrm>
-          <a:prstGeom prst="ellipse">
-            <a:avLst/>
-          </a:prstGeom>
-          <a:solidFill>
-            <a:srgbClr val="2A65F5"/>
-          </a:solidFill>
-          <a:ln>
-            <a:noFill/>
-          </a:ln>
-          <a:effectLst/>
-        </p:spPr>
-        <p:style>
-          <a:lnRef idx="1">
-            <a:schemeClr val="accent1"/>
-          </a:lnRef>
-          <a:fillRef idx="3">
-            <a:schemeClr val="accent1"/>
-          </a:fillRef>
-          <a:effectRef idx="2">
-            <a:schemeClr val="accent1"/>
-          </a:effectRef>
-          <a:fontRef idx="minor">
-            <a:schemeClr val="lt1"/>
-          </a:fontRef>
-        </p:style>
-        <p:txBody>
-          <a:bodyPr rtlCol="0" anchor="t" wrap="square" lIns="109728" rIns="109728" tIns="73152" bIns="73152"/>
-          <a:lstStyle/>
-          <a:p>
-            <a:pPr algn="ctr"/>
-          </a:p>
-        </p:txBody>
-      </p:sp>
       <p:pic>
         <p:nvPicPr>
-          <p:cNvPr id="11" name="Picture 10" descr="boxopen_w.png"/>
+          <p:cNvPr id="10" name="Picture 9" descr="boxopen_primary.png"/>
           <p:cNvPicPr>
             <a:picLocks noChangeAspect="1"/>
           </p:cNvPicPr>
@@ -20950,8 +19612,8 @@
         </p:blipFill>
         <p:spPr>
           <a:xfrm>
-            <a:off x="758586" y="1993026"/>
-            <a:ext cx="201899" cy="201899"/>
+            <a:off x="581924" y="1816364"/>
+            <a:ext cx="555223" cy="555223"/>
           </a:xfrm>
           <a:prstGeom prst="rect">
             <a:avLst/>
@@ -20960,7 +19622,7 @@
       </p:pic>
       <p:sp>
         <p:nvSpPr>
-          <p:cNvPr id="12" name="Rounded Rectangle 11"/>
+          <p:cNvPr id="11" name="Rounded Rectangle 10"/>
           <p:cNvSpPr/>
           <p:nvPr/>
         </p:nvSpPr>
@@ -21052,53 +19714,9 @@
           </a:p>
         </p:txBody>
       </p:sp>
-      <p:sp>
-        <p:nvSpPr>
-          <p:cNvPr id="13" name="Oval 12"/>
-          <p:cNvSpPr/>
-          <p:nvPr/>
-        </p:nvSpPr>
-        <p:spPr>
-          <a:xfrm>
-            <a:off x="6327648" y="1883664"/>
-            <a:ext cx="420624" cy="420624"/>
-          </a:xfrm>
-          <a:prstGeom prst="ellipse">
-            <a:avLst/>
-          </a:prstGeom>
-          <a:solidFill>
-            <a:srgbClr val="2A65F5"/>
-          </a:solidFill>
-          <a:ln>
-            <a:noFill/>
-          </a:ln>
-          <a:effectLst/>
-        </p:spPr>
-        <p:style>
-          <a:lnRef idx="1">
-            <a:schemeClr val="accent1"/>
-          </a:lnRef>
-          <a:fillRef idx="3">
-            <a:schemeClr val="accent1"/>
-          </a:fillRef>
-          <a:effectRef idx="2">
-            <a:schemeClr val="accent1"/>
-          </a:effectRef>
-          <a:fontRef idx="minor">
-            <a:schemeClr val="lt1"/>
-          </a:fontRef>
-        </p:style>
-        <p:txBody>
-          <a:bodyPr rtlCol="0" anchor="t" wrap="square" lIns="109728" rIns="109728" tIns="73152" bIns="73152"/>
-          <a:lstStyle/>
-          <a:p>
-            <a:pPr algn="ctr"/>
-          </a:p>
-        </p:txBody>
-      </p:sp>
       <p:pic>
         <p:nvPicPr>
-          <p:cNvPr id="14" name="Picture 13" descr="microchip_w.png"/>
+          <p:cNvPr id="12" name="Picture 11" descr="microchip_primary.png"/>
           <p:cNvPicPr>
             <a:picLocks noChangeAspect="1"/>
           </p:cNvPicPr>
@@ -21112,8 +19730,8 @@
         </p:blipFill>
         <p:spPr>
           <a:xfrm>
-            <a:off x="6437010" y="1993026"/>
-            <a:ext cx="201899" cy="201899"/>
+            <a:off x="6260348" y="1816364"/>
+            <a:ext cx="555223" cy="555223"/>
           </a:xfrm>
           <a:prstGeom prst="rect">
             <a:avLst/>
@@ -21122,7 +19740,7 @@
       </p:pic>
       <p:sp>
         <p:nvSpPr>
-          <p:cNvPr id="15" name="Rounded Rectangle 14"/>
+          <p:cNvPr id="13" name="Rounded Rectangle 12"/>
           <p:cNvSpPr/>
           <p:nvPr/>
         </p:nvSpPr>
@@ -21214,53 +19832,9 @@
           </a:p>
         </p:txBody>
       </p:sp>
-      <p:sp>
-        <p:nvSpPr>
-          <p:cNvPr id="16" name="Oval 15"/>
-          <p:cNvSpPr/>
-          <p:nvPr/>
-        </p:nvSpPr>
-        <p:spPr>
-          <a:xfrm>
-            <a:off x="649224" y="4078224"/>
-            <a:ext cx="420624" cy="420624"/>
-          </a:xfrm>
-          <a:prstGeom prst="ellipse">
-            <a:avLst/>
-          </a:prstGeom>
-          <a:solidFill>
-            <a:srgbClr val="2A65F5"/>
-          </a:solidFill>
-          <a:ln>
-            <a:noFill/>
-          </a:ln>
-          <a:effectLst/>
-        </p:spPr>
-        <p:style>
-          <a:lnRef idx="1">
-            <a:schemeClr val="accent1"/>
-          </a:lnRef>
-          <a:fillRef idx="3">
-            <a:schemeClr val="accent1"/>
-          </a:fillRef>
-          <a:effectRef idx="2">
-            <a:schemeClr val="accent1"/>
-          </a:effectRef>
-          <a:fontRef idx="minor">
-            <a:schemeClr val="lt1"/>
-          </a:fontRef>
-        </p:style>
-        <p:txBody>
-          <a:bodyPr rtlCol="0" anchor="t" wrap="square" lIns="109728" rIns="109728" tIns="73152" bIns="73152"/>
-          <a:lstStyle/>
-          <a:p>
-            <a:pPr algn="ctr"/>
-          </a:p>
-        </p:txBody>
-      </p:sp>
       <p:pic>
         <p:nvPicPr>
-          <p:cNvPr id="17" name="Picture 16" descr="harddrive_w.png"/>
+          <p:cNvPr id="14" name="Picture 13" descr="harddrive_primary.png"/>
           <p:cNvPicPr>
             <a:picLocks noChangeAspect="1"/>
           </p:cNvPicPr>
@@ -21274,8 +19848,8 @@
         </p:blipFill>
         <p:spPr>
           <a:xfrm>
-            <a:off x="758586" y="4187586"/>
-            <a:ext cx="201899" cy="201899"/>
+            <a:off x="581924" y="4010924"/>
+            <a:ext cx="555223" cy="555223"/>
           </a:xfrm>
           <a:prstGeom prst="rect">
             <a:avLst/>
@@ -21284,7 +19858,7 @@
       </p:pic>
       <p:sp>
         <p:nvSpPr>
-          <p:cNvPr id="18" name="Rounded Rectangle 17"/>
+          <p:cNvPr id="15" name="Rounded Rectangle 14"/>
           <p:cNvSpPr/>
           <p:nvPr/>
         </p:nvSpPr>
@@ -21376,53 +19950,9 @@
           </a:p>
         </p:txBody>
       </p:sp>
-      <p:sp>
-        <p:nvSpPr>
-          <p:cNvPr id="19" name="Oval 18"/>
-          <p:cNvSpPr/>
-          <p:nvPr/>
-        </p:nvSpPr>
-        <p:spPr>
-          <a:xfrm>
-            <a:off x="6327648" y="4078224"/>
-            <a:ext cx="420624" cy="420624"/>
-          </a:xfrm>
-          <a:prstGeom prst="ellipse">
-            <a:avLst/>
-          </a:prstGeom>
-          <a:solidFill>
-            <a:srgbClr val="2A65F5"/>
-          </a:solidFill>
-          <a:ln>
-            <a:noFill/>
-          </a:ln>
-          <a:effectLst/>
-        </p:spPr>
-        <p:style>
-          <a:lnRef idx="1">
-            <a:schemeClr val="accent1"/>
-          </a:lnRef>
-          <a:fillRef idx="3">
-            <a:schemeClr val="accent1"/>
-          </a:fillRef>
-          <a:effectRef idx="2">
-            <a:schemeClr val="accent1"/>
-          </a:effectRef>
-          <a:fontRef idx="minor">
-            <a:schemeClr val="lt1"/>
-          </a:fontRef>
-        </p:style>
-        <p:txBody>
-          <a:bodyPr rtlCol="0" anchor="t" wrap="square" lIns="109728" rIns="109728" tIns="73152" bIns="73152"/>
-          <a:lstStyle/>
-          <a:p>
-            <a:pPr algn="ctr"/>
-          </a:p>
-        </p:txBody>
-      </p:sp>
       <p:pic>
         <p:nvPicPr>
-          <p:cNvPr id="20" name="Picture 19" descr="arm_w.png"/>
+          <p:cNvPr id="16" name="Picture 15" descr="arm_primary.png"/>
           <p:cNvPicPr>
             <a:picLocks noChangeAspect="1"/>
           </p:cNvPicPr>
@@ -21436,8 +19966,8 @@
         </p:blipFill>
         <p:spPr>
           <a:xfrm>
-            <a:off x="6437010" y="4187586"/>
-            <a:ext cx="201899" cy="201899"/>
+            <a:off x="6260348" y="4010924"/>
+            <a:ext cx="555223" cy="555223"/>
           </a:xfrm>
           <a:prstGeom prst="rect">
             <a:avLst/>
@@ -21446,7 +19976,7 @@
       </p:pic>
       <p:sp>
         <p:nvSpPr>
-          <p:cNvPr id="21" name="TextBox 20"/>
+          <p:cNvPr id="17" name="TextBox 16"/>
           <p:cNvSpPr txBox="1"/>
           <p:nvPr/>
         </p:nvSpPr>
@@ -21667,53 +20197,9 @@
           </a:p>
         </p:txBody>
       </p:sp>
-      <p:sp>
-        <p:nvSpPr>
-          <p:cNvPr id="10" name="Oval 9"/>
-          <p:cNvSpPr/>
-          <p:nvPr/>
-        </p:nvSpPr>
-        <p:spPr>
-          <a:xfrm>
-            <a:off x="3392424" y="1929384"/>
-            <a:ext cx="402336" cy="402336"/>
-          </a:xfrm>
-          <a:prstGeom prst="ellipse">
-            <a:avLst/>
-          </a:prstGeom>
-          <a:solidFill>
-            <a:srgbClr val="2A65F5"/>
-          </a:solidFill>
-          <a:ln>
-            <a:noFill/>
-          </a:ln>
-          <a:effectLst/>
-        </p:spPr>
-        <p:style>
-          <a:lnRef idx="1">
-            <a:schemeClr val="accent1"/>
-          </a:lnRef>
-          <a:fillRef idx="3">
-            <a:schemeClr val="accent1"/>
-          </a:fillRef>
-          <a:effectRef idx="2">
-            <a:schemeClr val="accent1"/>
-          </a:effectRef>
-          <a:fontRef idx="minor">
-            <a:schemeClr val="lt1"/>
-          </a:fontRef>
-        </p:style>
-        <p:txBody>
-          <a:bodyPr rtlCol="0" anchor="t" wrap="square" lIns="109728" rIns="109728" tIns="73152" bIns="73152"/>
-          <a:lstStyle/>
-          <a:p>
-            <a:pPr algn="ctr"/>
-          </a:p>
-        </p:txBody>
-      </p:sp>
       <p:pic>
         <p:nvPicPr>
-          <p:cNvPr id="11" name="Picture 10" descr="eye_w.png"/>
+          <p:cNvPr id="10" name="Picture 9" descr="eye_primary.png"/>
           <p:cNvPicPr>
             <a:picLocks noChangeAspect="1"/>
           </p:cNvPicPr>
@@ -21727,8 +20213,8 @@
         </p:blipFill>
         <p:spPr>
           <a:xfrm>
-            <a:off x="3497031" y="2033991"/>
-            <a:ext cx="193121" cy="193121"/>
+            <a:off x="3328050" y="1865010"/>
+            <a:ext cx="531083" cy="531083"/>
           </a:xfrm>
           <a:prstGeom prst="rect">
             <a:avLst/>
@@ -21737,7 +20223,7 @@
       </p:pic>
       <p:sp>
         <p:nvSpPr>
-          <p:cNvPr id="12" name="Chevron 11"/>
+          <p:cNvPr id="11" name="Chevron 10"/>
           <p:cNvSpPr/>
           <p:nvPr/>
         </p:nvSpPr>
@@ -21783,7 +20269,7 @@
       </p:sp>
       <p:sp>
         <p:nvSpPr>
-          <p:cNvPr id="13" name="Rounded Rectangle 12"/>
+          <p:cNvPr id="12" name="Rounded Rectangle 11"/>
           <p:cNvSpPr/>
           <p:nvPr/>
         </p:nvSpPr>
@@ -21875,53 +20361,9 @@
           </a:p>
         </p:txBody>
       </p:sp>
-      <p:sp>
-        <p:nvSpPr>
-          <p:cNvPr id="14" name="Oval 13"/>
-          <p:cNvSpPr/>
-          <p:nvPr/>
-        </p:nvSpPr>
-        <p:spPr>
-          <a:xfrm>
-            <a:off x="7232903" y="1929384"/>
-            <a:ext cx="402336" cy="402336"/>
-          </a:xfrm>
-          <a:prstGeom prst="ellipse">
-            <a:avLst/>
-          </a:prstGeom>
-          <a:solidFill>
-            <a:srgbClr val="2A65F5"/>
-          </a:solidFill>
-          <a:ln>
-            <a:noFill/>
-          </a:ln>
-          <a:effectLst/>
-        </p:spPr>
-        <p:style>
-          <a:lnRef idx="1">
-            <a:schemeClr val="accent1"/>
-          </a:lnRef>
-          <a:fillRef idx="3">
-            <a:schemeClr val="accent1"/>
-          </a:fillRef>
-          <a:effectRef idx="2">
-            <a:schemeClr val="accent1"/>
-          </a:effectRef>
-          <a:fontRef idx="minor">
-            <a:schemeClr val="lt1"/>
-          </a:fontRef>
-        </p:style>
-        <p:txBody>
-          <a:bodyPr rtlCol="0" anchor="t" wrap="square" lIns="109728" rIns="109728" tIns="73152" bIns="73152"/>
-          <a:lstStyle/>
-          <a:p>
-            <a:pPr algn="ctr"/>
-          </a:p>
-        </p:txBody>
-      </p:sp>
       <p:pic>
         <p:nvPicPr>
-          <p:cNvPr id="15" name="Picture 14" descr="maploc_w.png"/>
+          <p:cNvPr id="13" name="Picture 12" descr="maploc_primary.png"/>
           <p:cNvPicPr>
             <a:picLocks noChangeAspect="1"/>
           </p:cNvPicPr>
@@ -21935,8 +20377,8 @@
         </p:blipFill>
         <p:spPr>
           <a:xfrm>
-            <a:off x="7337511" y="2033991"/>
-            <a:ext cx="193121" cy="193121"/>
+            <a:off x="7168530" y="1865010"/>
+            <a:ext cx="531083" cy="531083"/>
           </a:xfrm>
           <a:prstGeom prst="rect">
             <a:avLst/>
@@ -21945,7 +20387,7 @@
       </p:pic>
       <p:sp>
         <p:nvSpPr>
-          <p:cNvPr id="16" name="Chevron 15"/>
+          <p:cNvPr id="14" name="Chevron 13"/>
           <p:cNvSpPr/>
           <p:nvPr/>
         </p:nvSpPr>
@@ -21991,7 +20433,7 @@
       </p:sp>
       <p:sp>
         <p:nvSpPr>
-          <p:cNvPr id="17" name="Rounded Rectangle 16"/>
+          <p:cNvPr id="15" name="Rounded Rectangle 14"/>
           <p:cNvSpPr/>
           <p:nvPr/>
         </p:nvSpPr>
@@ -22083,53 +20525,9 @@
           </a:p>
         </p:txBody>
       </p:sp>
-      <p:sp>
-        <p:nvSpPr>
-          <p:cNvPr id="18" name="Oval 17"/>
-          <p:cNvSpPr/>
-          <p:nvPr/>
-        </p:nvSpPr>
-        <p:spPr>
-          <a:xfrm>
-            <a:off x="11073384" y="1929384"/>
-            <a:ext cx="402336" cy="402336"/>
-          </a:xfrm>
-          <a:prstGeom prst="ellipse">
-            <a:avLst/>
-          </a:prstGeom>
-          <a:solidFill>
-            <a:srgbClr val="2A65F5"/>
-          </a:solidFill>
-          <a:ln>
-            <a:noFill/>
-          </a:ln>
-          <a:effectLst/>
-        </p:spPr>
-        <p:style>
-          <a:lnRef idx="1">
-            <a:schemeClr val="accent1"/>
-          </a:lnRef>
-          <a:fillRef idx="3">
-            <a:schemeClr val="accent1"/>
-          </a:fillRef>
-          <a:effectRef idx="2">
-            <a:schemeClr val="accent1"/>
-          </a:effectRef>
-          <a:fontRef idx="minor">
-            <a:schemeClr val="lt1"/>
-          </a:fontRef>
-        </p:style>
-        <p:txBody>
-          <a:bodyPr rtlCol="0" anchor="t" wrap="square" lIns="109728" rIns="109728" tIns="73152" bIns="73152"/>
-          <a:lstStyle/>
-          <a:p>
-            <a:pPr algn="ctr"/>
-          </a:p>
-        </p:txBody>
-      </p:sp>
       <p:pic>
         <p:nvPicPr>
-          <p:cNvPr id="19" name="Picture 18" descr="drone_w.png"/>
+          <p:cNvPr id="16" name="Picture 15" descr="drone_primary.png"/>
           <p:cNvPicPr>
             <a:picLocks noChangeAspect="1"/>
           </p:cNvPicPr>
@@ -22143,8 +20541,8 @@
         </p:blipFill>
         <p:spPr>
           <a:xfrm>
-            <a:off x="11177991" y="2033991"/>
-            <a:ext cx="193121" cy="193121"/>
+            <a:off x="11009010" y="1865010"/>
+            <a:ext cx="531083" cy="531083"/>
           </a:xfrm>
           <a:prstGeom prst="rect">
             <a:avLst/>
@@ -22153,7 +20551,7 @@
       </p:pic>
       <p:sp>
         <p:nvSpPr>
-          <p:cNvPr id="20" name="Rounded Rectangle 19"/>
+          <p:cNvPr id="17" name="Rounded Rectangle 16"/>
           <p:cNvSpPr/>
           <p:nvPr/>
         </p:nvSpPr>
@@ -22242,7 +20640,7 @@
       </p:sp>
       <p:sp>
         <p:nvSpPr>
-          <p:cNvPr id="21" name="Rounded Rectangle 20"/>
+          <p:cNvPr id="18" name="Rounded Rectangle 17"/>
           <p:cNvSpPr/>
           <p:nvPr/>
         </p:nvSpPr>
@@ -22331,7 +20729,7 @@
       </p:sp>
       <p:sp>
         <p:nvSpPr>
-          <p:cNvPr id="22" name="TextBox 21"/>
+          <p:cNvPr id="19" name="TextBox 18"/>
           <p:cNvSpPr txBox="1"/>
           <p:nvPr/>
         </p:nvSpPr>
@@ -22562,7 +20960,7 @@
       </p:sp>
       <p:pic>
         <p:nvPicPr>
-          <p:cNvPr id="10" name="Picture 9" descr="robot_n.png"/>
+          <p:cNvPr id="10" name="Picture 9" descr="robot_primary.png"/>
           <p:cNvPicPr>
             <a:picLocks noChangeAspect="1"/>
           </p:cNvPicPr>
@@ -22576,8 +20974,8 @@
         </p:blipFill>
         <p:spPr>
           <a:xfrm>
-            <a:off x="1106424" y="2121408"/>
-            <a:ext cx="475488" cy="475488"/>
+            <a:off x="1030345" y="2045329"/>
+            <a:ext cx="627644" cy="627644"/>
           </a:xfrm>
           <a:prstGeom prst="rect">
             <a:avLst/>
@@ -22586,7 +20984,7 @@
       </p:pic>
       <p:pic>
         <p:nvPicPr>
-          <p:cNvPr id="11" name="Picture 10" descr="drone_n.png"/>
+          <p:cNvPr id="11" name="Picture 10" descr="drone_primary.png"/>
           <p:cNvPicPr>
             <a:picLocks noChangeAspect="1"/>
           </p:cNvPicPr>
@@ -22600,8 +20998,8 @@
         </p:blipFill>
         <p:spPr>
           <a:xfrm>
-            <a:off x="1792224" y="2121408"/>
-            <a:ext cx="475488" cy="475488"/>
+            <a:off x="1716145" y="2045329"/>
+            <a:ext cx="627644" cy="627644"/>
           </a:xfrm>
           <a:prstGeom prst="rect">
             <a:avLst/>
@@ -22610,7 +21008,7 @@
       </p:pic>
       <p:pic>
         <p:nvPicPr>
-          <p:cNvPr id="12" name="Picture 11" descr="camera_n.png"/>
+          <p:cNvPr id="12" name="Picture 11" descr="camera_primary.png"/>
           <p:cNvPicPr>
             <a:picLocks noChangeAspect="1"/>
           </p:cNvPicPr>
@@ -22624,8 +21022,8 @@
         </p:blipFill>
         <p:spPr>
           <a:xfrm>
-            <a:off x="2478024" y="2121408"/>
-            <a:ext cx="475488" cy="475488"/>
+            <a:off x="2401945" y="2045329"/>
+            <a:ext cx="627644" cy="627644"/>
           </a:xfrm>
           <a:prstGeom prst="rect">
             <a:avLst/>
@@ -22711,7 +21109,7 @@
       </p:sp>
       <p:pic>
         <p:nvPicPr>
-          <p:cNvPr id="14" name="Picture 13" descr="tower_w.png"/>
+          <p:cNvPr id="14" name="Picture 13" descr="tower.png"/>
           <p:cNvPicPr>
             <a:picLocks noChangeAspect="1"/>
           </p:cNvPicPr>
@@ -22725,8 +21123,8 @@
         </p:blipFill>
         <p:spPr>
           <a:xfrm>
-            <a:off x="5221224" y="2121408"/>
-            <a:ext cx="548640" cy="548640"/>
+            <a:off x="5166359" y="2048256"/>
+            <a:ext cx="658368" cy="658368"/>
           </a:xfrm>
           <a:prstGeom prst="rect">
             <a:avLst/>
@@ -22858,7 +21256,7 @@
       </p:sp>
       <p:pic>
         <p:nvPicPr>
-          <p:cNvPr id="16" name="Picture 15" descr="k8s_w.png"/>
+          <p:cNvPr id="16" name="Picture 15" descr="k8s.png"/>
           <p:cNvPicPr>
             <a:picLocks noChangeAspect="1"/>
           </p:cNvPicPr>
@@ -22872,8 +21270,8 @@
         </p:blipFill>
         <p:spPr>
           <a:xfrm>
-            <a:off x="8732520" y="2121408"/>
-            <a:ext cx="475488" cy="475488"/>
+            <a:off x="8732520" y="2084831"/>
+            <a:ext cx="530352" cy="530352"/>
           </a:xfrm>
           <a:prstGeom prst="rect">
             <a:avLst/>
@@ -22882,7 +21280,7 @@
       </p:pic>
       <p:pic>
         <p:nvPicPr>
-          <p:cNvPr id="17" name="Picture 16" descr="server_w.png"/>
+          <p:cNvPr id="17" name="Picture 16" descr="server.png"/>
           <p:cNvPicPr>
             <a:picLocks noChangeAspect="1"/>
           </p:cNvPicPr>
@@ -22896,8 +21294,8 @@
         </p:blipFill>
         <p:spPr>
           <a:xfrm>
-            <a:off x="9418320" y="2121408"/>
-            <a:ext cx="475488" cy="475488"/>
+            <a:off x="9418320" y="2084831"/>
+            <a:ext cx="530352" cy="530352"/>
           </a:xfrm>
           <a:prstGeom prst="rect">
             <a:avLst/>
@@ -22906,7 +21304,7 @@
       </p:pic>
       <p:pic>
         <p:nvPicPr>
-          <p:cNvPr id="18" name="Picture 17" descr="harddrive_w.png"/>
+          <p:cNvPr id="18" name="Picture 17" descr="harddrive.png"/>
           <p:cNvPicPr>
             <a:picLocks noChangeAspect="1"/>
           </p:cNvPicPr>
@@ -22920,8 +21318,8 @@
         </p:blipFill>
         <p:spPr>
           <a:xfrm>
-            <a:off x="10104120" y="2121408"/>
-            <a:ext cx="475488" cy="475488"/>
+            <a:off x="10104120" y="2084831"/>
+            <a:ext cx="530352" cy="530352"/>
           </a:xfrm>
           <a:prstGeom prst="rect">
             <a:avLst/>
@@ -24078,7 +22476,7 @@
       </p:sp>
       <p:pic>
         <p:nvPicPr>
-          <p:cNvPr id="10" name="Picture 9" descr="eye_n.png"/>
+          <p:cNvPr id="10" name="Picture 9" descr="eye_primary.png"/>
           <p:cNvPicPr>
             <a:picLocks noChangeAspect="1"/>
           </p:cNvPicPr>
@@ -24092,8 +22490,8 @@
         </p:blipFill>
         <p:spPr>
           <a:xfrm>
-            <a:off x="1687068" y="1920240"/>
-            <a:ext cx="347472" cy="347472"/>
+            <a:off x="1631472" y="1846356"/>
+            <a:ext cx="458663" cy="458663"/>
           </a:xfrm>
           <a:prstGeom prst="rect">
             <a:avLst/>
@@ -24192,7 +22590,7 @@
       </p:sp>
       <p:pic>
         <p:nvPicPr>
-          <p:cNvPr id="12" name="Picture 11" descr="wand_n.png"/>
+          <p:cNvPr id="12" name="Picture 11" descr="wand_primary.png"/>
           <p:cNvPicPr>
             <a:picLocks noChangeAspect="1"/>
           </p:cNvPicPr>
@@ -24206,8 +22604,8 @@
         </p:blipFill>
         <p:spPr>
           <a:xfrm>
-            <a:off x="4604004" y="1920240"/>
-            <a:ext cx="347472" cy="347472"/>
+            <a:off x="4548408" y="1846356"/>
+            <a:ext cx="458663" cy="458663"/>
           </a:xfrm>
           <a:prstGeom prst="rect">
             <a:avLst/>
@@ -24306,7 +22704,7 @@
       </p:sp>
       <p:pic>
         <p:nvPicPr>
-          <p:cNvPr id="14" name="Picture 13" descr="usergear_n.png"/>
+          <p:cNvPr id="14" name="Picture 13" descr="usergear_primary.png"/>
           <p:cNvPicPr>
             <a:picLocks noChangeAspect="1"/>
           </p:cNvPicPr>
@@ -24320,8 +22718,8 @@
         </p:blipFill>
         <p:spPr>
           <a:xfrm>
-            <a:off x="7392924" y="1920240"/>
-            <a:ext cx="347472" cy="347472"/>
+            <a:off x="7337328" y="1846356"/>
+            <a:ext cx="458663" cy="458663"/>
           </a:xfrm>
           <a:prstGeom prst="rect">
             <a:avLst/>
@@ -24420,7 +22818,7 @@
       </p:sp>
       <p:pic>
         <p:nvPicPr>
-          <p:cNvPr id="16" name="Picture 15" descr="robot_w.png"/>
+          <p:cNvPr id="16" name="Picture 15" descr="robot.png"/>
           <p:cNvPicPr>
             <a:picLocks noChangeAspect="1"/>
           </p:cNvPicPr>
@@ -24434,8 +22832,8 @@
         </p:blipFill>
         <p:spPr>
           <a:xfrm>
-            <a:off x="10181844" y="1920240"/>
-            <a:ext cx="347472" cy="347472"/>
+            <a:off x="10136124" y="1856231"/>
+            <a:ext cx="438912" cy="438912"/>
           </a:xfrm>
           <a:prstGeom prst="rect">
             <a:avLst/>
@@ -24570,7 +22968,7 @@
       </p:sp>
       <p:pic>
         <p:nvPicPr>
-          <p:cNvPr id="18" name="Picture 17" descr="robot_b.png"/>
+          <p:cNvPr id="18" name="Picture 17" descr="robot_primary.png"/>
           <p:cNvPicPr>
             <a:picLocks noChangeAspect="1"/>
           </p:cNvPicPr>
@@ -24584,8 +22982,8 @@
         </p:blipFill>
         <p:spPr>
           <a:xfrm>
-            <a:off x="10469880" y="4572000"/>
-            <a:ext cx="960120" cy="960120"/>
+            <a:off x="10263225" y="4365345"/>
+            <a:ext cx="1327708" cy="1327708"/>
           </a:xfrm>
           <a:prstGeom prst="rect">
             <a:avLst/>
@@ -24790,53 +23188,9 @@
           </a:p>
         </p:txBody>
       </p:sp>
-      <p:sp>
-        <p:nvSpPr>
-          <p:cNvPr id="10" name="Oval 9"/>
-          <p:cNvSpPr/>
-          <p:nvPr/>
-        </p:nvSpPr>
-        <p:spPr>
-          <a:xfrm>
-            <a:off x="2016252" y="2331720"/>
-            <a:ext cx="512064" cy="512064"/>
-          </a:xfrm>
-          <a:prstGeom prst="ellipse">
-            <a:avLst/>
-          </a:prstGeom>
-          <a:solidFill>
-            <a:srgbClr val="00219B"/>
-          </a:solidFill>
-          <a:ln>
-            <a:noFill/>
-          </a:ln>
-          <a:effectLst/>
-        </p:spPr>
-        <p:style>
-          <a:lnRef idx="1">
-            <a:schemeClr val="accent1"/>
-          </a:lnRef>
-          <a:fillRef idx="3">
-            <a:schemeClr val="accent1"/>
-          </a:fillRef>
-          <a:effectRef idx="2">
-            <a:schemeClr val="accent1"/>
-          </a:effectRef>
-          <a:fontRef idx="minor">
-            <a:schemeClr val="lt1"/>
-          </a:fontRef>
-        </p:style>
-        <p:txBody>
-          <a:bodyPr rtlCol="0" anchor="t" wrap="square" lIns="109728" rIns="109728" tIns="73152" bIns="73152"/>
-          <a:lstStyle/>
-          <a:p>
-            <a:pPr algn="ctr"/>
-          </a:p>
-        </p:txBody>
-      </p:sp>
       <p:pic>
         <p:nvPicPr>
-          <p:cNvPr id="11" name="Picture 10" descr="microchip_w.png"/>
+          <p:cNvPr id="10" name="Picture 9" descr="microchip_teal.png"/>
           <p:cNvPicPr>
             <a:picLocks noChangeAspect="1"/>
           </p:cNvPicPr>
@@ -24850,8 +23204,8 @@
         </p:blipFill>
         <p:spPr>
           <a:xfrm>
-            <a:off x="2149388" y="2464856"/>
-            <a:ext cx="245790" cy="245790"/>
+            <a:off x="1934321" y="2249789"/>
+            <a:ext cx="675924" cy="675924"/>
           </a:xfrm>
           <a:prstGeom prst="rect">
             <a:avLst/>
@@ -24860,7 +23214,7 @@
       </p:pic>
       <p:sp>
         <p:nvSpPr>
-          <p:cNvPr id="12" name="Rounded Rectangle 11"/>
+          <p:cNvPr id="11" name="Rounded Rectangle 10"/>
           <p:cNvSpPr/>
           <p:nvPr/>
         </p:nvSpPr>
@@ -24962,53 +23316,9 @@
           </a:p>
         </p:txBody>
       </p:sp>
-      <p:sp>
-        <p:nvSpPr>
-          <p:cNvPr id="13" name="Oval 12"/>
-          <p:cNvSpPr/>
-          <p:nvPr/>
-        </p:nvSpPr>
-        <p:spPr>
-          <a:xfrm>
-            <a:off x="5801868" y="2331720"/>
-            <a:ext cx="512064" cy="512064"/>
-          </a:xfrm>
-          <a:prstGeom prst="ellipse">
-            <a:avLst/>
-          </a:prstGeom>
-          <a:solidFill>
-            <a:srgbClr val="00219B"/>
-          </a:solidFill>
-          <a:ln>
-            <a:noFill/>
-          </a:ln>
-          <a:effectLst/>
-        </p:spPr>
-        <p:style>
-          <a:lnRef idx="1">
-            <a:schemeClr val="accent1"/>
-          </a:lnRef>
-          <a:fillRef idx="3">
-            <a:schemeClr val="accent1"/>
-          </a:fillRef>
-          <a:effectRef idx="2">
-            <a:schemeClr val="accent1"/>
-          </a:effectRef>
-          <a:fontRef idx="minor">
-            <a:schemeClr val="lt1"/>
-          </a:fontRef>
-        </p:style>
-        <p:txBody>
-          <a:bodyPr rtlCol="0" anchor="t" wrap="square" lIns="109728" rIns="109728" tIns="73152" bIns="73152"/>
-          <a:lstStyle/>
-          <a:p>
-            <a:pPr algn="ctr"/>
-          </a:p>
-        </p:txBody>
-      </p:sp>
       <p:pic>
         <p:nvPicPr>
-          <p:cNvPr id="14" name="Picture 13" descr="personexcl_w.png"/>
+          <p:cNvPr id="12" name="Picture 11" descr="personexcl_red.png"/>
           <p:cNvPicPr>
             <a:picLocks noChangeAspect="1"/>
           </p:cNvPicPr>
@@ -25022,8 +23332,8 @@
         </p:blipFill>
         <p:spPr>
           <a:xfrm>
-            <a:off x="5935004" y="2464856"/>
-            <a:ext cx="245790" cy="245790"/>
+            <a:off x="5719937" y="2249789"/>
+            <a:ext cx="675924" cy="675924"/>
           </a:xfrm>
           <a:prstGeom prst="rect">
             <a:avLst/>
@@ -25032,7 +23342,7 @@
       </p:pic>
       <p:sp>
         <p:nvSpPr>
-          <p:cNvPr id="15" name="Rounded Rectangle 14"/>
+          <p:cNvPr id="13" name="Rounded Rectangle 12"/>
           <p:cNvSpPr/>
           <p:nvPr/>
         </p:nvSpPr>
@@ -25134,53 +23444,9 @@
           </a:p>
         </p:txBody>
       </p:sp>
-      <p:sp>
-        <p:nvSpPr>
-          <p:cNvPr id="16" name="Oval 15"/>
-          <p:cNvSpPr/>
-          <p:nvPr/>
-        </p:nvSpPr>
-        <p:spPr>
-          <a:xfrm>
-            <a:off x="9587484" y="2331720"/>
-            <a:ext cx="512064" cy="512064"/>
-          </a:xfrm>
-          <a:prstGeom prst="ellipse">
-            <a:avLst/>
-          </a:prstGeom>
-          <a:solidFill>
-            <a:srgbClr val="00219B"/>
-          </a:solidFill>
-          <a:ln>
-            <a:noFill/>
-          </a:ln>
-          <a:effectLst/>
-        </p:spPr>
-        <p:style>
-          <a:lnRef idx="1">
-            <a:schemeClr val="accent1"/>
-          </a:lnRef>
-          <a:fillRef idx="3">
-            <a:schemeClr val="accent1"/>
-          </a:fillRef>
-          <a:effectRef idx="2">
-            <a:schemeClr val="accent1"/>
-          </a:effectRef>
-          <a:fontRef idx="minor">
-            <a:schemeClr val="lt1"/>
-          </a:fontRef>
-        </p:style>
-        <p:txBody>
-          <a:bodyPr rtlCol="0" anchor="t" wrap="square" lIns="109728" rIns="109728" tIns="73152" bIns="73152"/>
-          <a:lstStyle/>
-          <a:p>
-            <a:pPr algn="ctr"/>
-          </a:p>
-        </p:txBody>
-      </p:sp>
       <p:pic>
         <p:nvPicPr>
-          <p:cNvPr id="17" name="Picture 16" descr="rocket_w.png"/>
+          <p:cNvPr id="14" name="Picture 13" descr="rocket_purple.png"/>
           <p:cNvPicPr>
             <a:picLocks noChangeAspect="1"/>
           </p:cNvPicPr>
@@ -25194,8 +23460,8 @@
         </p:blipFill>
         <p:spPr>
           <a:xfrm>
-            <a:off x="9720620" y="2464856"/>
-            <a:ext cx="245790" cy="245790"/>
+            <a:off x="9505553" y="2249789"/>
+            <a:ext cx="675924" cy="675924"/>
           </a:xfrm>
           <a:prstGeom prst="rect">
             <a:avLst/>
@@ -25354,7 +23620,7 @@
       </p:sp>
       <p:pic>
         <p:nvPicPr>
-          <p:cNvPr id="10" name="Picture 9" descr="brain_w.png"/>
+          <p:cNvPr id="10" name="Picture 9" descr="brain.png"/>
           <p:cNvPicPr>
             <a:picLocks noChangeAspect="1"/>
           </p:cNvPicPr>
@@ -25368,8 +23634,8 @@
         </p:blipFill>
         <p:spPr>
           <a:xfrm>
-            <a:off x="1001268" y="2011680"/>
-            <a:ext cx="347472" cy="347472"/>
+            <a:off x="955548" y="1956816"/>
+            <a:ext cx="438912" cy="438912"/>
           </a:xfrm>
           <a:prstGeom prst="rect">
             <a:avLst/>
@@ -25590,7 +23856,7 @@
       </p:sp>
       <p:pic>
         <p:nvPicPr>
-          <p:cNvPr id="14" name="Picture 13" descr="cubes_w.png"/>
+          <p:cNvPr id="14" name="Picture 13" descr="cubes.png"/>
           <p:cNvPicPr>
             <a:picLocks noChangeAspect="1"/>
           </p:cNvPicPr>
@@ -25604,8 +23870,8 @@
         </p:blipFill>
         <p:spPr>
           <a:xfrm>
-            <a:off x="1001268" y="3401568"/>
-            <a:ext cx="347472" cy="347472"/>
+            <a:off x="955548" y="3346704"/>
+            <a:ext cx="438912" cy="438912"/>
           </a:xfrm>
           <a:prstGeom prst="rect">
             <a:avLst/>
@@ -25826,7 +24092,7 @@
       </p:sp>
       <p:pic>
         <p:nvPicPr>
-          <p:cNvPr id="18" name="Picture 17" descr="robot_w.png"/>
+          <p:cNvPr id="18" name="Picture 17" descr="robot.png"/>
           <p:cNvPicPr>
             <a:picLocks noChangeAspect="1"/>
           </p:cNvPicPr>
@@ -25840,8 +24106,8 @@
         </p:blipFill>
         <p:spPr>
           <a:xfrm>
-            <a:off x="1001268" y="4791456"/>
-            <a:ext cx="347472" cy="347472"/>
+            <a:off x="955548" y="4736592"/>
+            <a:ext cx="438912" cy="438912"/>
           </a:xfrm>
           <a:prstGeom prst="rect">
             <a:avLst/>
@@ -26289,53 +24555,9 @@
           </a:p>
         </p:txBody>
       </p:sp>
-      <p:sp>
-        <p:nvSpPr>
-          <p:cNvPr id="10" name="Oval 9"/>
-          <p:cNvSpPr/>
-          <p:nvPr/>
-        </p:nvSpPr>
-        <p:spPr>
-          <a:xfrm>
-            <a:off x="630936" y="1947672"/>
-            <a:ext cx="402336" cy="402336"/>
-          </a:xfrm>
-          <a:prstGeom prst="ellipse">
-            <a:avLst/>
-          </a:prstGeom>
-          <a:solidFill>
-            <a:srgbClr val="2A65F5"/>
-          </a:solidFill>
-          <a:ln>
-            <a:noFill/>
-          </a:ln>
-          <a:effectLst/>
-        </p:spPr>
-        <p:style>
-          <a:lnRef idx="1">
-            <a:schemeClr val="accent1"/>
-          </a:lnRef>
-          <a:fillRef idx="3">
-            <a:schemeClr val="accent1"/>
-          </a:fillRef>
-          <a:effectRef idx="2">
-            <a:schemeClr val="accent1"/>
-          </a:effectRef>
-          <a:fontRef idx="minor">
-            <a:schemeClr val="lt1"/>
-          </a:fontRef>
-        </p:style>
-        <p:txBody>
-          <a:bodyPr rtlCol="0" anchor="t" wrap="square" lIns="109728" rIns="109728" tIns="73152" bIns="73152"/>
-          <a:lstStyle/>
-          <a:p>
-            <a:pPr algn="ctr"/>
-          </a:p>
-        </p:txBody>
-      </p:sp>
       <p:pic>
         <p:nvPicPr>
-          <p:cNvPr id="11" name="Picture 10" descr="server_w.png"/>
+          <p:cNvPr id="10" name="Picture 9" descr="server_primary.png"/>
           <p:cNvPicPr>
             <a:picLocks noChangeAspect="1"/>
           </p:cNvPicPr>
@@ -26349,8 +24571,8 @@
         </p:blipFill>
         <p:spPr>
           <a:xfrm>
-            <a:off x="735543" y="2052279"/>
-            <a:ext cx="193121" cy="193121"/>
+            <a:off x="566562" y="1883298"/>
+            <a:ext cx="531083" cy="531083"/>
           </a:xfrm>
           <a:prstGeom prst="rect">
             <a:avLst/>
@@ -26359,7 +24581,7 @@
       </p:pic>
       <p:sp>
         <p:nvSpPr>
-          <p:cNvPr id="12" name="Chevron 11"/>
+          <p:cNvPr id="11" name="Chevron 10"/>
           <p:cNvSpPr/>
           <p:nvPr/>
         </p:nvSpPr>
@@ -26405,7 +24627,7 @@
       </p:sp>
       <p:sp>
         <p:nvSpPr>
-          <p:cNvPr id="13" name="Rounded Rectangle 12"/>
+          <p:cNvPr id="12" name="Rounded Rectangle 11"/>
           <p:cNvSpPr/>
           <p:nvPr/>
         </p:nvSpPr>
@@ -26497,53 +24719,9 @@
           </a:p>
         </p:txBody>
       </p:sp>
-      <p:sp>
-        <p:nvSpPr>
-          <p:cNvPr id="14" name="Oval 13"/>
-          <p:cNvSpPr/>
-          <p:nvPr/>
-        </p:nvSpPr>
-        <p:spPr>
-          <a:xfrm>
-            <a:off x="4471416" y="1947672"/>
-            <a:ext cx="402336" cy="402336"/>
-          </a:xfrm>
-          <a:prstGeom prst="ellipse">
-            <a:avLst/>
-          </a:prstGeom>
-          <a:solidFill>
-            <a:srgbClr val="2A65F5"/>
-          </a:solidFill>
-          <a:ln>
-            <a:noFill/>
-          </a:ln>
-          <a:effectLst/>
-        </p:spPr>
-        <p:style>
-          <a:lnRef idx="1">
-            <a:schemeClr val="accent1"/>
-          </a:lnRef>
-          <a:fillRef idx="3">
-            <a:schemeClr val="accent1"/>
-          </a:fillRef>
-          <a:effectRef idx="2">
-            <a:schemeClr val="accent1"/>
-          </a:effectRef>
-          <a:fontRef idx="minor">
-            <a:schemeClr val="lt1"/>
-          </a:fontRef>
-        </p:style>
-        <p:txBody>
-          <a:bodyPr rtlCol="0" anchor="t" wrap="square" lIns="109728" rIns="109728" tIns="73152" bIns="73152"/>
-          <a:lstStyle/>
-          <a:p>
-            <a:pPr algn="ctr"/>
-          </a:p>
-        </p:txBody>
-      </p:sp>
       <p:pic>
         <p:nvPicPr>
-          <p:cNvPr id="15" name="Picture 14" descr="cubes_w.png"/>
+          <p:cNvPr id="13" name="Picture 12" descr="cubes_primary.png"/>
           <p:cNvPicPr>
             <a:picLocks noChangeAspect="1"/>
           </p:cNvPicPr>
@@ -26557,8 +24735,8 @@
         </p:blipFill>
         <p:spPr>
           <a:xfrm>
-            <a:off x="4576023" y="2052279"/>
-            <a:ext cx="193121" cy="193121"/>
+            <a:off x="4407042" y="1883298"/>
+            <a:ext cx="531083" cy="531083"/>
           </a:xfrm>
           <a:prstGeom prst="rect">
             <a:avLst/>
@@ -26567,7 +24745,7 @@
       </p:pic>
       <p:sp>
         <p:nvSpPr>
-          <p:cNvPr id="16" name="Chevron 15"/>
+          <p:cNvPr id="14" name="Chevron 13"/>
           <p:cNvSpPr/>
           <p:nvPr/>
         </p:nvSpPr>
@@ -26613,7 +24791,7 @@
       </p:sp>
       <p:sp>
         <p:nvSpPr>
-          <p:cNvPr id="17" name="Rounded Rectangle 16"/>
+          <p:cNvPr id="15" name="Rounded Rectangle 14"/>
           <p:cNvSpPr/>
           <p:nvPr/>
         </p:nvSpPr>
@@ -26705,53 +24883,9 @@
           </a:p>
         </p:txBody>
       </p:sp>
-      <p:sp>
-        <p:nvSpPr>
-          <p:cNvPr id="18" name="Oval 17"/>
-          <p:cNvSpPr/>
-          <p:nvPr/>
-        </p:nvSpPr>
-        <p:spPr>
-          <a:xfrm>
-            <a:off x="8311896" y="1947672"/>
-            <a:ext cx="402336" cy="402336"/>
-          </a:xfrm>
-          <a:prstGeom prst="ellipse">
-            <a:avLst/>
-          </a:prstGeom>
-          <a:solidFill>
-            <a:srgbClr val="2A65F5"/>
-          </a:solidFill>
-          <a:ln>
-            <a:noFill/>
-          </a:ln>
-          <a:effectLst/>
-        </p:spPr>
-        <p:style>
-          <a:lnRef idx="1">
-            <a:schemeClr val="accent1"/>
-          </a:lnRef>
-          <a:fillRef idx="3">
-            <a:schemeClr val="accent1"/>
-          </a:fillRef>
-          <a:effectRef idx="2">
-            <a:schemeClr val="accent1"/>
-          </a:effectRef>
-          <a:fontRef idx="minor">
-            <a:schemeClr val="lt1"/>
-          </a:fontRef>
-        </p:style>
-        <p:txBody>
-          <a:bodyPr rtlCol="0" anchor="t" wrap="square" lIns="109728" rIns="109728" tIns="73152" bIns="73152"/>
-          <a:lstStyle/>
-          <a:p>
-            <a:pPr algn="ctr"/>
-          </a:p>
-        </p:txBody>
-      </p:sp>
       <p:pic>
         <p:nvPicPr>
-          <p:cNvPr id="19" name="Picture 18" descr="microchip_w.png"/>
+          <p:cNvPr id="16" name="Picture 15" descr="microchip_primary.png"/>
           <p:cNvPicPr>
             <a:picLocks noChangeAspect="1"/>
           </p:cNvPicPr>
@@ -26765,8 +24899,8 @@
         </p:blipFill>
         <p:spPr>
           <a:xfrm>
-            <a:off x="8416503" y="2052279"/>
-            <a:ext cx="193121" cy="193121"/>
+            <a:off x="8247522" y="1883298"/>
+            <a:ext cx="531083" cy="531083"/>
           </a:xfrm>
           <a:prstGeom prst="rect">
             <a:avLst/>
@@ -26775,7 +24909,7 @@
       </p:pic>
       <p:sp>
         <p:nvSpPr>
-          <p:cNvPr id="20" name="Rounded Rectangle 19"/>
+          <p:cNvPr id="17" name="Rounded Rectangle 16"/>
           <p:cNvSpPr/>
           <p:nvPr/>
         </p:nvSpPr>
@@ -27031,53 +25165,9 @@
           </a:p>
         </p:txBody>
       </p:sp>
-      <p:sp>
-        <p:nvSpPr>
-          <p:cNvPr id="10" name="Oval 9"/>
-          <p:cNvSpPr/>
-          <p:nvPr/>
-        </p:nvSpPr>
-        <p:spPr>
-          <a:xfrm>
-            <a:off x="612648" y="2002536"/>
-            <a:ext cx="365760" cy="365760"/>
-          </a:xfrm>
-          <a:prstGeom prst="ellipse">
-            <a:avLst/>
-          </a:prstGeom>
-          <a:solidFill>
-            <a:srgbClr val="2A65F5"/>
-          </a:solidFill>
-          <a:ln>
-            <a:noFill/>
-          </a:ln>
-          <a:effectLst/>
-        </p:spPr>
-        <p:style>
-          <a:lnRef idx="1">
-            <a:schemeClr val="accent1"/>
-          </a:lnRef>
-          <a:fillRef idx="3">
-            <a:schemeClr val="accent1"/>
-          </a:fillRef>
-          <a:effectRef idx="2">
-            <a:schemeClr val="accent1"/>
-          </a:effectRef>
-          <a:fontRef idx="minor">
-            <a:schemeClr val="lt1"/>
-          </a:fontRef>
-        </p:style>
-        <p:txBody>
-          <a:bodyPr rtlCol="0" anchor="t" wrap="square" lIns="109728" rIns="109728" tIns="73152" bIns="73152"/>
-          <a:lstStyle/>
-          <a:p>
-            <a:pPr algn="ctr"/>
-          </a:p>
-        </p:txBody>
-      </p:sp>
       <p:pic>
         <p:nvPicPr>
-          <p:cNvPr id="11" name="Picture 10" descr="robot_w.png"/>
+          <p:cNvPr id="10" name="Picture 9" descr="robot_primary.png"/>
           <p:cNvPicPr>
             <a:picLocks noChangeAspect="1"/>
           </p:cNvPicPr>
@@ -27091,8 +25181,8 @@
         </p:blipFill>
         <p:spPr>
           <a:xfrm>
-            <a:off x="707745" y="2097633"/>
-            <a:ext cx="175564" cy="175564"/>
+            <a:off x="554126" y="1944014"/>
+            <a:ext cx="482803" cy="482803"/>
           </a:xfrm>
           <a:prstGeom prst="rect">
             <a:avLst/>
@@ -27101,7 +25191,7 @@
       </p:pic>
       <p:sp>
         <p:nvSpPr>
-          <p:cNvPr id="12" name="Rounded Rectangle 11"/>
+          <p:cNvPr id="11" name="Rounded Rectangle 10"/>
           <p:cNvSpPr/>
           <p:nvPr/>
         </p:nvSpPr>
@@ -27186,53 +25276,9 @@
           </a:p>
         </p:txBody>
       </p:sp>
-      <p:sp>
-        <p:nvSpPr>
-          <p:cNvPr id="13" name="Oval 12"/>
-          <p:cNvSpPr/>
-          <p:nvPr/>
-        </p:nvSpPr>
-        <p:spPr>
-          <a:xfrm>
-            <a:off x="4398264" y="2002536"/>
-            <a:ext cx="365760" cy="365760"/>
-          </a:xfrm>
-          <a:prstGeom prst="ellipse">
-            <a:avLst/>
-          </a:prstGeom>
-          <a:solidFill>
-            <a:srgbClr val="2A65F5"/>
-          </a:solidFill>
-          <a:ln>
-            <a:noFill/>
-          </a:ln>
-          <a:effectLst/>
-        </p:spPr>
-        <p:style>
-          <a:lnRef idx="1">
-            <a:schemeClr val="accent1"/>
-          </a:lnRef>
-          <a:fillRef idx="3">
-            <a:schemeClr val="accent1"/>
-          </a:fillRef>
-          <a:effectRef idx="2">
-            <a:schemeClr val="accent1"/>
-          </a:effectRef>
-          <a:fontRef idx="minor">
-            <a:schemeClr val="lt1"/>
-          </a:fontRef>
-        </p:style>
-        <p:txBody>
-          <a:bodyPr rtlCol="0" anchor="t" wrap="square" lIns="109728" rIns="109728" tIns="73152" bIns="73152"/>
-          <a:lstStyle/>
-          <a:p>
-            <a:pPr algn="ctr"/>
-          </a:p>
-        </p:txBody>
-      </p:sp>
       <p:pic>
         <p:nvPicPr>
-          <p:cNvPr id="14" name="Picture 13" descr="robot_w.png"/>
+          <p:cNvPr id="12" name="Picture 11" descr="robot_primary.png"/>
           <p:cNvPicPr>
             <a:picLocks noChangeAspect="1"/>
           </p:cNvPicPr>
@@ -27246,8 +25292,8 @@
         </p:blipFill>
         <p:spPr>
           <a:xfrm>
-            <a:off x="4493361" y="2097633"/>
-            <a:ext cx="175564" cy="175564"/>
+            <a:off x="4339742" y="1944014"/>
+            <a:ext cx="482803" cy="482803"/>
           </a:xfrm>
           <a:prstGeom prst="rect">
             <a:avLst/>
@@ -27256,7 +25302,7 @@
       </p:pic>
       <p:sp>
         <p:nvSpPr>
-          <p:cNvPr id="15" name="Rounded Rectangle 14"/>
+          <p:cNvPr id="13" name="Rounded Rectangle 12"/>
           <p:cNvSpPr/>
           <p:nvPr/>
         </p:nvSpPr>
@@ -27341,53 +25387,9 @@
           </a:p>
         </p:txBody>
       </p:sp>
-      <p:sp>
-        <p:nvSpPr>
-          <p:cNvPr id="16" name="Oval 15"/>
-          <p:cNvSpPr/>
-          <p:nvPr/>
-        </p:nvSpPr>
-        <p:spPr>
-          <a:xfrm>
-            <a:off x="8183880" y="2002536"/>
-            <a:ext cx="365760" cy="365760"/>
-          </a:xfrm>
-          <a:prstGeom prst="ellipse">
-            <a:avLst/>
-          </a:prstGeom>
-          <a:solidFill>
-            <a:srgbClr val="2A65F5"/>
-          </a:solidFill>
-          <a:ln>
-            <a:noFill/>
-          </a:ln>
-          <a:effectLst/>
-        </p:spPr>
-        <p:style>
-          <a:lnRef idx="1">
-            <a:schemeClr val="accent1"/>
-          </a:lnRef>
-          <a:fillRef idx="3">
-            <a:schemeClr val="accent1"/>
-          </a:fillRef>
-          <a:effectRef idx="2">
-            <a:schemeClr val="accent1"/>
-          </a:effectRef>
-          <a:fontRef idx="minor">
-            <a:schemeClr val="lt1"/>
-          </a:fontRef>
-        </p:style>
-        <p:txBody>
-          <a:bodyPr rtlCol="0" anchor="t" wrap="square" lIns="109728" rIns="109728" tIns="73152" bIns="73152"/>
-          <a:lstStyle/>
-          <a:p>
-            <a:pPr algn="ctr"/>
-          </a:p>
-        </p:txBody>
-      </p:sp>
       <p:pic>
         <p:nvPicPr>
-          <p:cNvPr id="17" name="Picture 16" descr="robot_w.png"/>
+          <p:cNvPr id="14" name="Picture 13" descr="robot_primary.png"/>
           <p:cNvPicPr>
             <a:picLocks noChangeAspect="1"/>
           </p:cNvPicPr>
@@ -27401,8 +25403,8 @@
         </p:blipFill>
         <p:spPr>
           <a:xfrm>
-            <a:off x="8278977" y="2097633"/>
-            <a:ext cx="175564" cy="175564"/>
+            <a:off x="8125358" y="1944014"/>
+            <a:ext cx="482803" cy="482803"/>
           </a:xfrm>
           <a:prstGeom prst="rect">
             <a:avLst/>
@@ -27411,7 +25413,7 @@
       </p:pic>
       <p:sp>
         <p:nvSpPr>
-          <p:cNvPr id="18" name="Rounded Rectangle 17"/>
+          <p:cNvPr id="15" name="Rounded Rectangle 14"/>
           <p:cNvSpPr/>
           <p:nvPr/>
         </p:nvSpPr>
@@ -27496,68 +25498,24 @@
           </a:p>
         </p:txBody>
       </p:sp>
-      <p:sp>
-        <p:nvSpPr>
-          <p:cNvPr id="19" name="Oval 18"/>
-          <p:cNvSpPr/>
-          <p:nvPr/>
-        </p:nvSpPr>
-        <p:spPr>
-          <a:xfrm>
-            <a:off x="612648" y="4133087"/>
-            <a:ext cx="365760" cy="365760"/>
-          </a:xfrm>
-          <a:prstGeom prst="ellipse">
-            <a:avLst/>
-          </a:prstGeom>
-          <a:solidFill>
-            <a:srgbClr val="E86487"/>
-          </a:solidFill>
-          <a:ln>
-            <a:noFill/>
-          </a:ln>
-          <a:effectLst/>
-        </p:spPr>
-        <p:style>
-          <a:lnRef idx="1">
-            <a:schemeClr val="accent1"/>
-          </a:lnRef>
-          <a:fillRef idx="3">
-            <a:schemeClr val="accent1"/>
-          </a:fillRef>
-          <a:effectRef idx="2">
-            <a:schemeClr val="accent1"/>
-          </a:effectRef>
-          <a:fontRef idx="minor">
-            <a:schemeClr val="lt1"/>
-          </a:fontRef>
-        </p:style>
-        <p:txBody>
-          <a:bodyPr rtlCol="0" anchor="t" wrap="square" lIns="109728" rIns="109728" tIns="73152" bIns="73152"/>
-          <a:lstStyle/>
-          <a:p>
-            <a:pPr algn="ctr"/>
-          </a:p>
-        </p:txBody>
-      </p:sp>
       <p:pic>
         <p:nvPicPr>
-          <p:cNvPr id="20" name="Picture 19" descr="robot_w.png"/>
+          <p:cNvPr id="16" name="Picture 15" descr="robot_red.png"/>
           <p:cNvPicPr>
             <a:picLocks noChangeAspect="1"/>
           </p:cNvPicPr>
           <p:nvPr/>
         </p:nvPicPr>
         <p:blipFill>
-          <a:blip r:embed="rId2"/>
+          <a:blip r:embed="rId3"/>
           <a:stretch>
             <a:fillRect/>
           </a:stretch>
         </p:blipFill>
         <p:spPr>
           <a:xfrm>
-            <a:off x="707745" y="4228185"/>
-            <a:ext cx="175564" cy="175564"/>
+            <a:off x="554126" y="4074566"/>
+            <a:ext cx="482803" cy="482803"/>
           </a:xfrm>
           <a:prstGeom prst="rect">
             <a:avLst/>
@@ -27566,7 +25524,7 @@
       </p:pic>
       <p:sp>
         <p:nvSpPr>
-          <p:cNvPr id="21" name="Rounded Rectangle 20"/>
+          <p:cNvPr id="17" name="Rounded Rectangle 16"/>
           <p:cNvSpPr/>
           <p:nvPr/>
         </p:nvSpPr>
@@ -27651,53 +25609,9 @@
           </a:p>
         </p:txBody>
       </p:sp>
-      <p:sp>
-        <p:nvSpPr>
-          <p:cNvPr id="22" name="Oval 21"/>
-          <p:cNvSpPr/>
-          <p:nvPr/>
-        </p:nvSpPr>
-        <p:spPr>
-          <a:xfrm>
-            <a:off x="4398264" y="4133087"/>
-            <a:ext cx="365760" cy="365760"/>
-          </a:xfrm>
-          <a:prstGeom prst="ellipse">
-            <a:avLst/>
-          </a:prstGeom>
-          <a:solidFill>
-            <a:srgbClr val="2A65F5"/>
-          </a:solidFill>
-          <a:ln>
-            <a:noFill/>
-          </a:ln>
-          <a:effectLst/>
-        </p:spPr>
-        <p:style>
-          <a:lnRef idx="1">
-            <a:schemeClr val="accent1"/>
-          </a:lnRef>
-          <a:fillRef idx="3">
-            <a:schemeClr val="accent1"/>
-          </a:fillRef>
-          <a:effectRef idx="2">
-            <a:schemeClr val="accent1"/>
-          </a:effectRef>
-          <a:fontRef idx="minor">
-            <a:schemeClr val="lt1"/>
-          </a:fontRef>
-        </p:style>
-        <p:txBody>
-          <a:bodyPr rtlCol="0" anchor="t" wrap="square" lIns="109728" rIns="109728" tIns="73152" bIns="73152"/>
-          <a:lstStyle/>
-          <a:p>
-            <a:pPr algn="ctr"/>
-          </a:p>
-        </p:txBody>
-      </p:sp>
       <p:pic>
         <p:nvPicPr>
-          <p:cNvPr id="23" name="Picture 22" descr="robot_w.png"/>
+          <p:cNvPr id="18" name="Picture 17" descr="robot_primary.png"/>
           <p:cNvPicPr>
             <a:picLocks noChangeAspect="1"/>
           </p:cNvPicPr>
@@ -27711,8 +25625,8 @@
         </p:blipFill>
         <p:spPr>
           <a:xfrm>
-            <a:off x="4493361" y="4228185"/>
-            <a:ext cx="175564" cy="175564"/>
+            <a:off x="4339742" y="4074566"/>
+            <a:ext cx="482803" cy="482803"/>
           </a:xfrm>
           <a:prstGeom prst="rect">
             <a:avLst/>
@@ -27721,7 +25635,7 @@
       </p:pic>
       <p:sp>
         <p:nvSpPr>
-          <p:cNvPr id="24" name="Rounded Rectangle 23"/>
+          <p:cNvPr id="19" name="Rounded Rectangle 18"/>
           <p:cNvSpPr/>
           <p:nvPr/>
         </p:nvSpPr>
@@ -27806,68 +25720,24 @@
           </a:p>
         </p:txBody>
       </p:sp>
-      <p:sp>
-        <p:nvSpPr>
-          <p:cNvPr id="25" name="Oval 24"/>
-          <p:cNvSpPr/>
-          <p:nvPr/>
-        </p:nvSpPr>
-        <p:spPr>
-          <a:xfrm>
-            <a:off x="8183880" y="4133087"/>
-            <a:ext cx="365760" cy="365760"/>
-          </a:xfrm>
-          <a:prstGeom prst="ellipse">
-            <a:avLst/>
-          </a:prstGeom>
-          <a:solidFill>
-            <a:srgbClr val="55D2D8"/>
-          </a:solidFill>
-          <a:ln>
-            <a:noFill/>
-          </a:ln>
-          <a:effectLst/>
-        </p:spPr>
-        <p:style>
-          <a:lnRef idx="1">
-            <a:schemeClr val="accent1"/>
-          </a:lnRef>
-          <a:fillRef idx="3">
-            <a:schemeClr val="accent1"/>
-          </a:fillRef>
-          <a:effectRef idx="2">
-            <a:schemeClr val="accent1"/>
-          </a:effectRef>
-          <a:fontRef idx="minor">
-            <a:schemeClr val="lt1"/>
-          </a:fontRef>
-        </p:style>
-        <p:txBody>
-          <a:bodyPr rtlCol="0" anchor="t" wrap="square" lIns="109728" rIns="109728" tIns="73152" bIns="73152"/>
-          <a:lstStyle/>
-          <a:p>
-            <a:pPr algn="ctr"/>
-          </a:p>
-        </p:txBody>
-      </p:sp>
       <p:pic>
         <p:nvPicPr>
-          <p:cNvPr id="26" name="Picture 25" descr="robot_w.png"/>
+          <p:cNvPr id="20" name="Picture 19" descr="robot_teal.png"/>
           <p:cNvPicPr>
             <a:picLocks noChangeAspect="1"/>
           </p:cNvPicPr>
           <p:nvPr/>
         </p:nvPicPr>
         <p:blipFill>
-          <a:blip r:embed="rId2"/>
+          <a:blip r:embed="rId4"/>
           <a:stretch>
             <a:fillRect/>
           </a:stretch>
         </p:blipFill>
         <p:spPr>
           <a:xfrm>
-            <a:off x="8278977" y="4228185"/>
-            <a:ext cx="175564" cy="175564"/>
+            <a:off x="8125358" y="4074566"/>
+            <a:ext cx="482803" cy="482803"/>
           </a:xfrm>
           <a:prstGeom prst="rect">
             <a:avLst/>
